--- a/Presentation.pptx
+++ b/Presentation.pptx
@@ -1,28 +1,41 @@
 
 <file path=ppt/presentation.xml><?xml version="1.0" encoding="utf-8"?>
-<p:presentation xmlns:a="http://schemas.openxmlformats.org/drawingml/2006/main" xmlns:r="http://schemas.openxmlformats.org/officeDocument/2006/relationships" xmlns:p="http://schemas.openxmlformats.org/presentationml/2006/main" saveSubsetFonts="1" embedTrueTypeFonts="true">
+<p:presentation xmlns:a="http://schemas.openxmlformats.org/drawingml/2006/main" xmlns:r="http://schemas.openxmlformats.org/officeDocument/2006/relationships" xmlns:p="http://schemas.openxmlformats.org/presentationml/2006/main" embedTrueTypeFonts="1" saveSubsetFonts="1">
   <p:sldMasterIdLst>
     <p:sldMasterId id="2147483648" r:id="rId1"/>
   </p:sldMasterIdLst>
+  <p:notesMasterIdLst>
+    <p:notesMasterId r:id="rId10"/>
+  </p:notesMasterIdLst>
   <p:sldIdLst>
-    <p:sldId id="256" r:id="rId6"/>
-    <p:sldId id="257" r:id="rId7"/>
-    <p:sldId id="258" r:id="rId8"/>
+    <p:sldId id="256" r:id="rId2"/>
+    <p:sldId id="257" r:id="rId3"/>
+    <p:sldId id="258" r:id="rId4"/>
+    <p:sldId id="259" r:id="rId5"/>
+    <p:sldId id="260" r:id="rId6"/>
+    <p:sldId id="261" r:id="rId7"/>
+    <p:sldId id="262" r:id="rId8"/>
+    <p:sldId id="263" r:id="rId9"/>
   </p:sldIdLst>
   <p:sldSz cx="18288000" cy="10287000"/>
   <p:notesSz cx="6858000" cy="9144000"/>
   <p:embeddedFontLst>
     <p:embeddedFont>
-      <p:font typeface="Glacial Indifference" charset="1" panose="00000000000000000000"/>
-      <p:regular r:id="rId9"/>
+      <p:font typeface="맑은 고딕" panose="020B0503020000020004" pitchFamily="50" charset="-127"/>
+      <p:regular r:id="rId11"/>
+      <p:bold r:id="rId12"/>
     </p:embeddedFont>
     <p:embeddedFont>
-      <p:font typeface="Garet Light" charset="1" panose="00000000000000000000"/>
-      <p:regular r:id="rId10"/>
+      <p:font typeface="윤고딕" panose="020B0600000101010101" charset="-127"/>
+      <p:regular r:id="rId13"/>
     </p:embeddedFont>
     <p:embeddedFont>
-      <p:font typeface="윤고딕" charset="1" panose="020B0503000000000000"/>
-      <p:regular r:id="rId11"/>
+      <p:font typeface="Garet Light" panose="020B0600000101010101" charset="0"/>
+      <p:regular r:id="rId14"/>
+    </p:embeddedFont>
+    <p:embeddedFont>
+      <p:font typeface="Glacial Indifference" panose="020B0600000101010101" charset="0"/>
+      <p:regular r:id="rId15"/>
     </p:embeddedFont>
   </p:embeddedFontLst>
   <p:defaultTextStyle>
@@ -120,7 +133,556 @@
       </a:defRPr>
     </a:lvl9pPr>
   </p:defaultTextStyle>
+  <p:extLst>
+    <p:ext uri="{EFAFB233-063F-42B5-8137-9DF3F51BA10A}">
+      <p15:sldGuideLst xmlns:p15="http://schemas.microsoft.com/office/powerpoint/2012/main">
+        <p15:guide id="1" orient="horz" pos="2160">
+          <p15:clr>
+            <a:srgbClr val="A4A3A4"/>
+          </p15:clr>
+        </p15:guide>
+        <p15:guide id="2" pos="2880">
+          <p15:clr>
+            <a:srgbClr val="A4A3A4"/>
+          </p15:clr>
+        </p15:guide>
+      </p15:sldGuideLst>
+    </p:ext>
+  </p:extLst>
 </p:presentation>
+</file>
+
+<file path=ppt/notesMasters/notesMaster1.xml><?xml version="1.0" encoding="utf-8"?>
+<p:notesMaster xmlns:a="http://schemas.openxmlformats.org/drawingml/2006/main" xmlns:r="http://schemas.openxmlformats.org/officeDocument/2006/relationships" xmlns:p="http://schemas.openxmlformats.org/presentationml/2006/main">
+  <p:cSld>
+    <p:bg>
+      <p:bgRef idx="1001">
+        <a:schemeClr val="bg1"/>
+      </p:bgRef>
+    </p:bg>
+    <p:spTree>
+      <p:nvGrpSpPr>
+        <p:cNvPr id="1" name=""/>
+        <p:cNvGrpSpPr/>
+        <p:nvPr/>
+      </p:nvGrpSpPr>
+      <p:grpSpPr>
+        <a:xfrm>
+          <a:off x="0" y="0"/>
+          <a:ext cx="0" cy="0"/>
+          <a:chOff x="0" y="0"/>
+          <a:chExt cx="0" cy="0"/>
+        </a:xfrm>
+      </p:grpSpPr>
+      <p:sp>
+        <p:nvSpPr>
+          <p:cNvPr id="2" name="머리글 개체 틀 1"/>
+          <p:cNvSpPr>
+            <a:spLocks noGrp="1"/>
+          </p:cNvSpPr>
+          <p:nvPr>
+            <p:ph type="hdr" sz="quarter"/>
+          </p:nvPr>
+        </p:nvSpPr>
+        <p:spPr>
+          <a:xfrm>
+            <a:off x="0" y="0"/>
+            <a:ext cx="2971800" cy="458788"/>
+          </a:xfrm>
+          <a:prstGeom prst="rect">
+            <a:avLst/>
+          </a:prstGeom>
+        </p:spPr>
+        <p:txBody>
+          <a:bodyPr vert="horz" lIns="91440" tIns="45720" rIns="91440" bIns="45720" rtlCol="0"/>
+          <a:lstStyle>
+            <a:lvl1pPr algn="l">
+              <a:defRPr sz="1200"/>
+            </a:lvl1pPr>
+          </a:lstStyle>
+          <a:p>
+            <a:endParaRPr lang="ko-KR" altLang="en-US"/>
+          </a:p>
+        </p:txBody>
+      </p:sp>
+      <p:sp>
+        <p:nvSpPr>
+          <p:cNvPr id="3" name="날짜 개체 틀 2"/>
+          <p:cNvSpPr>
+            <a:spLocks noGrp="1"/>
+          </p:cNvSpPr>
+          <p:nvPr>
+            <p:ph type="dt" idx="1"/>
+          </p:nvPr>
+        </p:nvSpPr>
+        <p:spPr>
+          <a:xfrm>
+            <a:off x="3884613" y="0"/>
+            <a:ext cx="2971800" cy="458788"/>
+          </a:xfrm>
+          <a:prstGeom prst="rect">
+            <a:avLst/>
+          </a:prstGeom>
+        </p:spPr>
+        <p:txBody>
+          <a:bodyPr vert="horz" lIns="91440" tIns="45720" rIns="91440" bIns="45720" rtlCol="0"/>
+          <a:lstStyle>
+            <a:lvl1pPr algn="r">
+              <a:defRPr sz="1200"/>
+            </a:lvl1pPr>
+          </a:lstStyle>
+          <a:p>
+            <a:fld id="{41380ACF-771A-42F8-8828-7DB254F7E161}" type="datetimeFigureOut">
+              <a:rPr lang="ko-KR" altLang="en-US" smtClean="0"/>
+              <a:t>2025-11-16</a:t>
+            </a:fld>
+            <a:endParaRPr lang="ko-KR" altLang="en-US"/>
+          </a:p>
+        </p:txBody>
+      </p:sp>
+      <p:sp>
+        <p:nvSpPr>
+          <p:cNvPr id="4" name="슬라이드 이미지 개체 틀 3"/>
+          <p:cNvSpPr>
+            <a:spLocks noGrp="1" noRot="1" noChangeAspect="1"/>
+          </p:cNvSpPr>
+          <p:nvPr>
+            <p:ph type="sldImg" idx="2"/>
+          </p:nvPr>
+        </p:nvSpPr>
+        <p:spPr>
+          <a:xfrm>
+            <a:off x="685800" y="1143000"/>
+            <a:ext cx="5486400" cy="3086100"/>
+          </a:xfrm>
+          <a:prstGeom prst="rect">
+            <a:avLst/>
+          </a:prstGeom>
+          <a:noFill/>
+          <a:ln w="12700">
+            <a:solidFill>
+              <a:prstClr val="black"/>
+            </a:solidFill>
+          </a:ln>
+        </p:spPr>
+        <p:txBody>
+          <a:bodyPr vert="horz" lIns="91440" tIns="45720" rIns="91440" bIns="45720" rtlCol="0" anchor="ctr"/>
+          <a:lstStyle/>
+          <a:p>
+            <a:endParaRPr lang="ko-KR" altLang="en-US"/>
+          </a:p>
+        </p:txBody>
+      </p:sp>
+      <p:sp>
+        <p:nvSpPr>
+          <p:cNvPr id="5" name="슬라이드 노트 개체 틀 4"/>
+          <p:cNvSpPr>
+            <a:spLocks noGrp="1"/>
+          </p:cNvSpPr>
+          <p:nvPr>
+            <p:ph type="body" sz="quarter" idx="3"/>
+          </p:nvPr>
+        </p:nvSpPr>
+        <p:spPr>
+          <a:xfrm>
+            <a:off x="685800" y="4400550"/>
+            <a:ext cx="5486400" cy="3600450"/>
+          </a:xfrm>
+          <a:prstGeom prst="rect">
+            <a:avLst/>
+          </a:prstGeom>
+        </p:spPr>
+        <p:txBody>
+          <a:bodyPr vert="horz" lIns="91440" tIns="45720" rIns="91440" bIns="45720" rtlCol="0"/>
+          <a:lstStyle/>
+          <a:p>
+            <a:pPr lvl="0"/>
+            <a:r>
+              <a:rPr lang="ko-KR" altLang="en-US"/>
+              <a:t>마스터 텍스트 스타일을 편집하려면 클릭</a:t>
+            </a:r>
+          </a:p>
+          <a:p>
+            <a:pPr lvl="1"/>
+            <a:r>
+              <a:rPr lang="ko-KR" altLang="en-US"/>
+              <a:t>두 번째 수준</a:t>
+            </a:r>
+          </a:p>
+          <a:p>
+            <a:pPr lvl="2"/>
+            <a:r>
+              <a:rPr lang="ko-KR" altLang="en-US"/>
+              <a:t>세 번째 수준</a:t>
+            </a:r>
+          </a:p>
+          <a:p>
+            <a:pPr lvl="3"/>
+            <a:r>
+              <a:rPr lang="ko-KR" altLang="en-US"/>
+              <a:t>네 번째 수준</a:t>
+            </a:r>
+          </a:p>
+          <a:p>
+            <a:pPr lvl="4"/>
+            <a:r>
+              <a:rPr lang="ko-KR" altLang="en-US"/>
+              <a:t>다섯 번째 수준</a:t>
+            </a:r>
+          </a:p>
+        </p:txBody>
+      </p:sp>
+      <p:sp>
+        <p:nvSpPr>
+          <p:cNvPr id="6" name="바닥글 개체 틀 5"/>
+          <p:cNvSpPr>
+            <a:spLocks noGrp="1"/>
+          </p:cNvSpPr>
+          <p:nvPr>
+            <p:ph type="ftr" sz="quarter" idx="4"/>
+          </p:nvPr>
+        </p:nvSpPr>
+        <p:spPr>
+          <a:xfrm>
+            <a:off x="0" y="8685213"/>
+            <a:ext cx="2971800" cy="458787"/>
+          </a:xfrm>
+          <a:prstGeom prst="rect">
+            <a:avLst/>
+          </a:prstGeom>
+        </p:spPr>
+        <p:txBody>
+          <a:bodyPr vert="horz" lIns="91440" tIns="45720" rIns="91440" bIns="45720" rtlCol="0" anchor="b"/>
+          <a:lstStyle>
+            <a:lvl1pPr algn="l">
+              <a:defRPr sz="1200"/>
+            </a:lvl1pPr>
+          </a:lstStyle>
+          <a:p>
+            <a:endParaRPr lang="ko-KR" altLang="en-US"/>
+          </a:p>
+        </p:txBody>
+      </p:sp>
+      <p:sp>
+        <p:nvSpPr>
+          <p:cNvPr id="7" name="슬라이드 번호 개체 틀 6"/>
+          <p:cNvSpPr>
+            <a:spLocks noGrp="1"/>
+          </p:cNvSpPr>
+          <p:nvPr>
+            <p:ph type="sldNum" sz="quarter" idx="5"/>
+          </p:nvPr>
+        </p:nvSpPr>
+        <p:spPr>
+          <a:xfrm>
+            <a:off x="3884613" y="8685213"/>
+            <a:ext cx="2971800" cy="458787"/>
+          </a:xfrm>
+          <a:prstGeom prst="rect">
+            <a:avLst/>
+          </a:prstGeom>
+        </p:spPr>
+        <p:txBody>
+          <a:bodyPr vert="horz" lIns="91440" tIns="45720" rIns="91440" bIns="45720" rtlCol="0" anchor="b"/>
+          <a:lstStyle>
+            <a:lvl1pPr algn="r">
+              <a:defRPr sz="1200"/>
+            </a:lvl1pPr>
+          </a:lstStyle>
+          <a:p>
+            <a:fld id="{F2523270-F81C-4C3D-B6EA-D56E8B90D334}" type="slidenum">
+              <a:rPr lang="ko-KR" altLang="en-US" smtClean="0"/>
+              <a:t>‹#›</a:t>
+            </a:fld>
+            <a:endParaRPr lang="ko-KR" altLang="en-US"/>
+          </a:p>
+        </p:txBody>
+      </p:sp>
+    </p:spTree>
+    <p:extLst>
+      <p:ext uri="{BB962C8B-B14F-4D97-AF65-F5344CB8AC3E}">
+        <p14:creationId xmlns:p14="http://schemas.microsoft.com/office/powerpoint/2010/main" val="2474574613"/>
+      </p:ext>
+    </p:extLst>
+  </p:cSld>
+  <p:clrMap bg1="lt1" tx1="dk1" bg2="lt2" tx2="dk2" accent1="accent1" accent2="accent2" accent3="accent3" accent4="accent4" accent5="accent5" accent6="accent6" hlink="hlink" folHlink="folHlink"/>
+  <p:notesStyle>
+    <a:lvl1pPr marL="0" algn="l" defTabSz="914400" rtl="0" eaLnBrk="1" latinLnBrk="1" hangingPunct="1">
+      <a:defRPr sz="1200" kern="1200">
+        <a:solidFill>
+          <a:schemeClr val="tx1"/>
+        </a:solidFill>
+        <a:latin typeface="+mn-lt"/>
+        <a:ea typeface="+mn-ea"/>
+        <a:cs typeface="+mn-cs"/>
+      </a:defRPr>
+    </a:lvl1pPr>
+    <a:lvl2pPr marL="457200" algn="l" defTabSz="914400" rtl="0" eaLnBrk="1" latinLnBrk="1" hangingPunct="1">
+      <a:defRPr sz="1200" kern="1200">
+        <a:solidFill>
+          <a:schemeClr val="tx1"/>
+        </a:solidFill>
+        <a:latin typeface="+mn-lt"/>
+        <a:ea typeface="+mn-ea"/>
+        <a:cs typeface="+mn-cs"/>
+      </a:defRPr>
+    </a:lvl2pPr>
+    <a:lvl3pPr marL="914400" algn="l" defTabSz="914400" rtl="0" eaLnBrk="1" latinLnBrk="1" hangingPunct="1">
+      <a:defRPr sz="1200" kern="1200">
+        <a:solidFill>
+          <a:schemeClr val="tx1"/>
+        </a:solidFill>
+        <a:latin typeface="+mn-lt"/>
+        <a:ea typeface="+mn-ea"/>
+        <a:cs typeface="+mn-cs"/>
+      </a:defRPr>
+    </a:lvl3pPr>
+    <a:lvl4pPr marL="1371600" algn="l" defTabSz="914400" rtl="0" eaLnBrk="1" latinLnBrk="1" hangingPunct="1">
+      <a:defRPr sz="1200" kern="1200">
+        <a:solidFill>
+          <a:schemeClr val="tx1"/>
+        </a:solidFill>
+        <a:latin typeface="+mn-lt"/>
+        <a:ea typeface="+mn-ea"/>
+        <a:cs typeface="+mn-cs"/>
+      </a:defRPr>
+    </a:lvl4pPr>
+    <a:lvl5pPr marL="1828800" algn="l" defTabSz="914400" rtl="0" eaLnBrk="1" latinLnBrk="1" hangingPunct="1">
+      <a:defRPr sz="1200" kern="1200">
+        <a:solidFill>
+          <a:schemeClr val="tx1"/>
+        </a:solidFill>
+        <a:latin typeface="+mn-lt"/>
+        <a:ea typeface="+mn-ea"/>
+        <a:cs typeface="+mn-cs"/>
+      </a:defRPr>
+    </a:lvl5pPr>
+    <a:lvl6pPr marL="2286000" algn="l" defTabSz="914400" rtl="0" eaLnBrk="1" latinLnBrk="1" hangingPunct="1">
+      <a:defRPr sz="1200" kern="1200">
+        <a:solidFill>
+          <a:schemeClr val="tx1"/>
+        </a:solidFill>
+        <a:latin typeface="+mn-lt"/>
+        <a:ea typeface="+mn-ea"/>
+        <a:cs typeface="+mn-cs"/>
+      </a:defRPr>
+    </a:lvl6pPr>
+    <a:lvl7pPr marL="2743200" algn="l" defTabSz="914400" rtl="0" eaLnBrk="1" latinLnBrk="1" hangingPunct="1">
+      <a:defRPr sz="1200" kern="1200">
+        <a:solidFill>
+          <a:schemeClr val="tx1"/>
+        </a:solidFill>
+        <a:latin typeface="+mn-lt"/>
+        <a:ea typeface="+mn-ea"/>
+        <a:cs typeface="+mn-cs"/>
+      </a:defRPr>
+    </a:lvl7pPr>
+    <a:lvl8pPr marL="3200400" algn="l" defTabSz="914400" rtl="0" eaLnBrk="1" latinLnBrk="1" hangingPunct="1">
+      <a:defRPr sz="1200" kern="1200">
+        <a:solidFill>
+          <a:schemeClr val="tx1"/>
+        </a:solidFill>
+        <a:latin typeface="+mn-lt"/>
+        <a:ea typeface="+mn-ea"/>
+        <a:cs typeface="+mn-cs"/>
+      </a:defRPr>
+    </a:lvl8pPr>
+    <a:lvl9pPr marL="3657600" algn="l" defTabSz="914400" rtl="0" eaLnBrk="1" latinLnBrk="1" hangingPunct="1">
+      <a:defRPr sz="1200" kern="1200">
+        <a:solidFill>
+          <a:schemeClr val="tx1"/>
+        </a:solidFill>
+        <a:latin typeface="+mn-lt"/>
+        <a:ea typeface="+mn-ea"/>
+        <a:cs typeface="+mn-cs"/>
+      </a:defRPr>
+    </a:lvl9pPr>
+  </p:notesStyle>
+</p:notesMaster>
+</file>
+
+<file path=ppt/notesSlides/notesSlide1.xml><?xml version="1.0" encoding="utf-8"?>
+<p:notes xmlns:a="http://schemas.openxmlformats.org/drawingml/2006/main" xmlns:r="http://schemas.openxmlformats.org/officeDocument/2006/relationships" xmlns:p="http://schemas.openxmlformats.org/presentationml/2006/main">
+  <p:cSld>
+    <p:spTree>
+      <p:nvGrpSpPr>
+        <p:cNvPr id="1" name=""/>
+        <p:cNvGrpSpPr/>
+        <p:nvPr/>
+      </p:nvGrpSpPr>
+      <p:grpSpPr>
+        <a:xfrm>
+          <a:off x="0" y="0"/>
+          <a:ext cx="0" cy="0"/>
+          <a:chOff x="0" y="0"/>
+          <a:chExt cx="0" cy="0"/>
+        </a:xfrm>
+      </p:grpSpPr>
+      <p:sp>
+        <p:nvSpPr>
+          <p:cNvPr id="2" name="Slide Image Placeholder 1"/>
+          <p:cNvSpPr>
+            <a:spLocks noGrp="1" noRot="1" noChangeAspect="1"/>
+          </p:cNvSpPr>
+          <p:nvPr>
+            <p:ph type="sldImg"/>
+          </p:nvPr>
+        </p:nvSpPr>
+        <p:spPr/>
+      </p:sp>
+      <p:sp>
+        <p:nvSpPr>
+          <p:cNvPr id="3" name="Notes Placeholder 2"/>
+          <p:cNvSpPr>
+            <a:spLocks noGrp="1"/>
+          </p:cNvSpPr>
+          <p:nvPr>
+            <p:ph type="body" idx="1"/>
+          </p:nvPr>
+        </p:nvSpPr>
+        <p:spPr/>
+        <p:txBody>
+          <a:bodyPr/>
+          <a:lstStyle/>
+          <a:p>
+            <a:endParaRPr lang="en-KR" dirty="0"/>
+          </a:p>
+        </p:txBody>
+      </p:sp>
+      <p:sp>
+        <p:nvSpPr>
+          <p:cNvPr id="4" name="Slide Number Placeholder 3"/>
+          <p:cNvSpPr>
+            <a:spLocks noGrp="1"/>
+          </p:cNvSpPr>
+          <p:nvPr>
+            <p:ph type="sldNum" sz="quarter" idx="5"/>
+          </p:nvPr>
+        </p:nvSpPr>
+        <p:spPr/>
+        <p:txBody>
+          <a:bodyPr/>
+          <a:lstStyle/>
+          <a:p>
+            <a:fld id="{5CD9D091-C2AB-504C-8DCF-40E70763B075}" type="slidenum">
+              <a:rPr lang="en-KR" smtClean="0"/>
+              <a:t>5</a:t>
+            </a:fld>
+            <a:endParaRPr lang="en-KR"/>
+          </a:p>
+        </p:txBody>
+      </p:sp>
+    </p:spTree>
+    <p:extLst>
+      <p:ext uri="{BB962C8B-B14F-4D97-AF65-F5344CB8AC3E}">
+        <p14:creationId xmlns:p14="http://schemas.microsoft.com/office/powerpoint/2010/main" val="1327429421"/>
+      </p:ext>
+    </p:extLst>
+  </p:cSld>
+  <p:clrMapOvr>
+    <a:masterClrMapping/>
+  </p:clrMapOvr>
+</p:notes>
+</file>
+
+<file path=ppt/notesSlides/notesSlide2.xml><?xml version="1.0" encoding="utf-8"?>
+<p:notes xmlns:a="http://schemas.openxmlformats.org/drawingml/2006/main" xmlns:r="http://schemas.openxmlformats.org/officeDocument/2006/relationships" xmlns:p="http://schemas.openxmlformats.org/presentationml/2006/main">
+  <p:cSld>
+    <p:spTree>
+      <p:nvGrpSpPr>
+        <p:cNvPr id="1" name=""/>
+        <p:cNvGrpSpPr/>
+        <p:nvPr/>
+      </p:nvGrpSpPr>
+      <p:grpSpPr>
+        <a:xfrm>
+          <a:off x="0" y="0"/>
+          <a:ext cx="0" cy="0"/>
+          <a:chOff x="0" y="0"/>
+          <a:chExt cx="0" cy="0"/>
+        </a:xfrm>
+      </p:grpSpPr>
+      <p:sp>
+        <p:nvSpPr>
+          <p:cNvPr id="2" name="Slide Image Placeholder 1"/>
+          <p:cNvSpPr>
+            <a:spLocks noGrp="1" noRot="1" noChangeAspect="1"/>
+          </p:cNvSpPr>
+          <p:nvPr>
+            <p:ph type="sldImg"/>
+          </p:nvPr>
+        </p:nvSpPr>
+        <p:spPr/>
+      </p:sp>
+      <p:sp>
+        <p:nvSpPr>
+          <p:cNvPr id="3" name="Notes Placeholder 2"/>
+          <p:cNvSpPr>
+            <a:spLocks noGrp="1"/>
+          </p:cNvSpPr>
+          <p:nvPr>
+            <p:ph type="body" idx="1"/>
+          </p:nvPr>
+        </p:nvSpPr>
+        <p:spPr/>
+        <p:txBody>
+          <a:bodyPr/>
+          <a:lstStyle/>
+          <a:p>
+            <a:r>
+              <a:rPr lang="en-US" dirty="0"/>
+              <a:t>Worker </a:t>
+            </a:r>
+            <a:r>
+              <a:rPr lang="ko-KR" altLang="en-US" dirty="0"/>
+              <a:t>관점에서 문제가 발생했을 때 </a:t>
+            </a:r>
+            <a:r>
+              <a:rPr lang="en-US" altLang="ko-KR" dirty="0"/>
+              <a:t>master</a:t>
+            </a:r>
+            <a:r>
+              <a:rPr lang="ko-KR" altLang="en-US" dirty="0"/>
+              <a:t>만 호출하면 됨</a:t>
+            </a:r>
+            <a:endParaRPr lang="en-KR" dirty="0"/>
+          </a:p>
+        </p:txBody>
+      </p:sp>
+      <p:sp>
+        <p:nvSpPr>
+          <p:cNvPr id="4" name="Slide Number Placeholder 3"/>
+          <p:cNvSpPr>
+            <a:spLocks noGrp="1"/>
+          </p:cNvSpPr>
+          <p:nvPr>
+            <p:ph type="sldNum" sz="quarter" idx="5"/>
+          </p:nvPr>
+        </p:nvSpPr>
+        <p:spPr/>
+        <p:txBody>
+          <a:bodyPr/>
+          <a:lstStyle/>
+          <a:p>
+            <a:fld id="{5CD9D091-C2AB-504C-8DCF-40E70763B075}" type="slidenum">
+              <a:rPr lang="en-KR" smtClean="0"/>
+              <a:t>6</a:t>
+            </a:fld>
+            <a:endParaRPr lang="en-KR"/>
+          </a:p>
+        </p:txBody>
+      </p:sp>
+    </p:spTree>
+    <p:extLst>
+      <p:ext uri="{BB962C8B-B14F-4D97-AF65-F5344CB8AC3E}">
+        <p14:creationId xmlns:p14="http://schemas.microsoft.com/office/powerpoint/2010/main" val="1291109166"/>
+      </p:ext>
+    </p:extLst>
+  </p:cSld>
+  <p:clrMapOvr>
+    <a:masterClrMapping/>
+  </p:clrMapOvr>
+</p:notes>
 </file>
 
 <file path=ppt/slideLayouts/slideLayout1.xml><?xml version="1.0" encoding="utf-8"?>
@@ -161,10 +723,9 @@
           <a:lstStyle/>
           <a:p>
             <a:r>
-              <a:rPr lang="en-US" smtClean="0"/>
+              <a:rPr lang="en-US"/>
               <a:t>Click to edit Master title style</a:t>
             </a:r>
-            <a:endParaRPr lang="en-US"/>
           </a:p>
         </p:txBody>
       </p:sp>
@@ -280,10 +841,9 @@
           </a:lstStyle>
           <a:p>
             <a:r>
-              <a:rPr lang="en-US" smtClean="0"/>
+              <a:rPr lang="en-US"/>
               <a:t>Click to edit Master subtitle style</a:t>
             </a:r>
-            <a:endParaRPr lang="en-US"/>
           </a:p>
         </p:txBody>
       </p:sp>
@@ -305,7 +865,7 @@
             <a:fld id="{1D8BD707-D9CF-40AE-B4C6-C98DA3205C09}" type="datetimeFigureOut">
               <a:rPr lang="en-US" smtClean="0"/>
               <a:pPr/>
-              <a:t>8/1/2011</a:t>
+              <a:t>11/16/2025</a:t>
             </a:fld>
             <a:endParaRPr lang="en-US"/>
           </a:p>
@@ -395,10 +955,9 @@
           <a:lstStyle/>
           <a:p>
             <a:r>
-              <a:rPr lang="en-US" smtClean="0"/>
+              <a:rPr lang="en-US"/>
               <a:t>Click to edit Master title style</a:t>
             </a:r>
-            <a:endParaRPr lang="en-US"/>
           </a:p>
         </p:txBody>
       </p:sp>
@@ -419,38 +978,37 @@
           <a:p>
             <a:pPr lvl="0"/>
             <a:r>
-              <a:rPr lang="en-US" smtClean="0"/>
+              <a:rPr lang="en-US"/>
               <a:t>Click to edit Master text styles</a:t>
             </a:r>
           </a:p>
           <a:p>
             <a:pPr lvl="1"/>
             <a:r>
-              <a:rPr lang="en-US" smtClean="0"/>
+              <a:rPr lang="en-US"/>
               <a:t>Second level</a:t>
             </a:r>
           </a:p>
           <a:p>
             <a:pPr lvl="2"/>
             <a:r>
-              <a:rPr lang="en-US" smtClean="0"/>
+              <a:rPr lang="en-US"/>
               <a:t>Third level</a:t>
             </a:r>
           </a:p>
           <a:p>
             <a:pPr lvl="3"/>
             <a:r>
-              <a:rPr lang="en-US" smtClean="0"/>
+              <a:rPr lang="en-US"/>
               <a:t>Fourth level</a:t>
             </a:r>
           </a:p>
           <a:p>
             <a:pPr lvl="4"/>
             <a:r>
-              <a:rPr lang="en-US" smtClean="0"/>
+              <a:rPr lang="en-US"/>
               <a:t>Fifth level</a:t>
             </a:r>
-            <a:endParaRPr lang="en-US"/>
           </a:p>
         </p:txBody>
       </p:sp>
@@ -472,7 +1030,7 @@
             <a:fld id="{1D8BD707-D9CF-40AE-B4C6-C98DA3205C09}" type="datetimeFigureOut">
               <a:rPr lang="en-US" smtClean="0"/>
               <a:pPr/>
-              <a:t>8/1/2011</a:t>
+              <a:t>11/16/2025</a:t>
             </a:fld>
             <a:endParaRPr lang="en-US"/>
           </a:p>
@@ -567,10 +1125,9 @@
           <a:lstStyle/>
           <a:p>
             <a:r>
-              <a:rPr lang="en-US" smtClean="0"/>
+              <a:rPr lang="en-US"/>
               <a:t>Click to edit Master title style</a:t>
             </a:r>
-            <a:endParaRPr lang="en-US"/>
           </a:p>
         </p:txBody>
       </p:sp>
@@ -596,38 +1153,37 @@
           <a:p>
             <a:pPr lvl="0"/>
             <a:r>
-              <a:rPr lang="en-US" smtClean="0"/>
+              <a:rPr lang="en-US"/>
               <a:t>Click to edit Master text styles</a:t>
             </a:r>
           </a:p>
           <a:p>
             <a:pPr lvl="1"/>
             <a:r>
-              <a:rPr lang="en-US" smtClean="0"/>
+              <a:rPr lang="en-US"/>
               <a:t>Second level</a:t>
             </a:r>
           </a:p>
           <a:p>
             <a:pPr lvl="2"/>
             <a:r>
-              <a:rPr lang="en-US" smtClean="0"/>
+              <a:rPr lang="en-US"/>
               <a:t>Third level</a:t>
             </a:r>
           </a:p>
           <a:p>
             <a:pPr lvl="3"/>
             <a:r>
-              <a:rPr lang="en-US" smtClean="0"/>
+              <a:rPr lang="en-US"/>
               <a:t>Fourth level</a:t>
             </a:r>
           </a:p>
           <a:p>
             <a:pPr lvl="4"/>
             <a:r>
-              <a:rPr lang="en-US" smtClean="0"/>
+              <a:rPr lang="en-US"/>
               <a:t>Fifth level</a:t>
             </a:r>
-            <a:endParaRPr lang="en-US"/>
           </a:p>
         </p:txBody>
       </p:sp>
@@ -649,7 +1205,7 @@
             <a:fld id="{1D8BD707-D9CF-40AE-B4C6-C98DA3205C09}" type="datetimeFigureOut">
               <a:rPr lang="en-US" smtClean="0"/>
               <a:pPr/>
-              <a:t>8/1/2011</a:t>
+              <a:t>11/16/2025</a:t>
             </a:fld>
             <a:endParaRPr lang="en-US"/>
           </a:p>
@@ -739,10 +1295,9 @@
           <a:lstStyle/>
           <a:p>
             <a:r>
-              <a:rPr lang="en-US" smtClean="0"/>
+              <a:rPr lang="en-US"/>
               <a:t>Click to edit Master title style</a:t>
             </a:r>
-            <a:endParaRPr lang="en-US"/>
           </a:p>
         </p:txBody>
       </p:sp>
@@ -763,38 +1318,37 @@
           <a:p>
             <a:pPr lvl="0"/>
             <a:r>
-              <a:rPr lang="en-US" smtClean="0"/>
+              <a:rPr lang="en-US"/>
               <a:t>Click to edit Master text styles</a:t>
             </a:r>
           </a:p>
           <a:p>
             <a:pPr lvl="1"/>
             <a:r>
-              <a:rPr lang="en-US" smtClean="0"/>
+              <a:rPr lang="en-US"/>
               <a:t>Second level</a:t>
             </a:r>
           </a:p>
           <a:p>
             <a:pPr lvl="2"/>
             <a:r>
-              <a:rPr lang="en-US" smtClean="0"/>
+              <a:rPr lang="en-US"/>
               <a:t>Third level</a:t>
             </a:r>
           </a:p>
           <a:p>
             <a:pPr lvl="3"/>
             <a:r>
-              <a:rPr lang="en-US" smtClean="0"/>
+              <a:rPr lang="en-US"/>
               <a:t>Fourth level</a:t>
             </a:r>
           </a:p>
           <a:p>
             <a:pPr lvl="4"/>
             <a:r>
-              <a:rPr lang="en-US" smtClean="0"/>
+              <a:rPr lang="en-US"/>
               <a:t>Fifth level</a:t>
             </a:r>
-            <a:endParaRPr lang="en-US"/>
           </a:p>
         </p:txBody>
       </p:sp>
@@ -816,7 +1370,7 @@
             <a:fld id="{1D8BD707-D9CF-40AE-B4C6-C98DA3205C09}" type="datetimeFigureOut">
               <a:rPr lang="en-US" smtClean="0"/>
               <a:pPr/>
-              <a:t>8/1/2011</a:t>
+              <a:t>11/16/2025</a:t>
             </a:fld>
             <a:endParaRPr lang="en-US"/>
           </a:p>
@@ -915,10 +1469,9 @@
           </a:lstStyle>
           <a:p>
             <a:r>
-              <a:rPr lang="en-US" smtClean="0"/>
+              <a:rPr lang="en-US"/>
               <a:t>Click to edit Master title style</a:t>
             </a:r>
-            <a:endParaRPr lang="en-US"/>
           </a:p>
         </p:txBody>
       </p:sp>
@@ -1035,7 +1588,7 @@
           <a:p>
             <a:pPr lvl="0"/>
             <a:r>
-              <a:rPr lang="en-US" smtClean="0"/>
+              <a:rPr lang="en-US"/>
               <a:t>Click to edit Master text styles</a:t>
             </a:r>
           </a:p>
@@ -1059,7 +1612,7 @@
             <a:fld id="{1D8BD707-D9CF-40AE-B4C6-C98DA3205C09}" type="datetimeFigureOut">
               <a:rPr lang="en-US" smtClean="0"/>
               <a:pPr/>
-              <a:t>8/1/2011</a:t>
+              <a:t>11/16/2025</a:t>
             </a:fld>
             <a:endParaRPr lang="en-US"/>
           </a:p>
@@ -1149,10 +1702,9 @@
           <a:lstStyle/>
           <a:p>
             <a:r>
-              <a:rPr lang="en-US" smtClean="0"/>
+              <a:rPr lang="en-US"/>
               <a:t>Click to edit Master title style</a:t>
             </a:r>
-            <a:endParaRPr lang="en-US"/>
           </a:p>
         </p:txBody>
       </p:sp>
@@ -1206,38 +1758,37 @@
           <a:p>
             <a:pPr lvl="0"/>
             <a:r>
-              <a:rPr lang="en-US" smtClean="0"/>
+              <a:rPr lang="en-US"/>
               <a:t>Click to edit Master text styles</a:t>
             </a:r>
           </a:p>
           <a:p>
             <a:pPr lvl="1"/>
             <a:r>
-              <a:rPr lang="en-US" smtClean="0"/>
+              <a:rPr lang="en-US"/>
               <a:t>Second level</a:t>
             </a:r>
           </a:p>
           <a:p>
             <a:pPr lvl="2"/>
             <a:r>
-              <a:rPr lang="en-US" smtClean="0"/>
+              <a:rPr lang="en-US"/>
               <a:t>Third level</a:t>
             </a:r>
           </a:p>
           <a:p>
             <a:pPr lvl="3"/>
             <a:r>
-              <a:rPr lang="en-US" smtClean="0"/>
+              <a:rPr lang="en-US"/>
               <a:t>Fourth level</a:t>
             </a:r>
           </a:p>
           <a:p>
             <a:pPr lvl="4"/>
             <a:r>
-              <a:rPr lang="en-US" smtClean="0"/>
+              <a:rPr lang="en-US"/>
               <a:t>Fifth level</a:t>
             </a:r>
-            <a:endParaRPr lang="en-US"/>
           </a:p>
         </p:txBody>
       </p:sp>
@@ -1291,38 +1842,37 @@
           <a:p>
             <a:pPr lvl="0"/>
             <a:r>
-              <a:rPr lang="en-US" smtClean="0"/>
+              <a:rPr lang="en-US"/>
               <a:t>Click to edit Master text styles</a:t>
             </a:r>
           </a:p>
           <a:p>
             <a:pPr lvl="1"/>
             <a:r>
-              <a:rPr lang="en-US" smtClean="0"/>
+              <a:rPr lang="en-US"/>
               <a:t>Second level</a:t>
             </a:r>
           </a:p>
           <a:p>
             <a:pPr lvl="2"/>
             <a:r>
-              <a:rPr lang="en-US" smtClean="0"/>
+              <a:rPr lang="en-US"/>
               <a:t>Third level</a:t>
             </a:r>
           </a:p>
           <a:p>
             <a:pPr lvl="3"/>
             <a:r>
-              <a:rPr lang="en-US" smtClean="0"/>
+              <a:rPr lang="en-US"/>
               <a:t>Fourth level</a:t>
             </a:r>
           </a:p>
           <a:p>
             <a:pPr lvl="4"/>
             <a:r>
-              <a:rPr lang="en-US" smtClean="0"/>
+              <a:rPr lang="en-US"/>
               <a:t>Fifth level</a:t>
             </a:r>
-            <a:endParaRPr lang="en-US"/>
           </a:p>
         </p:txBody>
       </p:sp>
@@ -1344,7 +1894,7 @@
             <a:fld id="{1D8BD707-D9CF-40AE-B4C6-C98DA3205C09}" type="datetimeFigureOut">
               <a:rPr lang="en-US" smtClean="0"/>
               <a:pPr/>
-              <a:t>8/1/2011</a:t>
+              <a:t>11/16/2025</a:t>
             </a:fld>
             <a:endParaRPr lang="en-US"/>
           </a:p>
@@ -1438,10 +1988,9 @@
           </a:lstStyle>
           <a:p>
             <a:r>
-              <a:rPr lang="en-US" smtClean="0"/>
+              <a:rPr lang="en-US"/>
               <a:t>Click to edit Master title style</a:t>
             </a:r>
-            <a:endParaRPr lang="en-US"/>
           </a:p>
         </p:txBody>
       </p:sp>
@@ -1504,7 +2053,7 @@
           <a:p>
             <a:pPr lvl="0"/>
             <a:r>
-              <a:rPr lang="en-US" smtClean="0"/>
+              <a:rPr lang="en-US"/>
               <a:t>Click to edit Master text styles</a:t>
             </a:r>
           </a:p>
@@ -1560,38 +2109,37 @@
           <a:p>
             <a:pPr lvl="0"/>
             <a:r>
-              <a:rPr lang="en-US" smtClean="0"/>
+              <a:rPr lang="en-US"/>
               <a:t>Click to edit Master text styles</a:t>
             </a:r>
           </a:p>
           <a:p>
             <a:pPr lvl="1"/>
             <a:r>
-              <a:rPr lang="en-US" smtClean="0"/>
+              <a:rPr lang="en-US"/>
               <a:t>Second level</a:t>
             </a:r>
           </a:p>
           <a:p>
             <a:pPr lvl="2"/>
             <a:r>
-              <a:rPr lang="en-US" smtClean="0"/>
+              <a:rPr lang="en-US"/>
               <a:t>Third level</a:t>
             </a:r>
           </a:p>
           <a:p>
             <a:pPr lvl="3"/>
             <a:r>
-              <a:rPr lang="en-US" smtClean="0"/>
+              <a:rPr lang="en-US"/>
               <a:t>Fourth level</a:t>
             </a:r>
           </a:p>
           <a:p>
             <a:pPr lvl="4"/>
             <a:r>
-              <a:rPr lang="en-US" smtClean="0"/>
+              <a:rPr lang="en-US"/>
               <a:t>Fifth level</a:t>
             </a:r>
-            <a:endParaRPr lang="en-US"/>
           </a:p>
         </p:txBody>
       </p:sp>
@@ -1654,7 +2202,7 @@
           <a:p>
             <a:pPr lvl="0"/>
             <a:r>
-              <a:rPr lang="en-US" smtClean="0"/>
+              <a:rPr lang="en-US"/>
               <a:t>Click to edit Master text styles</a:t>
             </a:r>
           </a:p>
@@ -1710,38 +2258,37 @@
           <a:p>
             <a:pPr lvl="0"/>
             <a:r>
-              <a:rPr lang="en-US" smtClean="0"/>
+              <a:rPr lang="en-US"/>
               <a:t>Click to edit Master text styles</a:t>
             </a:r>
           </a:p>
           <a:p>
             <a:pPr lvl="1"/>
             <a:r>
-              <a:rPr lang="en-US" smtClean="0"/>
+              <a:rPr lang="en-US"/>
               <a:t>Second level</a:t>
             </a:r>
           </a:p>
           <a:p>
             <a:pPr lvl="2"/>
             <a:r>
-              <a:rPr lang="en-US" smtClean="0"/>
+              <a:rPr lang="en-US"/>
               <a:t>Third level</a:t>
             </a:r>
           </a:p>
           <a:p>
             <a:pPr lvl="3"/>
             <a:r>
-              <a:rPr lang="en-US" smtClean="0"/>
+              <a:rPr lang="en-US"/>
               <a:t>Fourth level</a:t>
             </a:r>
           </a:p>
           <a:p>
             <a:pPr lvl="4"/>
             <a:r>
-              <a:rPr lang="en-US" smtClean="0"/>
+              <a:rPr lang="en-US"/>
               <a:t>Fifth level</a:t>
             </a:r>
-            <a:endParaRPr lang="en-US"/>
           </a:p>
         </p:txBody>
       </p:sp>
@@ -1763,7 +2310,7 @@
             <a:fld id="{1D8BD707-D9CF-40AE-B4C6-C98DA3205C09}" type="datetimeFigureOut">
               <a:rPr lang="en-US" smtClean="0"/>
               <a:pPr/>
-              <a:t>8/1/2011</a:t>
+              <a:t>11/16/2025</a:t>
             </a:fld>
             <a:endParaRPr lang="en-US"/>
           </a:p>
@@ -1853,10 +2400,9 @@
           <a:lstStyle/>
           <a:p>
             <a:r>
-              <a:rPr lang="en-US" smtClean="0"/>
+              <a:rPr lang="en-US"/>
               <a:t>Click to edit Master title style</a:t>
             </a:r>
-            <a:endParaRPr lang="en-US"/>
           </a:p>
         </p:txBody>
       </p:sp>
@@ -1878,7 +2424,7 @@
             <a:fld id="{1D8BD707-D9CF-40AE-B4C6-C98DA3205C09}" type="datetimeFigureOut">
               <a:rPr lang="en-US" smtClean="0"/>
               <a:pPr/>
-              <a:t>8/1/2011</a:t>
+              <a:t>11/16/2025</a:t>
             </a:fld>
             <a:endParaRPr lang="en-US"/>
           </a:p>
@@ -1970,7 +2516,7 @@
             <a:fld id="{1D8BD707-D9CF-40AE-B4C6-C98DA3205C09}" type="datetimeFigureOut">
               <a:rPr lang="en-US" smtClean="0"/>
               <a:pPr/>
-              <a:t>8/1/2011</a:t>
+              <a:t>11/16/2025</a:t>
             </a:fld>
             <a:endParaRPr lang="en-US"/>
           </a:p>
@@ -2069,10 +2615,9 @@
           </a:lstStyle>
           <a:p>
             <a:r>
-              <a:rPr lang="en-US" smtClean="0"/>
+              <a:rPr lang="en-US"/>
               <a:t>Click to edit Master title style</a:t>
             </a:r>
-            <a:endParaRPr lang="en-US"/>
           </a:p>
         </p:txBody>
       </p:sp>
@@ -2126,38 +2671,37 @@
           <a:p>
             <a:pPr lvl="0"/>
             <a:r>
-              <a:rPr lang="en-US" smtClean="0"/>
+              <a:rPr lang="en-US"/>
               <a:t>Click to edit Master text styles</a:t>
             </a:r>
           </a:p>
           <a:p>
             <a:pPr lvl="1"/>
             <a:r>
-              <a:rPr lang="en-US" smtClean="0"/>
+              <a:rPr lang="en-US"/>
               <a:t>Second level</a:t>
             </a:r>
           </a:p>
           <a:p>
             <a:pPr lvl="2"/>
             <a:r>
-              <a:rPr lang="en-US" smtClean="0"/>
+              <a:rPr lang="en-US"/>
               <a:t>Third level</a:t>
             </a:r>
           </a:p>
           <a:p>
             <a:pPr lvl="3"/>
             <a:r>
-              <a:rPr lang="en-US" smtClean="0"/>
+              <a:rPr lang="en-US"/>
               <a:t>Fourth level</a:t>
             </a:r>
           </a:p>
           <a:p>
             <a:pPr lvl="4"/>
             <a:r>
-              <a:rPr lang="en-US" smtClean="0"/>
+              <a:rPr lang="en-US"/>
               <a:t>Fifth level</a:t>
             </a:r>
-            <a:endParaRPr lang="en-US"/>
           </a:p>
         </p:txBody>
       </p:sp>
@@ -2220,7 +2764,7 @@
           <a:p>
             <a:pPr lvl="0"/>
             <a:r>
-              <a:rPr lang="en-US" smtClean="0"/>
+              <a:rPr lang="en-US"/>
               <a:t>Click to edit Master text styles</a:t>
             </a:r>
           </a:p>
@@ -2244,7 +2788,7 @@
             <a:fld id="{1D8BD707-D9CF-40AE-B4C6-C98DA3205C09}" type="datetimeFigureOut">
               <a:rPr lang="en-US" smtClean="0"/>
               <a:pPr/>
-              <a:t>8/1/2011</a:t>
+              <a:t>11/16/2025</a:t>
             </a:fld>
             <a:endParaRPr lang="en-US"/>
           </a:p>
@@ -2343,10 +2887,9 @@
           </a:lstStyle>
           <a:p>
             <a:r>
-              <a:rPr lang="en-US" smtClean="0"/>
+              <a:rPr lang="en-US"/>
               <a:t>Click to edit Master title style</a:t>
             </a:r>
-            <a:endParaRPr lang="en-US"/>
           </a:p>
         </p:txBody>
       </p:sp>
@@ -2470,7 +3013,7 @@
           <a:p>
             <a:pPr lvl="0"/>
             <a:r>
-              <a:rPr lang="en-US" smtClean="0"/>
+              <a:rPr lang="en-US"/>
               <a:t>Click to edit Master text styles</a:t>
             </a:r>
           </a:p>
@@ -2494,7 +3037,7 @@
             <a:fld id="{1D8BD707-D9CF-40AE-B4C6-C98DA3205C09}" type="datetimeFigureOut">
               <a:rPr lang="en-US" smtClean="0"/>
               <a:pPr/>
-              <a:t>8/1/2011</a:t>
+              <a:t>11/16/2025</a:t>
             </a:fld>
             <a:endParaRPr lang="en-US"/>
           </a:p>
@@ -2599,10 +3142,9 @@
           <a:lstStyle/>
           <a:p>
             <a:r>
-              <a:rPr lang="en-US" smtClean="0"/>
+              <a:rPr lang="en-US"/>
               <a:t>Click to edit Master title style</a:t>
             </a:r>
-            <a:endParaRPr lang="en-US"/>
           </a:p>
         </p:txBody>
       </p:sp>
@@ -2633,38 +3175,37 @@
           <a:p>
             <a:pPr lvl="0"/>
             <a:r>
-              <a:rPr lang="en-US" smtClean="0"/>
+              <a:rPr lang="en-US"/>
               <a:t>Click to edit Master text styles</a:t>
             </a:r>
           </a:p>
           <a:p>
             <a:pPr lvl="1"/>
             <a:r>
-              <a:rPr lang="en-US" smtClean="0"/>
+              <a:rPr lang="en-US"/>
               <a:t>Second level</a:t>
             </a:r>
           </a:p>
           <a:p>
             <a:pPr lvl="2"/>
             <a:r>
-              <a:rPr lang="en-US" smtClean="0"/>
+              <a:rPr lang="en-US"/>
               <a:t>Third level</a:t>
             </a:r>
           </a:p>
           <a:p>
             <a:pPr lvl="3"/>
             <a:r>
-              <a:rPr lang="en-US" smtClean="0"/>
+              <a:rPr lang="en-US"/>
               <a:t>Fourth level</a:t>
             </a:r>
           </a:p>
           <a:p>
             <a:pPr lvl="4"/>
             <a:r>
-              <a:rPr lang="en-US" smtClean="0"/>
+              <a:rPr lang="en-US"/>
               <a:t>Fifth level</a:t>
             </a:r>
-            <a:endParaRPr lang="en-US"/>
           </a:p>
         </p:txBody>
       </p:sp>
@@ -2704,7 +3245,7 @@
             <a:fld id="{1D8BD707-D9CF-40AE-B4C6-C98DA3205C09}" type="datetimeFigureOut">
               <a:rPr lang="en-US" smtClean="0"/>
               <a:pPr/>
-              <a:t>8/1/2011</a:t>
+              <a:t>11/16/2025</a:t>
             </a:fld>
             <a:endParaRPr lang="en-US"/>
           </a:p>
@@ -3059,7 +3600,7 @@
 </file>
 
 <file path=ppt/slides/slide1.xml><?xml version="1.0" encoding="utf-8"?>
-<p:sld xmlns:p="http://schemas.openxmlformats.org/presentationml/2006/main" xmlns:a="http://schemas.openxmlformats.org/drawingml/2006/main">
+<p:sld xmlns:a="http://schemas.openxmlformats.org/drawingml/2006/main" xmlns:r="http://schemas.openxmlformats.org/officeDocument/2006/relationships" xmlns:p="http://schemas.openxmlformats.org/presentationml/2006/main">
   <p:cSld>
     <p:spTree>
       <p:nvGrpSpPr>
@@ -3077,12 +3618,12 @@
       </p:grpSpPr>
       <p:grpSp>
         <p:nvGrpSpPr>
-          <p:cNvPr name="Group 2" id="2"/>
+          <p:cNvPr id="2" name="Group 2"/>
           <p:cNvGrpSpPr/>
           <p:nvPr/>
         </p:nvGrpSpPr>
         <p:grpSpPr>
-          <a:xfrm rot="0">
+          <a:xfrm>
             <a:off x="-290868" y="10008764"/>
             <a:ext cx="18869735" cy="120011"/>
             <a:chOff x="0" y="0"/>
@@ -3091,12 +3632,12 @@
         </p:grpSpPr>
         <p:sp>
           <p:nvSpPr>
-            <p:cNvPr name="Freeform 3" id="3"/>
+            <p:cNvPr id="3" name="Freeform 3"/>
             <p:cNvSpPr/>
             <p:nvPr/>
           </p:nvSpPr>
           <p:spPr>
-            <a:xfrm flipH="false" flipV="false" rot="0">
+            <a:xfrm>
               <a:off x="0" y="0"/>
               <a:ext cx="4969807" cy="31608"/>
             </a:xfrm>
@@ -3105,9 +3646,9 @@
               <a:gdLst/>
               <a:ahLst/>
               <a:cxnLst/>
-              <a:rect r="r" b="b" t="t" l="l"/>
+              <a:rect l="l" t="t" r="r" b="b"/>
               <a:pathLst>
-                <a:path h="31608" w="4969807">
+                <a:path w="4969807" h="31608">
                   <a:moveTo>
                     <a:pt x="0" y="0"/>
                   </a:moveTo>
@@ -3136,8 +3677,8 @@
         </p:sp>
         <p:sp>
           <p:nvSpPr>
-            <p:cNvPr name="TextBox 4" id="4"/>
-            <p:cNvSpPr txBox="true"/>
+            <p:cNvPr id="4" name="TextBox 4"/>
+            <p:cNvSpPr txBox="1"/>
             <p:nvPr/>
           </p:nvSpPr>
           <p:spPr>
@@ -3150,7 +3691,7 @@
             </a:prstGeom>
           </p:spPr>
           <p:txBody>
-            <a:bodyPr anchor="ctr" rtlCol="false" tIns="50800" lIns="50800" bIns="50800" rIns="50800"/>
+            <a:bodyPr lIns="50800" tIns="50800" rIns="50800" bIns="50800" rtlCol="0" anchor="ctr"/>
             <a:lstStyle/>
             <a:p>
               <a:pPr algn="ctr">
@@ -3158,18 +3699,19 @@
                   <a:spcPts val="2659"/>
                 </a:lnSpc>
               </a:pPr>
+              <a:endParaRPr/>
             </a:p>
           </p:txBody>
         </p:sp>
       </p:grpSp>
       <p:sp>
         <p:nvSpPr>
-          <p:cNvPr name="TextBox 5" id="5"/>
-          <p:cNvSpPr txBox="true"/>
+          <p:cNvPr id="5" name="TextBox 5"/>
+          <p:cNvSpPr txBox="1"/>
           <p:nvPr/>
         </p:nvSpPr>
         <p:spPr>
-          <a:xfrm rot="0">
+          <a:xfrm>
             <a:off x="4007948" y="2792358"/>
             <a:ext cx="10272104" cy="3037639"/>
           </a:xfrm>
@@ -3178,7 +3720,7 @@
           </a:prstGeom>
         </p:spPr>
         <p:txBody>
-          <a:bodyPr anchor="t" rtlCol="false" tIns="0" lIns="0" bIns="0" rIns="0">
+          <a:bodyPr lIns="0" tIns="0" rIns="0" bIns="0" rtlCol="0" anchor="t">
             <a:spAutoFit/>
           </a:bodyPr>
           <a:lstStyle/>
@@ -3205,12 +3747,12 @@
       </p:sp>
       <p:sp>
         <p:nvSpPr>
-          <p:cNvPr name="TextBox 6" id="6"/>
-          <p:cNvSpPr txBox="true"/>
+          <p:cNvPr id="6" name="TextBox 6"/>
+          <p:cNvSpPr txBox="1"/>
           <p:nvPr/>
         </p:nvSpPr>
         <p:spPr>
-          <a:xfrm rot="0">
+          <a:xfrm>
             <a:off x="1028700" y="8720382"/>
             <a:ext cx="2975952" cy="448310"/>
           </a:xfrm>
@@ -3219,12 +3761,12 @@
           </a:prstGeom>
         </p:spPr>
         <p:txBody>
-          <a:bodyPr anchor="t" rtlCol="false" tIns="0" lIns="0" bIns="0" rIns="0">
+          <a:bodyPr lIns="0" tIns="0" rIns="0" bIns="0" rtlCol="0" anchor="t">
             <a:spAutoFit/>
           </a:bodyPr>
           <a:lstStyle/>
           <a:p>
-            <a:pPr algn="l" marL="0" indent="0" lvl="0">
+            <a:pPr marL="0" lvl="0" indent="0" algn="l">
               <a:lnSpc>
                 <a:spcPts val="3639"/>
               </a:lnSpc>
@@ -3249,12 +3791,12 @@
       </p:sp>
       <p:sp>
         <p:nvSpPr>
-          <p:cNvPr name="TextBox 7" id="7"/>
-          <p:cNvSpPr txBox="true"/>
+          <p:cNvPr id="7" name="TextBox 7"/>
+          <p:cNvSpPr txBox="1"/>
           <p:nvPr/>
         </p:nvSpPr>
         <p:spPr>
-          <a:xfrm rot="0">
+          <a:xfrm>
             <a:off x="13086557" y="8710857"/>
             <a:ext cx="4172743" cy="547443"/>
           </a:xfrm>
@@ -3263,12 +3805,12 @@
           </a:prstGeom>
         </p:spPr>
         <p:txBody>
-          <a:bodyPr anchor="t" rtlCol="false" tIns="0" lIns="0" bIns="0" rIns="0">
+          <a:bodyPr lIns="0" tIns="0" rIns="0" bIns="0" rtlCol="0" anchor="t">
             <a:spAutoFit/>
           </a:bodyPr>
           <a:lstStyle/>
           <a:p>
-            <a:pPr algn="r" marL="0" indent="0" lvl="0">
+            <a:pPr marL="0" lvl="0" indent="0" algn="r">
               <a:lnSpc>
                 <a:spcPts val="4475"/>
               </a:lnSpc>
@@ -3300,7 +3842,7 @@
 </file>
 
 <file path=ppt/slides/slide2.xml><?xml version="1.0" encoding="utf-8"?>
-<p:sld xmlns:p="http://schemas.openxmlformats.org/presentationml/2006/main" xmlns:a="http://schemas.openxmlformats.org/drawingml/2006/main">
+<p:sld xmlns:a="http://schemas.openxmlformats.org/drawingml/2006/main" xmlns:r="http://schemas.openxmlformats.org/officeDocument/2006/relationships" xmlns:p="http://schemas.openxmlformats.org/presentationml/2006/main">
   <p:cSld>
     <p:spTree>
       <p:nvGrpSpPr>
@@ -3318,12 +3860,12 @@
       </p:grpSpPr>
       <p:grpSp>
         <p:nvGrpSpPr>
-          <p:cNvPr name="Group 2" id="2"/>
+          <p:cNvPr id="2" name="Group 2"/>
           <p:cNvGrpSpPr/>
           <p:nvPr/>
         </p:nvGrpSpPr>
         <p:grpSpPr>
-          <a:xfrm rot="0">
+          <a:xfrm>
             <a:off x="-290868" y="10008764"/>
             <a:ext cx="18869735" cy="120011"/>
             <a:chOff x="0" y="0"/>
@@ -3332,12 +3874,12 @@
         </p:grpSpPr>
         <p:sp>
           <p:nvSpPr>
-            <p:cNvPr name="Freeform 3" id="3"/>
+            <p:cNvPr id="3" name="Freeform 3"/>
             <p:cNvSpPr/>
             <p:nvPr/>
           </p:nvSpPr>
           <p:spPr>
-            <a:xfrm flipH="false" flipV="false" rot="0">
+            <a:xfrm>
               <a:off x="0" y="0"/>
               <a:ext cx="4969807" cy="31608"/>
             </a:xfrm>
@@ -3346,9 +3888,9 @@
               <a:gdLst/>
               <a:ahLst/>
               <a:cxnLst/>
-              <a:rect r="r" b="b" t="t" l="l"/>
+              <a:rect l="l" t="t" r="r" b="b"/>
               <a:pathLst>
-                <a:path h="31608" w="4969807">
+                <a:path w="4969807" h="31608">
                   <a:moveTo>
                     <a:pt x="0" y="0"/>
                   </a:moveTo>
@@ -3379,8 +3921,8 @@
         </p:sp>
         <p:sp>
           <p:nvSpPr>
-            <p:cNvPr name="TextBox 4" id="4"/>
-            <p:cNvSpPr txBox="true"/>
+            <p:cNvPr id="4" name="TextBox 4"/>
+            <p:cNvSpPr txBox="1"/>
             <p:nvPr/>
           </p:nvSpPr>
           <p:spPr>
@@ -3393,7 +3935,7 @@
             </a:prstGeom>
           </p:spPr>
           <p:txBody>
-            <a:bodyPr anchor="ctr" rtlCol="false" tIns="50800" lIns="50800" bIns="50800" rIns="50800"/>
+            <a:bodyPr lIns="50800" tIns="50800" rIns="50800" bIns="50800" rtlCol="0" anchor="ctr"/>
             <a:lstStyle/>
             <a:p>
               <a:pPr algn="ctr">
@@ -3401,18 +3943,19 @@
                   <a:spcPts val="2659"/>
                 </a:lnSpc>
               </a:pPr>
+              <a:endParaRPr/>
             </a:p>
           </p:txBody>
         </p:sp>
       </p:grpSp>
       <p:sp>
         <p:nvSpPr>
-          <p:cNvPr name="TextBox 5" id="5"/>
-          <p:cNvSpPr txBox="true"/>
+          <p:cNvPr id="5" name="TextBox 5"/>
+          <p:cNvSpPr txBox="1"/>
           <p:nvPr/>
         </p:nvSpPr>
         <p:spPr>
-          <a:xfrm rot="0">
+          <a:xfrm>
             <a:off x="13378146" y="790575"/>
             <a:ext cx="3881154" cy="438785"/>
           </a:xfrm>
@@ -3421,7 +3964,7 @@
           </a:prstGeom>
         </p:spPr>
         <p:txBody>
-          <a:bodyPr anchor="t" rtlCol="false" tIns="0" lIns="0" bIns="0" rIns="0">
+          <a:bodyPr lIns="0" tIns="0" rIns="0" bIns="0" rtlCol="0" anchor="t">
             <a:spAutoFit/>
           </a:bodyPr>
           <a:lstStyle/>
@@ -3451,12 +3994,12 @@
       </p:sp>
       <p:sp>
         <p:nvSpPr>
-          <p:cNvPr name="TextBox 6" id="6"/>
-          <p:cNvSpPr txBox="true"/>
+          <p:cNvPr id="6" name="TextBox 6"/>
+          <p:cNvSpPr txBox="1"/>
           <p:nvPr/>
         </p:nvSpPr>
         <p:spPr>
-          <a:xfrm rot="0">
+          <a:xfrm>
             <a:off x="206108" y="944123"/>
             <a:ext cx="3104115" cy="794850"/>
           </a:xfrm>
@@ -3465,7 +4008,7 @@
           </a:prstGeom>
         </p:spPr>
         <p:txBody>
-          <a:bodyPr anchor="t" rtlCol="false" tIns="0" lIns="0" bIns="0" rIns="0">
+          <a:bodyPr lIns="0" tIns="0" rIns="0" bIns="0" rtlCol="0" anchor="t">
             <a:spAutoFit/>
           </a:bodyPr>
           <a:lstStyle/>
@@ -3495,7 +4038,7 @@
       </p:sp>
       <p:sp>
         <p:nvSpPr>
-          <p:cNvPr name="AutoShape 7" id="7"/>
+          <p:cNvPr id="7" name="AutoShape 7"/>
           <p:cNvSpPr/>
           <p:nvPr/>
         </p:nvSpPr>
@@ -3507,24 +4050,24 @@
           <a:prstGeom prst="line">
             <a:avLst/>
           </a:prstGeom>
-          <a:ln cap="flat" w="38100">
+          <a:ln w="38100" cap="flat">
             <a:solidFill>
               <a:srgbClr val="191919"/>
             </a:solidFill>
             <a:prstDash val="solid"/>
-            <a:headEnd type="none" len="sm" w="sm"/>
-            <a:tailEnd type="none" len="sm" w="sm"/>
+            <a:headEnd type="none" w="sm" len="sm"/>
+            <a:tailEnd type="none" w="sm" len="sm"/>
           </a:ln>
         </p:spPr>
       </p:sp>
       <p:sp>
         <p:nvSpPr>
-          <p:cNvPr name="TextBox 8" id="8"/>
-          <p:cNvSpPr txBox="true"/>
+          <p:cNvPr id="8" name="TextBox 8"/>
+          <p:cNvSpPr txBox="1"/>
           <p:nvPr/>
         </p:nvSpPr>
         <p:spPr>
-          <a:xfrm rot="0">
+          <a:xfrm>
             <a:off x="1758166" y="3721851"/>
             <a:ext cx="8370571" cy="507366"/>
           </a:xfrm>
@@ -3533,7 +4076,7 @@
           </a:prstGeom>
         </p:spPr>
         <p:txBody>
-          <a:bodyPr anchor="t" rtlCol="false" tIns="0" lIns="0" bIns="0" rIns="0">
+          <a:bodyPr lIns="0" tIns="0" rIns="0" bIns="0" rtlCol="0" anchor="t">
             <a:spAutoFit/>
           </a:bodyPr>
           <a:lstStyle/>
@@ -3563,12 +4106,12 @@
       </p:sp>
       <p:sp>
         <p:nvSpPr>
-          <p:cNvPr name="TextBox 9" id="9"/>
-          <p:cNvSpPr txBox="true"/>
+          <p:cNvPr id="9" name="TextBox 9"/>
+          <p:cNvSpPr txBox="1"/>
           <p:nvPr/>
         </p:nvSpPr>
         <p:spPr>
-          <a:xfrm rot="0">
+          <a:xfrm>
             <a:off x="1758166" y="4965182"/>
             <a:ext cx="8370571" cy="507366"/>
           </a:xfrm>
@@ -3577,7 +4120,7 @@
           </a:prstGeom>
         </p:spPr>
         <p:txBody>
-          <a:bodyPr anchor="t" rtlCol="false" tIns="0" lIns="0" bIns="0" rIns="0">
+          <a:bodyPr lIns="0" tIns="0" rIns="0" bIns="0" rtlCol="0" anchor="t">
             <a:spAutoFit/>
           </a:bodyPr>
           <a:lstStyle/>
@@ -3607,12 +4150,12 @@
       </p:sp>
       <p:sp>
         <p:nvSpPr>
-          <p:cNvPr name="TextBox 10" id="10"/>
-          <p:cNvSpPr txBox="true"/>
+          <p:cNvPr id="10" name="TextBox 10"/>
+          <p:cNvSpPr txBox="1"/>
           <p:nvPr/>
         </p:nvSpPr>
         <p:spPr>
-          <a:xfrm rot="0">
+          <a:xfrm>
             <a:off x="1758166" y="6208514"/>
             <a:ext cx="8370571" cy="507366"/>
           </a:xfrm>
@@ -3621,7 +4164,7 @@
           </a:prstGeom>
         </p:spPr>
         <p:txBody>
-          <a:bodyPr anchor="t" rtlCol="false" tIns="0" lIns="0" bIns="0" rIns="0">
+          <a:bodyPr lIns="0" tIns="0" rIns="0" bIns="0" rtlCol="0" anchor="t">
             <a:spAutoFit/>
           </a:bodyPr>
           <a:lstStyle/>
@@ -3651,12 +4194,12 @@
       </p:sp>
       <p:sp>
         <p:nvSpPr>
-          <p:cNvPr name="TextBox 11" id="11"/>
-          <p:cNvSpPr txBox="true"/>
+          <p:cNvPr id="11" name="TextBox 11"/>
+          <p:cNvSpPr txBox="1"/>
           <p:nvPr/>
         </p:nvSpPr>
         <p:spPr>
-          <a:xfrm rot="0">
+          <a:xfrm>
             <a:off x="1758166" y="7451845"/>
             <a:ext cx="8370571" cy="507366"/>
           </a:xfrm>
@@ -3665,7 +4208,7 @@
           </a:prstGeom>
         </p:spPr>
         <p:txBody>
-          <a:bodyPr anchor="t" rtlCol="false" tIns="0" lIns="0" bIns="0" rIns="0">
+          <a:bodyPr lIns="0" tIns="0" rIns="0" bIns="0" rtlCol="0" anchor="t">
             <a:spAutoFit/>
           </a:bodyPr>
           <a:lstStyle/>
@@ -3702,7 +4245,7 @@
 </file>
 
 <file path=ppt/slides/slide3.xml><?xml version="1.0" encoding="utf-8"?>
-<p:sld xmlns:p="http://schemas.openxmlformats.org/presentationml/2006/main" xmlns:a="http://schemas.openxmlformats.org/drawingml/2006/main" xmlns:r="http://schemas.openxmlformats.org/officeDocument/2006/relationships">
+<p:sld xmlns:a="http://schemas.openxmlformats.org/drawingml/2006/main" xmlns:r="http://schemas.openxmlformats.org/officeDocument/2006/relationships" xmlns:p="http://schemas.openxmlformats.org/presentationml/2006/main">
   <p:cSld>
     <p:spTree>
       <p:nvGrpSpPr>
@@ -3720,12 +4263,12 @@
       </p:grpSpPr>
       <p:grpSp>
         <p:nvGrpSpPr>
-          <p:cNvPr name="Group 2" id="2"/>
+          <p:cNvPr id="2" name="Group 2"/>
           <p:cNvGrpSpPr/>
           <p:nvPr/>
         </p:nvGrpSpPr>
         <p:grpSpPr>
-          <a:xfrm rot="0">
+          <a:xfrm>
             <a:off x="-290868" y="10008764"/>
             <a:ext cx="18869735" cy="120011"/>
             <a:chOff x="0" y="0"/>
@@ -3734,12 +4277,12 @@
         </p:grpSpPr>
         <p:sp>
           <p:nvSpPr>
-            <p:cNvPr name="Freeform 3" id="3"/>
+            <p:cNvPr id="3" name="Freeform 3"/>
             <p:cNvSpPr/>
             <p:nvPr/>
           </p:nvSpPr>
           <p:spPr>
-            <a:xfrm flipH="false" flipV="false" rot="0">
+            <a:xfrm>
               <a:off x="0" y="0"/>
               <a:ext cx="4969807" cy="31608"/>
             </a:xfrm>
@@ -3748,9 +4291,9 @@
               <a:gdLst/>
               <a:ahLst/>
               <a:cxnLst/>
-              <a:rect r="r" b="b" t="t" l="l"/>
+              <a:rect l="l" t="t" r="r" b="b"/>
               <a:pathLst>
-                <a:path h="31608" w="4969807">
+                <a:path w="4969807" h="31608">
                   <a:moveTo>
                     <a:pt x="0" y="0"/>
                   </a:moveTo>
@@ -3781,8 +4324,8 @@
         </p:sp>
         <p:sp>
           <p:nvSpPr>
-            <p:cNvPr name="TextBox 4" id="4"/>
-            <p:cNvSpPr txBox="true"/>
+            <p:cNvPr id="4" name="TextBox 4"/>
+            <p:cNvSpPr txBox="1"/>
             <p:nvPr/>
           </p:nvSpPr>
           <p:spPr>
@@ -3795,7 +4338,7 @@
             </a:prstGeom>
           </p:spPr>
           <p:txBody>
-            <a:bodyPr anchor="ctr" rtlCol="false" tIns="50800" lIns="50800" bIns="50800" rIns="50800"/>
+            <a:bodyPr lIns="50800" tIns="50800" rIns="50800" bIns="50800" rtlCol="0" anchor="ctr"/>
             <a:lstStyle/>
             <a:p>
               <a:pPr algn="ctr">
@@ -3803,13 +4346,14 @@
                   <a:spcPts val="2659"/>
                 </a:lnSpc>
               </a:pPr>
+              <a:endParaRPr/>
             </a:p>
           </p:txBody>
         </p:sp>
       </p:grpSp>
       <p:sp>
         <p:nvSpPr>
-          <p:cNvPr name="AutoShape 5" id="5"/>
+          <p:cNvPr id="5" name="AutoShape 5"/>
           <p:cNvSpPr/>
           <p:nvPr/>
         </p:nvSpPr>
@@ -3821,24 +4365,24 @@
           <a:prstGeom prst="line">
             <a:avLst/>
           </a:prstGeom>
-          <a:ln cap="flat" w="38100">
+          <a:ln w="38100" cap="flat">
             <a:solidFill>
               <a:srgbClr val="191919"/>
             </a:solidFill>
             <a:prstDash val="solid"/>
-            <a:headEnd type="none" len="sm" w="sm"/>
-            <a:tailEnd type="none" len="sm" w="sm"/>
+            <a:headEnd type="none" w="sm" len="sm"/>
+            <a:tailEnd type="none" w="sm" len="sm"/>
           </a:ln>
         </p:spPr>
       </p:sp>
       <p:sp>
         <p:nvSpPr>
-          <p:cNvPr name="Freeform 6" id="6"/>
+          <p:cNvPr id="6" name="Freeform 6"/>
           <p:cNvSpPr/>
           <p:nvPr/>
         </p:nvSpPr>
         <p:spPr>
-          <a:xfrm flipH="false" flipV="false" rot="0">
+          <a:xfrm>
             <a:off x="4463094" y="2406367"/>
             <a:ext cx="5459632" cy="5414881"/>
           </a:xfrm>
@@ -3847,9 +4391,9 @@
             <a:gdLst/>
             <a:ahLst/>
             <a:cxnLst/>
-            <a:rect r="r" b="b" t="t" l="l"/>
+            <a:rect l="l" t="t" r="r" b="b"/>
             <a:pathLst>
-              <a:path h="5414881" w="5459632">
+              <a:path w="5459632" h="5414881">
                 <a:moveTo>
                   <a:pt x="0" y="0"/>
                 </a:moveTo>
@@ -3872,19 +4416,19 @@
           <a:blipFill>
             <a:blip r:embed="rId2"/>
             <a:stretch>
-              <a:fillRect l="0" t="0" r="0" b="0"/>
+              <a:fillRect/>
             </a:stretch>
           </a:blipFill>
         </p:spPr>
       </p:sp>
       <p:sp>
         <p:nvSpPr>
-          <p:cNvPr name="Freeform 7" id="7"/>
+          <p:cNvPr id="7" name="Freeform 7"/>
           <p:cNvSpPr/>
           <p:nvPr/>
         </p:nvSpPr>
         <p:spPr>
-          <a:xfrm flipH="false" flipV="false" rot="0">
+          <a:xfrm>
             <a:off x="10426093" y="2165680"/>
             <a:ext cx="3079360" cy="5887162"/>
           </a:xfrm>
@@ -3893,9 +4437,9 @@
             <a:gdLst/>
             <a:ahLst/>
             <a:cxnLst/>
-            <a:rect r="r" b="b" t="t" l="l"/>
+            <a:rect l="l" t="t" r="r" b="b"/>
             <a:pathLst>
-              <a:path h="5887162" w="3079360">
+              <a:path w="3079360" h="5887162">
                 <a:moveTo>
                   <a:pt x="0" y="0"/>
                 </a:moveTo>
@@ -3918,19 +4462,19 @@
           <a:blipFill>
             <a:blip r:embed="rId3"/>
             <a:stretch>
-              <a:fillRect l="0" t="0" r="-58465" b="0"/>
+              <a:fillRect r="-58465"/>
             </a:stretch>
           </a:blipFill>
         </p:spPr>
       </p:sp>
       <p:sp>
         <p:nvSpPr>
-          <p:cNvPr name="Freeform 8" id="8"/>
+          <p:cNvPr id="8" name="Freeform 8"/>
           <p:cNvSpPr/>
           <p:nvPr/>
         </p:nvSpPr>
         <p:spPr>
-          <a:xfrm flipH="false" flipV="false" rot="0">
+          <a:xfrm>
             <a:off x="1722547" y="2376674"/>
             <a:ext cx="2740547" cy="5474267"/>
           </a:xfrm>
@@ -3939,9 +4483,9 @@
             <a:gdLst/>
             <a:ahLst/>
             <a:cxnLst/>
-            <a:rect r="r" b="b" t="t" l="l"/>
+            <a:rect l="l" t="t" r="r" b="b"/>
             <a:pathLst>
-              <a:path h="5474267" w="2740547">
+              <a:path w="2740547" h="5474267">
                 <a:moveTo>
                   <a:pt x="0" y="0"/>
                 </a:moveTo>
@@ -3964,19 +4508,19 @@
           <a:blipFill>
             <a:blip r:embed="rId4"/>
             <a:stretch>
-              <a:fillRect l="0" t="0" r="-122520" b="0"/>
+              <a:fillRect r="-122520"/>
             </a:stretch>
           </a:blipFill>
         </p:spPr>
       </p:sp>
       <p:sp>
         <p:nvSpPr>
-          <p:cNvPr name="Freeform 9" id="9"/>
+          <p:cNvPr id="9" name="Freeform 9"/>
           <p:cNvSpPr/>
           <p:nvPr/>
         </p:nvSpPr>
         <p:spPr>
-          <a:xfrm flipH="false" flipV="false" rot="0">
+          <a:xfrm>
             <a:off x="14010278" y="2165680"/>
             <a:ext cx="3844526" cy="5878070"/>
           </a:xfrm>
@@ -3985,9 +4529,9 @@
             <a:gdLst/>
             <a:ahLst/>
             <a:cxnLst/>
-            <a:rect r="r" b="b" t="t" l="l"/>
+            <a:rect l="l" t="t" r="r" b="b"/>
             <a:pathLst>
-              <a:path h="5878070" w="3844526">
+              <a:path w="3844526" h="5878070">
                 <a:moveTo>
                   <a:pt x="0" y="0"/>
                 </a:moveTo>
@@ -4010,19 +4554,19 @@
           <a:blipFill>
             <a:blip r:embed="rId5"/>
             <a:stretch>
-              <a:fillRect l="0" t="0" r="-52698" b="0"/>
+              <a:fillRect r="-52698"/>
             </a:stretch>
           </a:blipFill>
         </p:spPr>
       </p:sp>
       <p:sp>
         <p:nvSpPr>
-          <p:cNvPr name="TextBox 10" id="10"/>
-          <p:cNvSpPr txBox="true"/>
+          <p:cNvPr id="10" name="TextBox 10"/>
+          <p:cNvSpPr txBox="1"/>
           <p:nvPr/>
         </p:nvSpPr>
         <p:spPr>
-          <a:xfrm rot="0">
+          <a:xfrm>
             <a:off x="13378146" y="790575"/>
             <a:ext cx="3881154" cy="438785"/>
           </a:xfrm>
@@ -4031,7 +4575,7 @@
           </a:prstGeom>
         </p:spPr>
         <p:txBody>
-          <a:bodyPr anchor="t" rtlCol="false" tIns="0" lIns="0" bIns="0" rIns="0">
+          <a:bodyPr lIns="0" tIns="0" rIns="0" bIns="0" rtlCol="0" anchor="t">
             <a:spAutoFit/>
           </a:bodyPr>
           <a:lstStyle/>
@@ -4061,12 +4605,12 @@
       </p:sp>
       <p:sp>
         <p:nvSpPr>
-          <p:cNvPr name="TextBox 11" id="11"/>
-          <p:cNvSpPr txBox="true"/>
+          <p:cNvPr id="11" name="TextBox 11"/>
+          <p:cNvSpPr txBox="1"/>
           <p:nvPr/>
         </p:nvSpPr>
         <p:spPr>
-          <a:xfrm rot="0">
+          <a:xfrm>
             <a:off x="0" y="944123"/>
             <a:ext cx="4463094" cy="794850"/>
           </a:xfrm>
@@ -4075,7 +4619,7 @@
           </a:prstGeom>
         </p:spPr>
         <p:txBody>
-          <a:bodyPr anchor="t" rtlCol="false" tIns="0" lIns="0" bIns="0" rIns="0">
+          <a:bodyPr lIns="0" tIns="0" rIns="0" bIns="0" rtlCol="0" anchor="t">
             <a:spAutoFit/>
           </a:bodyPr>
           <a:lstStyle/>
@@ -4104,6 +4648,4024 @@
         </p:txBody>
       </p:sp>
     </p:spTree>
+  </p:cSld>
+  <p:clrMapOvr>
+    <a:masterClrMapping/>
+  </p:clrMapOvr>
+</p:sld>
+</file>
+
+<file path=ppt/slides/slide4.xml><?xml version="1.0" encoding="utf-8"?>
+<p:sld xmlns:a="http://schemas.openxmlformats.org/drawingml/2006/main" xmlns:r="http://schemas.openxmlformats.org/officeDocument/2006/relationships" xmlns:p="http://schemas.openxmlformats.org/presentationml/2006/main">
+  <p:cSld>
+    <p:spTree>
+      <p:nvGrpSpPr>
+        <p:cNvPr id="1" name=""/>
+        <p:cNvGrpSpPr/>
+        <p:nvPr/>
+      </p:nvGrpSpPr>
+      <p:grpSpPr>
+        <a:xfrm>
+          <a:off x="0" y="0"/>
+          <a:ext cx="0" cy="0"/>
+          <a:chOff x="0" y="0"/>
+          <a:chExt cx="0" cy="0"/>
+        </a:xfrm>
+      </p:grpSpPr>
+      <p:sp>
+        <p:nvSpPr>
+          <p:cNvPr id="2" name="Title 1">
+            <a:extLst>
+              <a:ext uri="{FF2B5EF4-FFF2-40B4-BE49-F238E27FC236}">
+                <a16:creationId xmlns:a16="http://schemas.microsoft.com/office/drawing/2014/main" id="{2E4F49C3-A872-02A1-0D03-46F8CC16F148}"/>
+              </a:ext>
+            </a:extLst>
+          </p:cNvPr>
+          <p:cNvSpPr>
+            <a:spLocks noGrp="1"/>
+          </p:cNvSpPr>
+          <p:nvPr>
+            <p:ph type="title"/>
+          </p:nvPr>
+        </p:nvSpPr>
+        <p:spPr/>
+        <p:txBody>
+          <a:bodyPr/>
+          <a:lstStyle/>
+          <a:p>
+            <a:r>
+              <a:rPr lang="en-US" dirty="0"/>
+              <a:t>Problem Definition</a:t>
+            </a:r>
+            <a:endParaRPr lang="en-KR" dirty="0"/>
+          </a:p>
+        </p:txBody>
+      </p:sp>
+      <p:pic>
+        <p:nvPicPr>
+          <p:cNvPr id="5" name="Graphic 4" descr="Crown with solid fill">
+            <a:extLst>
+              <a:ext uri="{FF2B5EF4-FFF2-40B4-BE49-F238E27FC236}">
+                <a16:creationId xmlns:a16="http://schemas.microsoft.com/office/drawing/2014/main" id="{C44B1878-4738-1638-A41B-5061EB576705}"/>
+              </a:ext>
+            </a:extLst>
+          </p:cNvPr>
+          <p:cNvPicPr>
+            <a:picLocks noChangeAspect="1"/>
+          </p:cNvPicPr>
+          <p:nvPr/>
+        </p:nvPicPr>
+        <p:blipFill>
+          <a:blip r:embed="rId2">
+            <a:extLst>
+              <a:ext uri="{96DAC541-7B7A-43D3-8B79-37D633B846F1}">
+                <asvg:svgBlip xmlns:asvg="http://schemas.microsoft.com/office/drawing/2016/SVG/main" r:embed="rId3"/>
+              </a:ext>
+            </a:extLst>
+          </a:blip>
+          <a:stretch>
+            <a:fillRect/>
+          </a:stretch>
+        </p:blipFill>
+        <p:spPr>
+          <a:xfrm>
+            <a:off x="8458200" y="1541859"/>
+            <a:ext cx="1371600" cy="1371600"/>
+          </a:xfrm>
+          <a:prstGeom prst="rect">
+            <a:avLst/>
+          </a:prstGeom>
+        </p:spPr>
+      </p:pic>
+      <p:sp>
+        <p:nvSpPr>
+          <p:cNvPr id="6" name="Rectangle 5">
+            <a:extLst>
+              <a:ext uri="{FF2B5EF4-FFF2-40B4-BE49-F238E27FC236}">
+                <a16:creationId xmlns:a16="http://schemas.microsoft.com/office/drawing/2014/main" id="{82C5E866-3723-1971-925E-6FD119AA167F}"/>
+              </a:ext>
+            </a:extLst>
+          </p:cNvPr>
+          <p:cNvSpPr/>
+          <p:nvPr/>
+        </p:nvSpPr>
+        <p:spPr>
+          <a:xfrm>
+            <a:off x="2422733" y="5691500"/>
+            <a:ext cx="1589519" cy="769121"/>
+          </a:xfrm>
+          <a:prstGeom prst="rect">
+            <a:avLst/>
+          </a:prstGeom>
+          <a:solidFill>
+            <a:schemeClr val="bg1">
+              <a:lumMod val="50000"/>
+            </a:schemeClr>
+          </a:solidFill>
+          <a:ln>
+            <a:solidFill>
+              <a:schemeClr val="bg1">
+                <a:lumMod val="50000"/>
+              </a:schemeClr>
+            </a:solidFill>
+          </a:ln>
+        </p:spPr>
+        <p:style>
+          <a:lnRef idx="2">
+            <a:schemeClr val="accent1">
+              <a:shade val="15000"/>
+            </a:schemeClr>
+          </a:lnRef>
+          <a:fillRef idx="1">
+            <a:schemeClr val="accent1"/>
+          </a:fillRef>
+          <a:effectRef idx="0">
+            <a:schemeClr val="accent1"/>
+          </a:effectRef>
+          <a:fontRef idx="minor">
+            <a:schemeClr val="lt1"/>
+          </a:fontRef>
+        </p:style>
+        <p:txBody>
+          <a:bodyPr rtlCol="0" anchor="ctr"/>
+          <a:lstStyle/>
+          <a:p>
+            <a:pPr algn="ctr"/>
+            <a:r>
+              <a:rPr lang="en-US" altLang="ko-KR" sz="2700" dirty="0" err="1"/>
+              <a:t>cpu</a:t>
+            </a:r>
+            <a:endParaRPr lang="en-KR" sz="2700" dirty="0"/>
+          </a:p>
+        </p:txBody>
+      </p:sp>
+      <p:sp>
+        <p:nvSpPr>
+          <p:cNvPr id="7" name="Rectangle 6">
+            <a:extLst>
+              <a:ext uri="{FF2B5EF4-FFF2-40B4-BE49-F238E27FC236}">
+                <a16:creationId xmlns:a16="http://schemas.microsoft.com/office/drawing/2014/main" id="{2DA9701C-E5CB-A7CA-315E-C990A29067CA}"/>
+              </a:ext>
+            </a:extLst>
+          </p:cNvPr>
+          <p:cNvSpPr/>
+          <p:nvPr/>
+        </p:nvSpPr>
+        <p:spPr>
+          <a:xfrm>
+            <a:off x="2422732" y="6740497"/>
+            <a:ext cx="1589519" cy="769121"/>
+          </a:xfrm>
+          <a:prstGeom prst="rect">
+            <a:avLst/>
+          </a:prstGeom>
+          <a:solidFill>
+            <a:schemeClr val="bg1">
+              <a:lumMod val="50000"/>
+            </a:schemeClr>
+          </a:solidFill>
+          <a:ln>
+            <a:solidFill>
+              <a:schemeClr val="bg1">
+                <a:lumMod val="50000"/>
+              </a:schemeClr>
+            </a:solidFill>
+          </a:ln>
+        </p:spPr>
+        <p:style>
+          <a:lnRef idx="2">
+            <a:schemeClr val="accent1">
+              <a:shade val="15000"/>
+            </a:schemeClr>
+          </a:lnRef>
+          <a:fillRef idx="1">
+            <a:schemeClr val="accent1"/>
+          </a:fillRef>
+          <a:effectRef idx="0">
+            <a:schemeClr val="accent1"/>
+          </a:effectRef>
+          <a:fontRef idx="minor">
+            <a:schemeClr val="lt1"/>
+          </a:fontRef>
+        </p:style>
+        <p:txBody>
+          <a:bodyPr rtlCol="0" anchor="ctr"/>
+          <a:lstStyle/>
+          <a:p>
+            <a:pPr algn="ctr"/>
+            <a:r>
+              <a:rPr lang="en-US" altLang="ko-KR" sz="2700" dirty="0"/>
+              <a:t>RAM</a:t>
+            </a:r>
+            <a:endParaRPr lang="en-KR" sz="2700" dirty="0"/>
+          </a:p>
+        </p:txBody>
+      </p:sp>
+      <p:sp>
+        <p:nvSpPr>
+          <p:cNvPr id="8" name="Rectangle 7">
+            <a:extLst>
+              <a:ext uri="{FF2B5EF4-FFF2-40B4-BE49-F238E27FC236}">
+                <a16:creationId xmlns:a16="http://schemas.microsoft.com/office/drawing/2014/main" id="{EE3E9FE4-69D7-5108-010A-AF1090DBE232}"/>
+              </a:ext>
+            </a:extLst>
+          </p:cNvPr>
+          <p:cNvSpPr/>
+          <p:nvPr/>
+        </p:nvSpPr>
+        <p:spPr>
+          <a:xfrm>
+            <a:off x="2422730" y="7789493"/>
+            <a:ext cx="1589519" cy="769121"/>
+          </a:xfrm>
+          <a:prstGeom prst="rect">
+            <a:avLst/>
+          </a:prstGeom>
+          <a:solidFill>
+            <a:schemeClr val="bg1">
+              <a:lumMod val="50000"/>
+            </a:schemeClr>
+          </a:solidFill>
+          <a:ln>
+            <a:solidFill>
+              <a:schemeClr val="bg1">
+                <a:lumMod val="50000"/>
+              </a:schemeClr>
+            </a:solidFill>
+          </a:ln>
+        </p:spPr>
+        <p:style>
+          <a:lnRef idx="2">
+            <a:schemeClr val="accent1">
+              <a:shade val="15000"/>
+            </a:schemeClr>
+          </a:lnRef>
+          <a:fillRef idx="1">
+            <a:schemeClr val="accent1"/>
+          </a:fillRef>
+          <a:effectRef idx="0">
+            <a:schemeClr val="accent1"/>
+          </a:effectRef>
+          <a:fontRef idx="minor">
+            <a:schemeClr val="lt1"/>
+          </a:fontRef>
+        </p:style>
+        <p:txBody>
+          <a:bodyPr rtlCol="0" anchor="ctr"/>
+          <a:lstStyle/>
+          <a:p>
+            <a:pPr algn="ctr"/>
+            <a:r>
+              <a:rPr lang="en-US" altLang="ko-KR" sz="2700" dirty="0"/>
+              <a:t>disk</a:t>
+            </a:r>
+            <a:endParaRPr lang="en-KR" sz="2700" dirty="0"/>
+          </a:p>
+        </p:txBody>
+      </p:sp>
+      <p:sp>
+        <p:nvSpPr>
+          <p:cNvPr id="9" name="Rounded Rectangle 8">
+            <a:extLst>
+              <a:ext uri="{FF2B5EF4-FFF2-40B4-BE49-F238E27FC236}">
+                <a16:creationId xmlns:a16="http://schemas.microsoft.com/office/drawing/2014/main" id="{CB4108BD-1559-E692-B373-1C0D579D173E}"/>
+              </a:ext>
+            </a:extLst>
+          </p:cNvPr>
+          <p:cNvSpPr/>
+          <p:nvPr/>
+        </p:nvSpPr>
+        <p:spPr>
+          <a:xfrm>
+            <a:off x="2006122" y="5171807"/>
+            <a:ext cx="2422733" cy="3906497"/>
+          </a:xfrm>
+          <a:prstGeom prst="roundRect">
+            <a:avLst/>
+          </a:prstGeom>
+          <a:solidFill>
+            <a:srgbClr val="7F7F7F">
+              <a:alpha val="29804"/>
+            </a:srgbClr>
+          </a:solidFill>
+        </p:spPr>
+        <p:style>
+          <a:lnRef idx="2">
+            <a:schemeClr val="accent1">
+              <a:shade val="15000"/>
+            </a:schemeClr>
+          </a:lnRef>
+          <a:fillRef idx="1">
+            <a:schemeClr val="accent1"/>
+          </a:fillRef>
+          <a:effectRef idx="0">
+            <a:schemeClr val="accent1"/>
+          </a:effectRef>
+          <a:fontRef idx="minor">
+            <a:schemeClr val="lt1"/>
+          </a:fontRef>
+        </p:style>
+        <p:txBody>
+          <a:bodyPr rtlCol="0" anchor="ctr"/>
+          <a:lstStyle/>
+          <a:p>
+            <a:pPr algn="ctr"/>
+            <a:endParaRPr lang="en-KR" sz="2700"/>
+          </a:p>
+        </p:txBody>
+      </p:sp>
+      <p:sp>
+        <p:nvSpPr>
+          <p:cNvPr id="10" name="Rectangle 9">
+            <a:extLst>
+              <a:ext uri="{FF2B5EF4-FFF2-40B4-BE49-F238E27FC236}">
+                <a16:creationId xmlns:a16="http://schemas.microsoft.com/office/drawing/2014/main" id="{2C491076-E554-6F88-A483-1504060396B9}"/>
+              </a:ext>
+            </a:extLst>
+          </p:cNvPr>
+          <p:cNvSpPr/>
+          <p:nvPr/>
+        </p:nvSpPr>
+        <p:spPr>
+          <a:xfrm>
+            <a:off x="5650907" y="5663194"/>
+            <a:ext cx="1589519" cy="769121"/>
+          </a:xfrm>
+          <a:prstGeom prst="rect">
+            <a:avLst/>
+          </a:prstGeom>
+          <a:solidFill>
+            <a:schemeClr val="bg1">
+              <a:lumMod val="50000"/>
+            </a:schemeClr>
+          </a:solidFill>
+          <a:ln>
+            <a:solidFill>
+              <a:schemeClr val="bg1">
+                <a:lumMod val="50000"/>
+              </a:schemeClr>
+            </a:solidFill>
+          </a:ln>
+        </p:spPr>
+        <p:style>
+          <a:lnRef idx="2">
+            <a:schemeClr val="accent1">
+              <a:shade val="15000"/>
+            </a:schemeClr>
+          </a:lnRef>
+          <a:fillRef idx="1">
+            <a:schemeClr val="accent1"/>
+          </a:fillRef>
+          <a:effectRef idx="0">
+            <a:schemeClr val="accent1"/>
+          </a:effectRef>
+          <a:fontRef idx="minor">
+            <a:schemeClr val="lt1"/>
+          </a:fontRef>
+        </p:style>
+        <p:txBody>
+          <a:bodyPr rtlCol="0" anchor="ctr"/>
+          <a:lstStyle/>
+          <a:p>
+            <a:pPr algn="ctr"/>
+            <a:r>
+              <a:rPr lang="en-US" altLang="ko-KR" sz="2700" dirty="0" err="1"/>
+              <a:t>cpu</a:t>
+            </a:r>
+            <a:endParaRPr lang="en-KR" sz="2700" dirty="0"/>
+          </a:p>
+        </p:txBody>
+      </p:sp>
+      <p:sp>
+        <p:nvSpPr>
+          <p:cNvPr id="11" name="Rectangle 10">
+            <a:extLst>
+              <a:ext uri="{FF2B5EF4-FFF2-40B4-BE49-F238E27FC236}">
+                <a16:creationId xmlns:a16="http://schemas.microsoft.com/office/drawing/2014/main" id="{BC739CD2-8471-0AE0-B0BE-0F00E952CDBC}"/>
+              </a:ext>
+            </a:extLst>
+          </p:cNvPr>
+          <p:cNvSpPr/>
+          <p:nvPr/>
+        </p:nvSpPr>
+        <p:spPr>
+          <a:xfrm>
+            <a:off x="5650906" y="6712190"/>
+            <a:ext cx="1589519" cy="769121"/>
+          </a:xfrm>
+          <a:prstGeom prst="rect">
+            <a:avLst/>
+          </a:prstGeom>
+          <a:solidFill>
+            <a:schemeClr val="bg1">
+              <a:lumMod val="50000"/>
+            </a:schemeClr>
+          </a:solidFill>
+          <a:ln>
+            <a:solidFill>
+              <a:schemeClr val="bg1">
+                <a:lumMod val="50000"/>
+              </a:schemeClr>
+            </a:solidFill>
+          </a:ln>
+        </p:spPr>
+        <p:style>
+          <a:lnRef idx="2">
+            <a:schemeClr val="accent1">
+              <a:shade val="15000"/>
+            </a:schemeClr>
+          </a:lnRef>
+          <a:fillRef idx="1">
+            <a:schemeClr val="accent1"/>
+          </a:fillRef>
+          <a:effectRef idx="0">
+            <a:schemeClr val="accent1"/>
+          </a:effectRef>
+          <a:fontRef idx="minor">
+            <a:schemeClr val="lt1"/>
+          </a:fontRef>
+        </p:style>
+        <p:txBody>
+          <a:bodyPr rtlCol="0" anchor="ctr"/>
+          <a:lstStyle/>
+          <a:p>
+            <a:pPr algn="ctr"/>
+            <a:r>
+              <a:rPr lang="en-US" altLang="ko-KR" sz="2700" dirty="0"/>
+              <a:t>RAM</a:t>
+            </a:r>
+            <a:endParaRPr lang="en-KR" sz="2700" dirty="0"/>
+          </a:p>
+        </p:txBody>
+      </p:sp>
+      <p:sp>
+        <p:nvSpPr>
+          <p:cNvPr id="12" name="Rectangle 11">
+            <a:extLst>
+              <a:ext uri="{FF2B5EF4-FFF2-40B4-BE49-F238E27FC236}">
+                <a16:creationId xmlns:a16="http://schemas.microsoft.com/office/drawing/2014/main" id="{F5C0EF08-2BC7-0FFA-C067-8C230D61634A}"/>
+              </a:ext>
+            </a:extLst>
+          </p:cNvPr>
+          <p:cNvSpPr/>
+          <p:nvPr/>
+        </p:nvSpPr>
+        <p:spPr>
+          <a:xfrm>
+            <a:off x="5650904" y="7761187"/>
+            <a:ext cx="1589519" cy="769121"/>
+          </a:xfrm>
+          <a:prstGeom prst="rect">
+            <a:avLst/>
+          </a:prstGeom>
+          <a:solidFill>
+            <a:schemeClr val="bg1">
+              <a:lumMod val="50000"/>
+            </a:schemeClr>
+          </a:solidFill>
+          <a:ln>
+            <a:solidFill>
+              <a:schemeClr val="bg1">
+                <a:lumMod val="50000"/>
+              </a:schemeClr>
+            </a:solidFill>
+          </a:ln>
+        </p:spPr>
+        <p:style>
+          <a:lnRef idx="2">
+            <a:schemeClr val="accent1">
+              <a:shade val="15000"/>
+            </a:schemeClr>
+          </a:lnRef>
+          <a:fillRef idx="1">
+            <a:schemeClr val="accent1"/>
+          </a:fillRef>
+          <a:effectRef idx="0">
+            <a:schemeClr val="accent1"/>
+          </a:effectRef>
+          <a:fontRef idx="minor">
+            <a:schemeClr val="lt1"/>
+          </a:fontRef>
+        </p:style>
+        <p:txBody>
+          <a:bodyPr rtlCol="0" anchor="ctr"/>
+          <a:lstStyle/>
+          <a:p>
+            <a:pPr algn="ctr"/>
+            <a:r>
+              <a:rPr lang="en-US" altLang="ko-KR" sz="2700" dirty="0"/>
+              <a:t>disk</a:t>
+            </a:r>
+            <a:endParaRPr lang="en-KR" sz="2700" dirty="0"/>
+          </a:p>
+        </p:txBody>
+      </p:sp>
+      <p:sp>
+        <p:nvSpPr>
+          <p:cNvPr id="13" name="Rounded Rectangle 12">
+            <a:extLst>
+              <a:ext uri="{FF2B5EF4-FFF2-40B4-BE49-F238E27FC236}">
+                <a16:creationId xmlns:a16="http://schemas.microsoft.com/office/drawing/2014/main" id="{E42C55DF-0D4C-E3BB-3352-A9DE156EEC89}"/>
+              </a:ext>
+            </a:extLst>
+          </p:cNvPr>
+          <p:cNvSpPr/>
+          <p:nvPr/>
+        </p:nvSpPr>
+        <p:spPr>
+          <a:xfrm>
+            <a:off x="5234296" y="5143501"/>
+            <a:ext cx="2422733" cy="3906497"/>
+          </a:xfrm>
+          <a:prstGeom prst="roundRect">
+            <a:avLst/>
+          </a:prstGeom>
+          <a:solidFill>
+            <a:srgbClr val="7F7F7F">
+              <a:alpha val="29804"/>
+            </a:srgbClr>
+          </a:solidFill>
+        </p:spPr>
+        <p:style>
+          <a:lnRef idx="2">
+            <a:schemeClr val="accent1">
+              <a:shade val="15000"/>
+            </a:schemeClr>
+          </a:lnRef>
+          <a:fillRef idx="1">
+            <a:schemeClr val="accent1"/>
+          </a:fillRef>
+          <a:effectRef idx="0">
+            <a:schemeClr val="accent1"/>
+          </a:effectRef>
+          <a:fontRef idx="minor">
+            <a:schemeClr val="lt1"/>
+          </a:fontRef>
+        </p:style>
+        <p:txBody>
+          <a:bodyPr rtlCol="0" anchor="ctr"/>
+          <a:lstStyle/>
+          <a:p>
+            <a:pPr algn="ctr"/>
+            <a:endParaRPr lang="en-KR" sz="2700"/>
+          </a:p>
+        </p:txBody>
+      </p:sp>
+      <p:sp>
+        <p:nvSpPr>
+          <p:cNvPr id="14" name="Rectangle 13">
+            <a:extLst>
+              <a:ext uri="{FF2B5EF4-FFF2-40B4-BE49-F238E27FC236}">
+                <a16:creationId xmlns:a16="http://schemas.microsoft.com/office/drawing/2014/main" id="{0076D740-1E65-757E-FEB8-85D3C6CFBEDD}"/>
+              </a:ext>
+            </a:extLst>
+          </p:cNvPr>
+          <p:cNvSpPr/>
+          <p:nvPr/>
+        </p:nvSpPr>
+        <p:spPr>
+          <a:xfrm>
+            <a:off x="14275759" y="5691500"/>
+            <a:ext cx="1589519" cy="769121"/>
+          </a:xfrm>
+          <a:prstGeom prst="rect">
+            <a:avLst/>
+          </a:prstGeom>
+          <a:solidFill>
+            <a:schemeClr val="bg1">
+              <a:lumMod val="50000"/>
+            </a:schemeClr>
+          </a:solidFill>
+          <a:ln>
+            <a:solidFill>
+              <a:schemeClr val="bg1">
+                <a:lumMod val="50000"/>
+              </a:schemeClr>
+            </a:solidFill>
+          </a:ln>
+        </p:spPr>
+        <p:style>
+          <a:lnRef idx="2">
+            <a:schemeClr val="accent1">
+              <a:shade val="15000"/>
+            </a:schemeClr>
+          </a:lnRef>
+          <a:fillRef idx="1">
+            <a:schemeClr val="accent1"/>
+          </a:fillRef>
+          <a:effectRef idx="0">
+            <a:schemeClr val="accent1"/>
+          </a:effectRef>
+          <a:fontRef idx="minor">
+            <a:schemeClr val="lt1"/>
+          </a:fontRef>
+        </p:style>
+        <p:txBody>
+          <a:bodyPr rtlCol="0" anchor="ctr"/>
+          <a:lstStyle/>
+          <a:p>
+            <a:pPr algn="ctr"/>
+            <a:r>
+              <a:rPr lang="en-US" altLang="ko-KR" sz="2700" dirty="0" err="1"/>
+              <a:t>cpu</a:t>
+            </a:r>
+            <a:endParaRPr lang="en-KR" sz="2700" dirty="0"/>
+          </a:p>
+        </p:txBody>
+      </p:sp>
+      <p:sp>
+        <p:nvSpPr>
+          <p:cNvPr id="15" name="Rectangle 14">
+            <a:extLst>
+              <a:ext uri="{FF2B5EF4-FFF2-40B4-BE49-F238E27FC236}">
+                <a16:creationId xmlns:a16="http://schemas.microsoft.com/office/drawing/2014/main" id="{53D23106-2EFC-EE14-3F9F-363D35B1863E}"/>
+              </a:ext>
+            </a:extLst>
+          </p:cNvPr>
+          <p:cNvSpPr/>
+          <p:nvPr/>
+        </p:nvSpPr>
+        <p:spPr>
+          <a:xfrm>
+            <a:off x="14275757" y="6740497"/>
+            <a:ext cx="1589519" cy="769121"/>
+          </a:xfrm>
+          <a:prstGeom prst="rect">
+            <a:avLst/>
+          </a:prstGeom>
+          <a:solidFill>
+            <a:schemeClr val="bg1">
+              <a:lumMod val="50000"/>
+            </a:schemeClr>
+          </a:solidFill>
+          <a:ln>
+            <a:solidFill>
+              <a:schemeClr val="bg1">
+                <a:lumMod val="50000"/>
+              </a:schemeClr>
+            </a:solidFill>
+          </a:ln>
+        </p:spPr>
+        <p:style>
+          <a:lnRef idx="2">
+            <a:schemeClr val="accent1">
+              <a:shade val="15000"/>
+            </a:schemeClr>
+          </a:lnRef>
+          <a:fillRef idx="1">
+            <a:schemeClr val="accent1"/>
+          </a:fillRef>
+          <a:effectRef idx="0">
+            <a:schemeClr val="accent1"/>
+          </a:effectRef>
+          <a:fontRef idx="minor">
+            <a:schemeClr val="lt1"/>
+          </a:fontRef>
+        </p:style>
+        <p:txBody>
+          <a:bodyPr rtlCol="0" anchor="ctr"/>
+          <a:lstStyle/>
+          <a:p>
+            <a:pPr algn="ctr"/>
+            <a:r>
+              <a:rPr lang="en-US" altLang="ko-KR" sz="2700" dirty="0"/>
+              <a:t>RAM</a:t>
+            </a:r>
+            <a:endParaRPr lang="en-KR" sz="2700" dirty="0"/>
+          </a:p>
+        </p:txBody>
+      </p:sp>
+      <p:sp>
+        <p:nvSpPr>
+          <p:cNvPr id="16" name="Rectangle 15">
+            <a:extLst>
+              <a:ext uri="{FF2B5EF4-FFF2-40B4-BE49-F238E27FC236}">
+                <a16:creationId xmlns:a16="http://schemas.microsoft.com/office/drawing/2014/main" id="{585CB4D1-9E07-D34E-E61F-A5D956240E0B}"/>
+              </a:ext>
+            </a:extLst>
+          </p:cNvPr>
+          <p:cNvSpPr/>
+          <p:nvPr/>
+        </p:nvSpPr>
+        <p:spPr>
+          <a:xfrm>
+            <a:off x="14275756" y="7789493"/>
+            <a:ext cx="1589519" cy="769121"/>
+          </a:xfrm>
+          <a:prstGeom prst="rect">
+            <a:avLst/>
+          </a:prstGeom>
+          <a:solidFill>
+            <a:schemeClr val="bg1">
+              <a:lumMod val="50000"/>
+            </a:schemeClr>
+          </a:solidFill>
+          <a:ln>
+            <a:solidFill>
+              <a:schemeClr val="bg1">
+                <a:lumMod val="50000"/>
+              </a:schemeClr>
+            </a:solidFill>
+          </a:ln>
+        </p:spPr>
+        <p:style>
+          <a:lnRef idx="2">
+            <a:schemeClr val="accent1">
+              <a:shade val="15000"/>
+            </a:schemeClr>
+          </a:lnRef>
+          <a:fillRef idx="1">
+            <a:schemeClr val="accent1"/>
+          </a:fillRef>
+          <a:effectRef idx="0">
+            <a:schemeClr val="accent1"/>
+          </a:effectRef>
+          <a:fontRef idx="minor">
+            <a:schemeClr val="lt1"/>
+          </a:fontRef>
+        </p:style>
+        <p:txBody>
+          <a:bodyPr rtlCol="0" anchor="ctr"/>
+          <a:lstStyle/>
+          <a:p>
+            <a:pPr algn="ctr"/>
+            <a:r>
+              <a:rPr lang="en-US" altLang="ko-KR" sz="2700" dirty="0"/>
+              <a:t>disk</a:t>
+            </a:r>
+            <a:endParaRPr lang="en-KR" sz="2700" dirty="0"/>
+          </a:p>
+        </p:txBody>
+      </p:sp>
+      <p:sp>
+        <p:nvSpPr>
+          <p:cNvPr id="17" name="Rounded Rectangle 16">
+            <a:extLst>
+              <a:ext uri="{FF2B5EF4-FFF2-40B4-BE49-F238E27FC236}">
+                <a16:creationId xmlns:a16="http://schemas.microsoft.com/office/drawing/2014/main" id="{3EA300E0-A8DD-F250-2404-2EE17C0AC6E5}"/>
+              </a:ext>
+            </a:extLst>
+          </p:cNvPr>
+          <p:cNvSpPr/>
+          <p:nvPr/>
+        </p:nvSpPr>
+        <p:spPr>
+          <a:xfrm>
+            <a:off x="13859147" y="5171807"/>
+            <a:ext cx="2422733" cy="3906497"/>
+          </a:xfrm>
+          <a:prstGeom prst="roundRect">
+            <a:avLst/>
+          </a:prstGeom>
+          <a:solidFill>
+            <a:srgbClr val="7F7F7F">
+              <a:alpha val="29804"/>
+            </a:srgbClr>
+          </a:solidFill>
+        </p:spPr>
+        <p:style>
+          <a:lnRef idx="2">
+            <a:schemeClr val="accent1">
+              <a:shade val="15000"/>
+            </a:schemeClr>
+          </a:lnRef>
+          <a:fillRef idx="1">
+            <a:schemeClr val="accent1"/>
+          </a:fillRef>
+          <a:effectRef idx="0">
+            <a:schemeClr val="accent1"/>
+          </a:effectRef>
+          <a:fontRef idx="minor">
+            <a:schemeClr val="lt1"/>
+          </a:fontRef>
+        </p:style>
+        <p:txBody>
+          <a:bodyPr rtlCol="0" anchor="ctr"/>
+          <a:lstStyle/>
+          <a:p>
+            <a:pPr algn="ctr"/>
+            <a:endParaRPr lang="en-KR" sz="2700"/>
+          </a:p>
+        </p:txBody>
+      </p:sp>
+      <p:sp>
+        <p:nvSpPr>
+          <p:cNvPr id="18" name="TextBox 17">
+            <a:extLst>
+              <a:ext uri="{FF2B5EF4-FFF2-40B4-BE49-F238E27FC236}">
+                <a16:creationId xmlns:a16="http://schemas.microsoft.com/office/drawing/2014/main" id="{C93ED6FD-3B33-156A-F374-2B4C6E1292B7}"/>
+              </a:ext>
+            </a:extLst>
+          </p:cNvPr>
+          <p:cNvSpPr txBox="1"/>
+          <p:nvPr/>
+        </p:nvSpPr>
+        <p:spPr>
+          <a:xfrm>
+            <a:off x="10471710" y="6197182"/>
+            <a:ext cx="423514" cy="507831"/>
+          </a:xfrm>
+          <a:prstGeom prst="rect">
+            <a:avLst/>
+          </a:prstGeom>
+          <a:noFill/>
+        </p:spPr>
+        <p:txBody>
+          <a:bodyPr wrap="none" rtlCol="0">
+            <a:spAutoFit/>
+          </a:bodyPr>
+          <a:lstStyle/>
+          <a:p>
+            <a:r>
+              <a:rPr lang="en-KR" sz="2700" dirty="0"/>
+              <a:t>…</a:t>
+            </a:r>
+          </a:p>
+        </p:txBody>
+      </p:sp>
+      <p:sp>
+        <p:nvSpPr>
+          <p:cNvPr id="19" name="TextBox 18">
+            <a:extLst>
+              <a:ext uri="{FF2B5EF4-FFF2-40B4-BE49-F238E27FC236}">
+                <a16:creationId xmlns:a16="http://schemas.microsoft.com/office/drawing/2014/main" id="{8AB84C4B-DA12-07A0-3A50-F33E3D88900C}"/>
+              </a:ext>
+            </a:extLst>
+          </p:cNvPr>
+          <p:cNvSpPr txBox="1"/>
+          <p:nvPr/>
+        </p:nvSpPr>
+        <p:spPr>
+          <a:xfrm>
+            <a:off x="2481275" y="4630157"/>
+            <a:ext cx="1343701" cy="507831"/>
+          </a:xfrm>
+          <a:prstGeom prst="rect">
+            <a:avLst/>
+          </a:prstGeom>
+          <a:noFill/>
+        </p:spPr>
+        <p:txBody>
+          <a:bodyPr wrap="none" rtlCol="0">
+            <a:spAutoFit/>
+          </a:bodyPr>
+          <a:lstStyle/>
+          <a:p>
+            <a:r>
+              <a:rPr lang="en-KR" sz="2700" dirty="0"/>
+              <a:t>worker0</a:t>
+            </a:r>
+          </a:p>
+        </p:txBody>
+      </p:sp>
+      <p:sp>
+        <p:nvSpPr>
+          <p:cNvPr id="20" name="TextBox 19">
+            <a:extLst>
+              <a:ext uri="{FF2B5EF4-FFF2-40B4-BE49-F238E27FC236}">
+                <a16:creationId xmlns:a16="http://schemas.microsoft.com/office/drawing/2014/main" id="{95727A12-6719-B5F7-4437-C6D41B134FD1}"/>
+              </a:ext>
+            </a:extLst>
+          </p:cNvPr>
+          <p:cNvSpPr txBox="1"/>
+          <p:nvPr/>
+        </p:nvSpPr>
+        <p:spPr>
+          <a:xfrm>
+            <a:off x="5709449" y="4639052"/>
+            <a:ext cx="1343701" cy="507831"/>
+          </a:xfrm>
+          <a:prstGeom prst="rect">
+            <a:avLst/>
+          </a:prstGeom>
+          <a:noFill/>
+        </p:spPr>
+        <p:txBody>
+          <a:bodyPr wrap="none" rtlCol="0">
+            <a:spAutoFit/>
+          </a:bodyPr>
+          <a:lstStyle/>
+          <a:p>
+            <a:r>
+              <a:rPr lang="en-KR" sz="2700" dirty="0"/>
+              <a:t>worker1</a:t>
+            </a:r>
+          </a:p>
+        </p:txBody>
+      </p:sp>
+      <p:sp>
+        <p:nvSpPr>
+          <p:cNvPr id="21" name="TextBox 20">
+            <a:extLst>
+              <a:ext uri="{FF2B5EF4-FFF2-40B4-BE49-F238E27FC236}">
+                <a16:creationId xmlns:a16="http://schemas.microsoft.com/office/drawing/2014/main" id="{05EB3D8F-1516-1522-8E30-DF4B590D5C62}"/>
+              </a:ext>
+            </a:extLst>
+          </p:cNvPr>
+          <p:cNvSpPr txBox="1"/>
+          <p:nvPr/>
+        </p:nvSpPr>
+        <p:spPr>
+          <a:xfrm>
+            <a:off x="14334304" y="4630157"/>
+            <a:ext cx="1518429" cy="507831"/>
+          </a:xfrm>
+          <a:prstGeom prst="rect">
+            <a:avLst/>
+          </a:prstGeom>
+          <a:noFill/>
+        </p:spPr>
+        <p:txBody>
+          <a:bodyPr wrap="none" rtlCol="0">
+            <a:spAutoFit/>
+          </a:bodyPr>
+          <a:lstStyle/>
+          <a:p>
+            <a:r>
+              <a:rPr lang="en-KR" sz="2700" dirty="0"/>
+              <a:t>worker19</a:t>
+            </a:r>
+          </a:p>
+        </p:txBody>
+      </p:sp>
+      <p:cxnSp>
+        <p:nvCxnSpPr>
+          <p:cNvPr id="23" name="Straight Connector 22">
+            <a:extLst>
+              <a:ext uri="{FF2B5EF4-FFF2-40B4-BE49-F238E27FC236}">
+                <a16:creationId xmlns:a16="http://schemas.microsoft.com/office/drawing/2014/main" id="{D9515051-8C64-ED2A-16CC-9EE4BD95B717}"/>
+              </a:ext>
+            </a:extLst>
+          </p:cNvPr>
+          <p:cNvCxnSpPr>
+            <a:endCxn id="19" idx="0"/>
+          </p:cNvCxnSpPr>
+          <p:nvPr/>
+        </p:nvCxnSpPr>
+        <p:spPr>
+          <a:xfrm flipH="1">
+            <a:off x="3153126" y="2913460"/>
+            <a:ext cx="5990874" cy="1716697"/>
+          </a:xfrm>
+          <a:prstGeom prst="line">
+            <a:avLst/>
+          </a:prstGeom>
+        </p:spPr>
+        <p:style>
+          <a:lnRef idx="2">
+            <a:schemeClr val="dk1"/>
+          </a:lnRef>
+          <a:fillRef idx="0">
+            <a:schemeClr val="dk1"/>
+          </a:fillRef>
+          <a:effectRef idx="1">
+            <a:schemeClr val="dk1"/>
+          </a:effectRef>
+          <a:fontRef idx="minor">
+            <a:schemeClr val="tx1"/>
+          </a:fontRef>
+        </p:style>
+      </p:cxnSp>
+      <p:cxnSp>
+        <p:nvCxnSpPr>
+          <p:cNvPr id="24" name="Straight Connector 23">
+            <a:extLst>
+              <a:ext uri="{FF2B5EF4-FFF2-40B4-BE49-F238E27FC236}">
+                <a16:creationId xmlns:a16="http://schemas.microsoft.com/office/drawing/2014/main" id="{238D8B6F-F970-9772-182D-CCA2DDA4B1D0}"/>
+              </a:ext>
+            </a:extLst>
+          </p:cNvPr>
+          <p:cNvCxnSpPr>
+            <a:cxnSpLocks/>
+            <a:endCxn id="20" idx="0"/>
+          </p:cNvCxnSpPr>
+          <p:nvPr/>
+        </p:nvCxnSpPr>
+        <p:spPr>
+          <a:xfrm flipH="1">
+            <a:off x="6381300" y="2913460"/>
+            <a:ext cx="2762700" cy="1725592"/>
+          </a:xfrm>
+          <a:prstGeom prst="line">
+            <a:avLst/>
+          </a:prstGeom>
+        </p:spPr>
+        <p:style>
+          <a:lnRef idx="2">
+            <a:schemeClr val="dk1"/>
+          </a:lnRef>
+          <a:fillRef idx="0">
+            <a:schemeClr val="dk1"/>
+          </a:fillRef>
+          <a:effectRef idx="1">
+            <a:schemeClr val="dk1"/>
+          </a:effectRef>
+          <a:fontRef idx="minor">
+            <a:schemeClr val="tx1"/>
+          </a:fontRef>
+        </p:style>
+      </p:cxnSp>
+      <p:cxnSp>
+        <p:nvCxnSpPr>
+          <p:cNvPr id="27" name="Straight Connector 26">
+            <a:extLst>
+              <a:ext uri="{FF2B5EF4-FFF2-40B4-BE49-F238E27FC236}">
+                <a16:creationId xmlns:a16="http://schemas.microsoft.com/office/drawing/2014/main" id="{7D9B50C4-9AA9-8543-837A-D3C7CF2EFA1B}"/>
+              </a:ext>
+            </a:extLst>
+          </p:cNvPr>
+          <p:cNvCxnSpPr>
+            <a:cxnSpLocks/>
+            <a:endCxn id="21" idx="0"/>
+          </p:cNvCxnSpPr>
+          <p:nvPr/>
+        </p:nvCxnSpPr>
+        <p:spPr>
+          <a:xfrm>
+            <a:off x="9144001" y="2918764"/>
+            <a:ext cx="5949518" cy="1711393"/>
+          </a:xfrm>
+          <a:prstGeom prst="line">
+            <a:avLst/>
+          </a:prstGeom>
+        </p:spPr>
+        <p:style>
+          <a:lnRef idx="2">
+            <a:schemeClr val="dk1"/>
+          </a:lnRef>
+          <a:fillRef idx="0">
+            <a:schemeClr val="dk1"/>
+          </a:fillRef>
+          <a:effectRef idx="1">
+            <a:schemeClr val="dk1"/>
+          </a:effectRef>
+          <a:fontRef idx="minor">
+            <a:schemeClr val="tx1"/>
+          </a:fontRef>
+        </p:style>
+      </p:cxnSp>
+      <p:sp>
+        <p:nvSpPr>
+          <p:cNvPr id="31" name="TextBox 30">
+            <a:extLst>
+              <a:ext uri="{FF2B5EF4-FFF2-40B4-BE49-F238E27FC236}">
+                <a16:creationId xmlns:a16="http://schemas.microsoft.com/office/drawing/2014/main" id="{8CF2005E-BDF9-91A1-F8B3-CE3DCED06F9F}"/>
+              </a:ext>
+            </a:extLst>
+          </p:cNvPr>
+          <p:cNvSpPr txBox="1"/>
+          <p:nvPr/>
+        </p:nvSpPr>
+        <p:spPr>
+          <a:xfrm>
+            <a:off x="10471710" y="2086328"/>
+            <a:ext cx="6213513" cy="1338828"/>
+          </a:xfrm>
+          <a:prstGeom prst="rect">
+            <a:avLst/>
+          </a:prstGeom>
+          <a:noFill/>
+        </p:spPr>
+        <p:txBody>
+          <a:bodyPr wrap="square" rtlCol="0">
+            <a:spAutoFit/>
+          </a:bodyPr>
+          <a:lstStyle/>
+          <a:p>
+            <a:r>
+              <a:rPr lang="en-US" sz="2700" b="1" dirty="0"/>
+              <a:t>step1</a:t>
+            </a:r>
+            <a:r>
+              <a:rPr lang="en-KR" sz="2700" b="1" dirty="0"/>
+              <a:t>. </a:t>
+            </a:r>
+            <a:r>
+              <a:rPr lang="en-KR" sz="2700" dirty="0"/>
+              <a:t>master samples some data </a:t>
+            </a:r>
+            <a:r>
+              <a:rPr lang="en-US" sz="2700" dirty="0"/>
+              <a:t>from workers and determines the key range each worker will be responsible for</a:t>
+            </a:r>
+            <a:endParaRPr lang="en-KR" sz="2700" dirty="0"/>
+          </a:p>
+        </p:txBody>
+      </p:sp>
+      <p:sp>
+        <p:nvSpPr>
+          <p:cNvPr id="32" name="TextBox 31">
+            <a:extLst>
+              <a:ext uri="{FF2B5EF4-FFF2-40B4-BE49-F238E27FC236}">
+                <a16:creationId xmlns:a16="http://schemas.microsoft.com/office/drawing/2014/main" id="{EFC1F137-54C1-DD4D-D723-53339121144E}"/>
+              </a:ext>
+            </a:extLst>
+          </p:cNvPr>
+          <p:cNvSpPr txBox="1"/>
+          <p:nvPr/>
+        </p:nvSpPr>
+        <p:spPr>
+          <a:xfrm>
+            <a:off x="8458200" y="1311784"/>
+            <a:ext cx="1161280" cy="507831"/>
+          </a:xfrm>
+          <a:prstGeom prst="rect">
+            <a:avLst/>
+          </a:prstGeom>
+          <a:noFill/>
+        </p:spPr>
+        <p:txBody>
+          <a:bodyPr wrap="none" rtlCol="0">
+            <a:spAutoFit/>
+          </a:bodyPr>
+          <a:lstStyle/>
+          <a:p>
+            <a:r>
+              <a:rPr lang="en-KR" sz="2700" dirty="0"/>
+              <a:t>master</a:t>
+            </a:r>
+          </a:p>
+        </p:txBody>
+      </p:sp>
+      <p:sp>
+        <p:nvSpPr>
+          <p:cNvPr id="33" name="TextBox 32">
+            <a:extLst>
+              <a:ext uri="{FF2B5EF4-FFF2-40B4-BE49-F238E27FC236}">
+                <a16:creationId xmlns:a16="http://schemas.microsoft.com/office/drawing/2014/main" id="{4B5223EE-3E22-4796-F964-2FD19111A6B4}"/>
+              </a:ext>
+            </a:extLst>
+          </p:cNvPr>
+          <p:cNvSpPr txBox="1"/>
+          <p:nvPr/>
+        </p:nvSpPr>
+        <p:spPr>
+          <a:xfrm>
+            <a:off x="830486" y="2633584"/>
+            <a:ext cx="6213513" cy="1754326"/>
+          </a:xfrm>
+          <a:prstGeom prst="rect">
+            <a:avLst/>
+          </a:prstGeom>
+          <a:noFill/>
+        </p:spPr>
+        <p:txBody>
+          <a:bodyPr wrap="square" rtlCol="0">
+            <a:spAutoFit/>
+          </a:bodyPr>
+          <a:lstStyle/>
+          <a:p>
+            <a:r>
+              <a:rPr lang="en-US" sz="2700" b="1" dirty="0"/>
+              <a:t>step2</a:t>
+            </a:r>
+            <a:r>
+              <a:rPr lang="en-KR" sz="2700" b="1" dirty="0"/>
+              <a:t>. </a:t>
+            </a:r>
+            <a:r>
+              <a:rPr lang="en-US" sz="2700" dirty="0"/>
+              <a:t>each worker splits its local data into chunks, sorts it, and then partitions the sorted data according to the global key ranges</a:t>
+            </a:r>
+            <a:endParaRPr lang="en-KR" sz="2700" dirty="0"/>
+          </a:p>
+        </p:txBody>
+      </p:sp>
+      <p:cxnSp>
+        <p:nvCxnSpPr>
+          <p:cNvPr id="35" name="Straight Arrow Connector 34">
+            <a:extLst>
+              <a:ext uri="{FF2B5EF4-FFF2-40B4-BE49-F238E27FC236}">
+                <a16:creationId xmlns:a16="http://schemas.microsoft.com/office/drawing/2014/main" id="{AF934F2B-F68E-FEBE-0D8D-A0D4DBF9ABA6}"/>
+              </a:ext>
+            </a:extLst>
+          </p:cNvPr>
+          <p:cNvCxnSpPr>
+            <a:cxnSpLocks/>
+          </p:cNvCxnSpPr>
+          <p:nvPr/>
+        </p:nvCxnSpPr>
+        <p:spPr>
+          <a:xfrm>
+            <a:off x="9791836" y="6030720"/>
+            <a:ext cx="1723850" cy="0"/>
+          </a:xfrm>
+          <a:prstGeom prst="straightConnector1">
+            <a:avLst/>
+          </a:prstGeom>
+          <a:ln>
+            <a:tailEnd type="triangle"/>
+          </a:ln>
+        </p:spPr>
+        <p:style>
+          <a:lnRef idx="2">
+            <a:schemeClr val="dk1"/>
+          </a:lnRef>
+          <a:fillRef idx="0">
+            <a:schemeClr val="dk1"/>
+          </a:fillRef>
+          <a:effectRef idx="1">
+            <a:schemeClr val="dk1"/>
+          </a:effectRef>
+          <a:fontRef idx="minor">
+            <a:schemeClr val="tx1"/>
+          </a:fontRef>
+        </p:style>
+      </p:cxnSp>
+      <p:cxnSp>
+        <p:nvCxnSpPr>
+          <p:cNvPr id="37" name="Straight Arrow Connector 36">
+            <a:extLst>
+              <a:ext uri="{FF2B5EF4-FFF2-40B4-BE49-F238E27FC236}">
+                <a16:creationId xmlns:a16="http://schemas.microsoft.com/office/drawing/2014/main" id="{52BE3DDC-5E0C-759D-5194-240496091A20}"/>
+              </a:ext>
+            </a:extLst>
+          </p:cNvPr>
+          <p:cNvCxnSpPr>
+            <a:cxnSpLocks/>
+          </p:cNvCxnSpPr>
+          <p:nvPr/>
+        </p:nvCxnSpPr>
+        <p:spPr>
+          <a:xfrm flipH="1">
+            <a:off x="9774427" y="6197181"/>
+            <a:ext cx="1741259" cy="0"/>
+          </a:xfrm>
+          <a:prstGeom prst="straightConnector1">
+            <a:avLst/>
+          </a:prstGeom>
+          <a:ln>
+            <a:tailEnd type="triangle"/>
+          </a:ln>
+        </p:spPr>
+        <p:style>
+          <a:lnRef idx="2">
+            <a:schemeClr val="dk1"/>
+          </a:lnRef>
+          <a:fillRef idx="0">
+            <a:schemeClr val="dk1"/>
+          </a:fillRef>
+          <a:effectRef idx="1">
+            <a:schemeClr val="dk1"/>
+          </a:effectRef>
+          <a:fontRef idx="minor">
+            <a:schemeClr val="tx1"/>
+          </a:fontRef>
+        </p:style>
+      </p:cxnSp>
+      <p:sp>
+        <p:nvSpPr>
+          <p:cNvPr id="39" name="TextBox 38">
+            <a:extLst>
+              <a:ext uri="{FF2B5EF4-FFF2-40B4-BE49-F238E27FC236}">
+                <a16:creationId xmlns:a16="http://schemas.microsoft.com/office/drawing/2014/main" id="{2B8AA17C-CDAA-A9E6-DD85-52F156F8C0ED}"/>
+              </a:ext>
+            </a:extLst>
+          </p:cNvPr>
+          <p:cNvSpPr txBox="1"/>
+          <p:nvPr/>
+        </p:nvSpPr>
+        <p:spPr>
+          <a:xfrm>
+            <a:off x="8208022" y="5038347"/>
+            <a:ext cx="5100131" cy="923330"/>
+          </a:xfrm>
+          <a:prstGeom prst="rect">
+            <a:avLst/>
+          </a:prstGeom>
+          <a:noFill/>
+        </p:spPr>
+        <p:txBody>
+          <a:bodyPr wrap="square" rtlCol="0">
+            <a:spAutoFit/>
+          </a:bodyPr>
+          <a:lstStyle/>
+          <a:p>
+            <a:r>
+              <a:rPr lang="en-US" sz="2700" b="1" dirty="0"/>
+              <a:t>step3</a:t>
+            </a:r>
+            <a:r>
+              <a:rPr lang="en-KR" sz="2700" b="1" dirty="0"/>
+              <a:t>.</a:t>
+            </a:r>
+            <a:r>
+              <a:rPr lang="en-US" sz="2700" dirty="0"/>
+              <a:t> workers exchanged the partitioned data with each other</a:t>
+            </a:r>
+            <a:endParaRPr lang="en-KR" sz="2700" dirty="0"/>
+          </a:p>
+        </p:txBody>
+      </p:sp>
+      <p:sp>
+        <p:nvSpPr>
+          <p:cNvPr id="40" name="TextBox 39">
+            <a:extLst>
+              <a:ext uri="{FF2B5EF4-FFF2-40B4-BE49-F238E27FC236}">
+                <a16:creationId xmlns:a16="http://schemas.microsoft.com/office/drawing/2014/main" id="{F771CA2B-182B-AAB3-112E-C03D8A83D1EF}"/>
+              </a:ext>
+            </a:extLst>
+          </p:cNvPr>
+          <p:cNvSpPr txBox="1"/>
+          <p:nvPr/>
+        </p:nvSpPr>
+        <p:spPr>
+          <a:xfrm>
+            <a:off x="8156063" y="7223579"/>
+            <a:ext cx="6213513" cy="923330"/>
+          </a:xfrm>
+          <a:prstGeom prst="rect">
+            <a:avLst/>
+          </a:prstGeom>
+          <a:noFill/>
+        </p:spPr>
+        <p:txBody>
+          <a:bodyPr wrap="square" rtlCol="0">
+            <a:spAutoFit/>
+          </a:bodyPr>
+          <a:lstStyle/>
+          <a:p>
+            <a:r>
+              <a:rPr lang="en-US" sz="2700" b="1" dirty="0"/>
+              <a:t>step4</a:t>
+            </a:r>
+            <a:r>
+              <a:rPr lang="en-KR" sz="2700" b="1" dirty="0"/>
+              <a:t>. </a:t>
+            </a:r>
+            <a:r>
+              <a:rPr lang="en-US" sz="2700" dirty="0"/>
+              <a:t>each worker merge the data sorted in their own disk</a:t>
+            </a:r>
+            <a:endParaRPr lang="en-KR" sz="2700" dirty="0"/>
+          </a:p>
+        </p:txBody>
+      </p:sp>
+    </p:spTree>
+    <p:extLst>
+      <p:ext uri="{BB962C8B-B14F-4D97-AF65-F5344CB8AC3E}">
+        <p14:creationId xmlns:p14="http://schemas.microsoft.com/office/powerpoint/2010/main" val="73279489"/>
+      </p:ext>
+    </p:extLst>
+  </p:cSld>
+  <p:clrMapOvr>
+    <a:masterClrMapping/>
+  </p:clrMapOvr>
+</p:sld>
+</file>
+
+<file path=ppt/slides/slide5.xml><?xml version="1.0" encoding="utf-8"?>
+<p:sld xmlns:a="http://schemas.openxmlformats.org/drawingml/2006/main" xmlns:r="http://schemas.openxmlformats.org/officeDocument/2006/relationships" xmlns:p="http://schemas.openxmlformats.org/presentationml/2006/main">
+  <p:cSld>
+    <p:spTree>
+      <p:nvGrpSpPr>
+        <p:cNvPr id="1" name=""/>
+        <p:cNvGrpSpPr/>
+        <p:nvPr/>
+      </p:nvGrpSpPr>
+      <p:grpSpPr>
+        <a:xfrm>
+          <a:off x="0" y="0"/>
+          <a:ext cx="0" cy="0"/>
+          <a:chOff x="0" y="0"/>
+          <a:chExt cx="0" cy="0"/>
+        </a:xfrm>
+      </p:grpSpPr>
+      <p:sp>
+        <p:nvSpPr>
+          <p:cNvPr id="4" name="Rounded Rectangle 3">
+            <a:extLst>
+              <a:ext uri="{FF2B5EF4-FFF2-40B4-BE49-F238E27FC236}">
+                <a16:creationId xmlns:a16="http://schemas.microsoft.com/office/drawing/2014/main" id="{5A7A2B09-A077-66D3-83EA-04DC78053BED}"/>
+              </a:ext>
+            </a:extLst>
+          </p:cNvPr>
+          <p:cNvSpPr/>
+          <p:nvPr/>
+        </p:nvSpPr>
+        <p:spPr>
+          <a:xfrm>
+            <a:off x="1257301" y="4149328"/>
+            <a:ext cx="4085561" cy="1988345"/>
+          </a:xfrm>
+          <a:prstGeom prst="roundRect">
+            <a:avLst/>
+          </a:prstGeom>
+        </p:spPr>
+        <p:style>
+          <a:lnRef idx="2">
+            <a:schemeClr val="accent1">
+              <a:shade val="15000"/>
+            </a:schemeClr>
+          </a:lnRef>
+          <a:fillRef idx="1">
+            <a:schemeClr val="accent1"/>
+          </a:fillRef>
+          <a:effectRef idx="0">
+            <a:schemeClr val="accent1"/>
+          </a:effectRef>
+          <a:fontRef idx="minor">
+            <a:schemeClr val="lt1"/>
+          </a:fontRef>
+        </p:style>
+        <p:txBody>
+          <a:bodyPr rtlCol="0" anchor="ctr"/>
+          <a:lstStyle/>
+          <a:p>
+            <a:pPr algn="ctr"/>
+            <a:r>
+              <a:rPr lang="en-US" sz="2700" dirty="0"/>
+              <a:t>master</a:t>
+            </a:r>
+            <a:endParaRPr lang="en-KR" sz="2700" dirty="0"/>
+          </a:p>
+        </p:txBody>
+      </p:sp>
+      <p:sp>
+        <p:nvSpPr>
+          <p:cNvPr id="5" name="Oval 4">
+            <a:extLst>
+              <a:ext uri="{FF2B5EF4-FFF2-40B4-BE49-F238E27FC236}">
+                <a16:creationId xmlns:a16="http://schemas.microsoft.com/office/drawing/2014/main" id="{7F33CDAD-A31F-82A2-A71F-6CB23300E86B}"/>
+              </a:ext>
+            </a:extLst>
+          </p:cNvPr>
+          <p:cNvSpPr/>
+          <p:nvPr/>
+        </p:nvSpPr>
+        <p:spPr>
+          <a:xfrm>
+            <a:off x="12998305" y="1456937"/>
+            <a:ext cx="2169041" cy="2169041"/>
+          </a:xfrm>
+          <a:prstGeom prst="ellipse">
+            <a:avLst/>
+          </a:prstGeom>
+        </p:spPr>
+        <p:style>
+          <a:lnRef idx="2">
+            <a:schemeClr val="accent1">
+              <a:shade val="15000"/>
+            </a:schemeClr>
+          </a:lnRef>
+          <a:fillRef idx="1">
+            <a:schemeClr val="accent1"/>
+          </a:fillRef>
+          <a:effectRef idx="0">
+            <a:schemeClr val="accent1"/>
+          </a:effectRef>
+          <a:fontRef idx="minor">
+            <a:schemeClr val="lt1"/>
+          </a:fontRef>
+        </p:style>
+        <p:txBody>
+          <a:bodyPr rtlCol="0" anchor="ctr"/>
+          <a:lstStyle/>
+          <a:p>
+            <a:pPr algn="ctr"/>
+            <a:r>
+              <a:rPr lang="en-KR" sz="2700" dirty="0"/>
+              <a:t>worker</a:t>
+            </a:r>
+          </a:p>
+        </p:txBody>
+      </p:sp>
+      <p:sp>
+        <p:nvSpPr>
+          <p:cNvPr id="6" name="Oval 5">
+            <a:extLst>
+              <a:ext uri="{FF2B5EF4-FFF2-40B4-BE49-F238E27FC236}">
+                <a16:creationId xmlns:a16="http://schemas.microsoft.com/office/drawing/2014/main" id="{D224500F-2AF6-F6AB-42B0-7E63468E9EC0}"/>
+              </a:ext>
+            </a:extLst>
+          </p:cNvPr>
+          <p:cNvSpPr/>
+          <p:nvPr/>
+        </p:nvSpPr>
+        <p:spPr>
+          <a:xfrm>
+            <a:off x="12998305" y="4058978"/>
+            <a:ext cx="2169041" cy="2169041"/>
+          </a:xfrm>
+          <a:prstGeom prst="ellipse">
+            <a:avLst/>
+          </a:prstGeom>
+        </p:spPr>
+        <p:style>
+          <a:lnRef idx="2">
+            <a:schemeClr val="accent1">
+              <a:shade val="15000"/>
+            </a:schemeClr>
+          </a:lnRef>
+          <a:fillRef idx="1">
+            <a:schemeClr val="accent1"/>
+          </a:fillRef>
+          <a:effectRef idx="0">
+            <a:schemeClr val="accent1"/>
+          </a:effectRef>
+          <a:fontRef idx="minor">
+            <a:schemeClr val="lt1"/>
+          </a:fontRef>
+        </p:style>
+        <p:txBody>
+          <a:bodyPr rtlCol="0" anchor="ctr"/>
+          <a:lstStyle/>
+          <a:p>
+            <a:pPr algn="ctr"/>
+            <a:r>
+              <a:rPr lang="en-KR" sz="2700" dirty="0"/>
+              <a:t>worker</a:t>
+            </a:r>
+          </a:p>
+        </p:txBody>
+      </p:sp>
+      <p:sp>
+        <p:nvSpPr>
+          <p:cNvPr id="7" name="Oval 6">
+            <a:extLst>
+              <a:ext uri="{FF2B5EF4-FFF2-40B4-BE49-F238E27FC236}">
+                <a16:creationId xmlns:a16="http://schemas.microsoft.com/office/drawing/2014/main" id="{4416FFEC-0135-EEB7-FB26-7CD9B2549F4E}"/>
+              </a:ext>
+            </a:extLst>
+          </p:cNvPr>
+          <p:cNvSpPr/>
+          <p:nvPr/>
+        </p:nvSpPr>
+        <p:spPr>
+          <a:xfrm>
+            <a:off x="12998305" y="7028398"/>
+            <a:ext cx="2169041" cy="2169041"/>
+          </a:xfrm>
+          <a:prstGeom prst="ellipse">
+            <a:avLst/>
+          </a:prstGeom>
+        </p:spPr>
+        <p:style>
+          <a:lnRef idx="2">
+            <a:schemeClr val="accent1">
+              <a:shade val="15000"/>
+            </a:schemeClr>
+          </a:lnRef>
+          <a:fillRef idx="1">
+            <a:schemeClr val="accent1"/>
+          </a:fillRef>
+          <a:effectRef idx="0">
+            <a:schemeClr val="accent1"/>
+          </a:effectRef>
+          <a:fontRef idx="minor">
+            <a:schemeClr val="lt1"/>
+          </a:fontRef>
+        </p:style>
+        <p:txBody>
+          <a:bodyPr rtlCol="0" anchor="ctr"/>
+          <a:lstStyle/>
+          <a:p>
+            <a:pPr algn="ctr"/>
+            <a:r>
+              <a:rPr lang="en-KR" sz="2700" dirty="0"/>
+              <a:t>worker</a:t>
+            </a:r>
+          </a:p>
+        </p:txBody>
+      </p:sp>
+      <p:cxnSp>
+        <p:nvCxnSpPr>
+          <p:cNvPr id="9" name="Straight Arrow Connector 8">
+            <a:extLst>
+              <a:ext uri="{FF2B5EF4-FFF2-40B4-BE49-F238E27FC236}">
+                <a16:creationId xmlns:a16="http://schemas.microsoft.com/office/drawing/2014/main" id="{DE4FBF5B-AF0E-CBA0-7A51-A1C3D8807338}"/>
+              </a:ext>
+            </a:extLst>
+          </p:cNvPr>
+          <p:cNvCxnSpPr>
+            <a:cxnSpLocks/>
+            <a:stCxn id="5" idx="2"/>
+            <a:endCxn id="4" idx="3"/>
+          </p:cNvCxnSpPr>
+          <p:nvPr/>
+        </p:nvCxnSpPr>
+        <p:spPr>
+          <a:xfrm flipH="1">
+            <a:off x="5342861" y="2541458"/>
+            <a:ext cx="7655444" cy="2602043"/>
+          </a:xfrm>
+          <a:prstGeom prst="straightConnector1">
+            <a:avLst/>
+          </a:prstGeom>
+          <a:ln>
+            <a:solidFill>
+              <a:srgbClr val="FF0000"/>
+            </a:solidFill>
+            <a:tailEnd type="triangle"/>
+          </a:ln>
+        </p:spPr>
+        <p:style>
+          <a:lnRef idx="2">
+            <a:schemeClr val="accent1"/>
+          </a:lnRef>
+          <a:fillRef idx="0">
+            <a:schemeClr val="accent1"/>
+          </a:fillRef>
+          <a:effectRef idx="1">
+            <a:schemeClr val="accent1"/>
+          </a:effectRef>
+          <a:fontRef idx="minor">
+            <a:schemeClr val="tx1"/>
+          </a:fontRef>
+        </p:style>
+      </p:cxnSp>
+      <p:sp>
+        <p:nvSpPr>
+          <p:cNvPr id="10" name="TextBox 9">
+            <a:extLst>
+              <a:ext uri="{FF2B5EF4-FFF2-40B4-BE49-F238E27FC236}">
+                <a16:creationId xmlns:a16="http://schemas.microsoft.com/office/drawing/2014/main" id="{7FB72394-EE8A-ACC3-2DEE-942A89B21874}"/>
+              </a:ext>
+            </a:extLst>
+          </p:cNvPr>
+          <p:cNvSpPr txBox="1"/>
+          <p:nvPr/>
+        </p:nvSpPr>
+        <p:spPr>
+          <a:xfrm>
+            <a:off x="5952453" y="2672357"/>
+            <a:ext cx="5992346" cy="507831"/>
+          </a:xfrm>
+          <a:prstGeom prst="rect">
+            <a:avLst/>
+          </a:prstGeom>
+          <a:noFill/>
+          <a:ln>
+            <a:noFill/>
+          </a:ln>
+        </p:spPr>
+        <p:txBody>
+          <a:bodyPr wrap="none" rtlCol="0">
+            <a:spAutoFit/>
+          </a:bodyPr>
+          <a:lstStyle/>
+          <a:p>
+            <a:r>
+              <a:rPr lang="en-US" sz="2700" dirty="0">
+                <a:solidFill>
+                  <a:srgbClr val="FF0000"/>
+                </a:solidFill>
+              </a:rPr>
+              <a:t>1. Register each worker’s </a:t>
+            </a:r>
+            <a:r>
+              <a:rPr lang="en-US" sz="2700" dirty="0" err="1">
+                <a:solidFill>
+                  <a:srgbClr val="FF0000"/>
+                </a:solidFill>
+              </a:rPr>
+              <a:t>ip</a:t>
+            </a:r>
+            <a:r>
+              <a:rPr lang="en-US" sz="2700" dirty="0">
+                <a:solidFill>
+                  <a:srgbClr val="FF0000"/>
+                </a:solidFill>
+              </a:rPr>
+              <a:t> to the master</a:t>
+            </a:r>
+            <a:endParaRPr lang="en-KR" sz="2700" dirty="0">
+              <a:solidFill>
+                <a:srgbClr val="FF0000"/>
+              </a:solidFill>
+            </a:endParaRPr>
+          </a:p>
+        </p:txBody>
+      </p:sp>
+      <p:cxnSp>
+        <p:nvCxnSpPr>
+          <p:cNvPr id="13" name="Straight Arrow Connector 12">
+            <a:extLst>
+              <a:ext uri="{FF2B5EF4-FFF2-40B4-BE49-F238E27FC236}">
+                <a16:creationId xmlns:a16="http://schemas.microsoft.com/office/drawing/2014/main" id="{450E410A-174E-75B3-E8C5-DF91797A78CE}"/>
+              </a:ext>
+            </a:extLst>
+          </p:cNvPr>
+          <p:cNvCxnSpPr>
+            <a:cxnSpLocks/>
+            <a:endCxn id="4" idx="3"/>
+          </p:cNvCxnSpPr>
+          <p:nvPr/>
+        </p:nvCxnSpPr>
+        <p:spPr>
+          <a:xfrm flipH="1">
+            <a:off x="5342861" y="5143497"/>
+            <a:ext cx="7655444" cy="3"/>
+          </a:xfrm>
+          <a:prstGeom prst="straightConnector1">
+            <a:avLst/>
+          </a:prstGeom>
+          <a:ln>
+            <a:solidFill>
+              <a:srgbClr val="FF0000"/>
+            </a:solidFill>
+            <a:tailEnd type="triangle"/>
+          </a:ln>
+        </p:spPr>
+        <p:style>
+          <a:lnRef idx="2">
+            <a:schemeClr val="accent1"/>
+          </a:lnRef>
+          <a:fillRef idx="0">
+            <a:schemeClr val="accent1"/>
+          </a:fillRef>
+          <a:effectRef idx="1">
+            <a:schemeClr val="accent1"/>
+          </a:effectRef>
+          <a:fontRef idx="minor">
+            <a:schemeClr val="tx1"/>
+          </a:fontRef>
+        </p:style>
+      </p:cxnSp>
+      <p:cxnSp>
+        <p:nvCxnSpPr>
+          <p:cNvPr id="16" name="Straight Arrow Connector 15">
+            <a:extLst>
+              <a:ext uri="{FF2B5EF4-FFF2-40B4-BE49-F238E27FC236}">
+                <a16:creationId xmlns:a16="http://schemas.microsoft.com/office/drawing/2014/main" id="{FCDD90A9-0B24-0CC9-1398-E57F2544EE4A}"/>
+              </a:ext>
+            </a:extLst>
+          </p:cNvPr>
+          <p:cNvCxnSpPr>
+            <a:cxnSpLocks/>
+            <a:stCxn id="7" idx="2"/>
+            <a:endCxn id="4" idx="3"/>
+          </p:cNvCxnSpPr>
+          <p:nvPr/>
+        </p:nvCxnSpPr>
+        <p:spPr>
+          <a:xfrm flipH="1" flipV="1">
+            <a:off x="5342861" y="5143500"/>
+            <a:ext cx="7655444" cy="2969418"/>
+          </a:xfrm>
+          <a:prstGeom prst="straightConnector1">
+            <a:avLst/>
+          </a:prstGeom>
+          <a:ln>
+            <a:solidFill>
+              <a:srgbClr val="FF0000"/>
+            </a:solidFill>
+            <a:tailEnd type="triangle"/>
+          </a:ln>
+        </p:spPr>
+        <p:style>
+          <a:lnRef idx="2">
+            <a:schemeClr val="accent1"/>
+          </a:lnRef>
+          <a:fillRef idx="0">
+            <a:schemeClr val="accent1"/>
+          </a:fillRef>
+          <a:effectRef idx="1">
+            <a:schemeClr val="accent1"/>
+          </a:effectRef>
+          <a:fontRef idx="minor">
+            <a:schemeClr val="tx1"/>
+          </a:fontRef>
+        </p:style>
+      </p:cxnSp>
+      <p:sp>
+        <p:nvSpPr>
+          <p:cNvPr id="22" name="TextBox 21">
+            <a:extLst>
+              <a:ext uri="{FF2B5EF4-FFF2-40B4-BE49-F238E27FC236}">
+                <a16:creationId xmlns:a16="http://schemas.microsoft.com/office/drawing/2014/main" id="{77525031-2A82-3EF2-2FBD-9DBC147371A3}"/>
+              </a:ext>
+            </a:extLst>
+          </p:cNvPr>
+          <p:cNvSpPr txBox="1"/>
+          <p:nvPr/>
+        </p:nvSpPr>
+        <p:spPr>
+          <a:xfrm>
+            <a:off x="6540502" y="6759589"/>
+            <a:ext cx="2959015" cy="507831"/>
+          </a:xfrm>
+          <a:prstGeom prst="rect">
+            <a:avLst/>
+          </a:prstGeom>
+          <a:noFill/>
+        </p:spPr>
+        <p:txBody>
+          <a:bodyPr wrap="none" rtlCol="0">
+            <a:spAutoFit/>
+          </a:bodyPr>
+          <a:lstStyle/>
+          <a:p>
+            <a:r>
+              <a:rPr lang="en-US" sz="2700" dirty="0">
+                <a:solidFill>
+                  <a:schemeClr val="accent3"/>
+                </a:solidFill>
+              </a:rPr>
+              <a:t>3. Sampling request</a:t>
+            </a:r>
+            <a:endParaRPr lang="en-KR" sz="2700" dirty="0">
+              <a:solidFill>
+                <a:schemeClr val="accent3"/>
+              </a:solidFill>
+            </a:endParaRPr>
+          </a:p>
+        </p:txBody>
+      </p:sp>
+      <p:cxnSp>
+        <p:nvCxnSpPr>
+          <p:cNvPr id="24" name="Straight Arrow Connector 23">
+            <a:extLst>
+              <a:ext uri="{FF2B5EF4-FFF2-40B4-BE49-F238E27FC236}">
+                <a16:creationId xmlns:a16="http://schemas.microsoft.com/office/drawing/2014/main" id="{C3F67C8A-22F3-AFA3-2B85-E63E63F501E0}"/>
+              </a:ext>
+            </a:extLst>
+          </p:cNvPr>
+          <p:cNvCxnSpPr>
+            <a:stCxn id="4" idx="3"/>
+            <a:endCxn id="6" idx="2"/>
+          </p:cNvCxnSpPr>
+          <p:nvPr/>
+        </p:nvCxnSpPr>
+        <p:spPr>
+          <a:xfrm flipV="1">
+            <a:off x="5342861" y="5143499"/>
+            <a:ext cx="7655444" cy="2"/>
+          </a:xfrm>
+          <a:prstGeom prst="straightConnector1">
+            <a:avLst/>
+          </a:prstGeom>
+          <a:ln>
+            <a:tailEnd type="triangle"/>
+          </a:ln>
+        </p:spPr>
+        <p:style>
+          <a:lnRef idx="2">
+            <a:schemeClr val="accent1"/>
+          </a:lnRef>
+          <a:fillRef idx="0">
+            <a:schemeClr val="accent1"/>
+          </a:fillRef>
+          <a:effectRef idx="1">
+            <a:schemeClr val="accent1"/>
+          </a:effectRef>
+          <a:fontRef idx="minor">
+            <a:schemeClr val="tx1"/>
+          </a:fontRef>
+        </p:style>
+      </p:cxnSp>
+      <p:cxnSp>
+        <p:nvCxnSpPr>
+          <p:cNvPr id="25" name="Straight Arrow Connector 24">
+            <a:extLst>
+              <a:ext uri="{FF2B5EF4-FFF2-40B4-BE49-F238E27FC236}">
+                <a16:creationId xmlns:a16="http://schemas.microsoft.com/office/drawing/2014/main" id="{8A6B1FBD-EDFB-D877-8C0A-969FD79EA800}"/>
+              </a:ext>
+            </a:extLst>
+          </p:cNvPr>
+          <p:cNvCxnSpPr>
+            <a:cxnSpLocks/>
+            <a:endCxn id="5" idx="2"/>
+          </p:cNvCxnSpPr>
+          <p:nvPr/>
+        </p:nvCxnSpPr>
+        <p:spPr>
+          <a:xfrm flipV="1">
+            <a:off x="5342861" y="2541458"/>
+            <a:ext cx="7655444" cy="2602040"/>
+          </a:xfrm>
+          <a:prstGeom prst="straightConnector1">
+            <a:avLst/>
+          </a:prstGeom>
+          <a:ln>
+            <a:tailEnd type="triangle"/>
+          </a:ln>
+        </p:spPr>
+        <p:style>
+          <a:lnRef idx="2">
+            <a:schemeClr val="accent1"/>
+          </a:lnRef>
+          <a:fillRef idx="0">
+            <a:schemeClr val="accent1"/>
+          </a:fillRef>
+          <a:effectRef idx="1">
+            <a:schemeClr val="accent1"/>
+          </a:effectRef>
+          <a:fontRef idx="minor">
+            <a:schemeClr val="tx1"/>
+          </a:fontRef>
+        </p:style>
+      </p:cxnSp>
+      <p:cxnSp>
+        <p:nvCxnSpPr>
+          <p:cNvPr id="28" name="Straight Arrow Connector 27">
+            <a:extLst>
+              <a:ext uri="{FF2B5EF4-FFF2-40B4-BE49-F238E27FC236}">
+                <a16:creationId xmlns:a16="http://schemas.microsoft.com/office/drawing/2014/main" id="{BA285959-9533-6B1C-2441-64A54C1A5A74}"/>
+              </a:ext>
+            </a:extLst>
+          </p:cNvPr>
+          <p:cNvCxnSpPr>
+            <a:cxnSpLocks/>
+            <a:stCxn id="4" idx="3"/>
+            <a:endCxn id="7" idx="2"/>
+          </p:cNvCxnSpPr>
+          <p:nvPr/>
+        </p:nvCxnSpPr>
+        <p:spPr>
+          <a:xfrm>
+            <a:off x="5342861" y="5143500"/>
+            <a:ext cx="7655444" cy="2969418"/>
+          </a:xfrm>
+          <a:prstGeom prst="straightConnector1">
+            <a:avLst/>
+          </a:prstGeom>
+          <a:ln>
+            <a:tailEnd type="triangle"/>
+          </a:ln>
+        </p:spPr>
+        <p:style>
+          <a:lnRef idx="2">
+            <a:schemeClr val="accent1"/>
+          </a:lnRef>
+          <a:fillRef idx="0">
+            <a:schemeClr val="accent1"/>
+          </a:fillRef>
+          <a:effectRef idx="1">
+            <a:schemeClr val="accent1"/>
+          </a:effectRef>
+          <a:fontRef idx="minor">
+            <a:schemeClr val="tx1"/>
+          </a:fontRef>
+        </p:style>
+      </p:cxnSp>
+      <p:sp>
+        <p:nvSpPr>
+          <p:cNvPr id="31" name="TextBox 30">
+            <a:extLst>
+              <a:ext uri="{FF2B5EF4-FFF2-40B4-BE49-F238E27FC236}">
+                <a16:creationId xmlns:a16="http://schemas.microsoft.com/office/drawing/2014/main" id="{BDD7C031-471F-B9D5-179D-CD64D6883C2F}"/>
+              </a:ext>
+            </a:extLst>
+          </p:cNvPr>
+          <p:cNvSpPr txBox="1"/>
+          <p:nvPr/>
+        </p:nvSpPr>
+        <p:spPr>
+          <a:xfrm>
+            <a:off x="7107902" y="5259047"/>
+            <a:ext cx="4330700" cy="923330"/>
+          </a:xfrm>
+          <a:prstGeom prst="rect">
+            <a:avLst/>
+          </a:prstGeom>
+          <a:noFill/>
+        </p:spPr>
+        <p:txBody>
+          <a:bodyPr wrap="square" rtlCol="0">
+            <a:spAutoFit/>
+          </a:bodyPr>
+          <a:lstStyle/>
+          <a:p>
+            <a:pPr algn="ctr"/>
+            <a:r>
+              <a:rPr lang="en-KR" sz="2700" dirty="0">
+                <a:solidFill>
+                  <a:schemeClr val="tx2"/>
+                </a:solidFill>
+              </a:rPr>
+              <a:t>2. </a:t>
+            </a:r>
+            <a:r>
+              <a:rPr lang="en-US" sz="2700" dirty="0">
+                <a:solidFill>
+                  <a:schemeClr val="tx2"/>
+                </a:solidFill>
+              </a:rPr>
+              <a:t>G</a:t>
+            </a:r>
+            <a:r>
+              <a:rPr lang="en-KR" sz="2700" dirty="0">
+                <a:solidFill>
+                  <a:schemeClr val="tx2"/>
+                </a:solidFill>
+              </a:rPr>
+              <a:t>ather the all I</a:t>
+            </a:r>
+            <a:r>
+              <a:rPr lang="en-US" sz="2700" dirty="0">
+                <a:solidFill>
+                  <a:schemeClr val="tx2"/>
+                </a:solidFill>
+              </a:rPr>
+              <a:t>p</a:t>
+            </a:r>
+            <a:r>
+              <a:rPr lang="en-KR" sz="2700" dirty="0">
+                <a:solidFill>
+                  <a:schemeClr val="tx2"/>
+                </a:solidFill>
+              </a:rPr>
+              <a:t>s and send them back to all workers</a:t>
+            </a:r>
+          </a:p>
+        </p:txBody>
+      </p:sp>
+      <p:sp>
+        <p:nvSpPr>
+          <p:cNvPr id="38" name="Down Arrow 37">
+            <a:extLst>
+              <a:ext uri="{FF2B5EF4-FFF2-40B4-BE49-F238E27FC236}">
+                <a16:creationId xmlns:a16="http://schemas.microsoft.com/office/drawing/2014/main" id="{AA5A5780-9CAF-1E8E-AEB7-D0559EDDEAD3}"/>
+              </a:ext>
+            </a:extLst>
+          </p:cNvPr>
+          <p:cNvSpPr/>
+          <p:nvPr/>
+        </p:nvSpPr>
+        <p:spPr>
+          <a:xfrm rot="4131090">
+            <a:off x="9699885" y="2724877"/>
+            <a:ext cx="448599" cy="2633144"/>
+          </a:xfrm>
+          <a:prstGeom prst="downArrow">
+            <a:avLst/>
+          </a:prstGeom>
+          <a:solidFill>
+            <a:schemeClr val="accent4"/>
+          </a:solidFill>
+          <a:ln>
+            <a:solidFill>
+              <a:schemeClr val="accent4"/>
+            </a:solidFill>
+          </a:ln>
+        </p:spPr>
+        <p:style>
+          <a:lnRef idx="2">
+            <a:schemeClr val="accent1">
+              <a:shade val="15000"/>
+            </a:schemeClr>
+          </a:lnRef>
+          <a:fillRef idx="1">
+            <a:schemeClr val="accent1"/>
+          </a:fillRef>
+          <a:effectRef idx="0">
+            <a:schemeClr val="accent1"/>
+          </a:effectRef>
+          <a:fontRef idx="minor">
+            <a:schemeClr val="lt1"/>
+          </a:fontRef>
+        </p:style>
+        <p:txBody>
+          <a:bodyPr rtlCol="0" anchor="ctr"/>
+          <a:lstStyle/>
+          <a:p>
+            <a:pPr algn="ctr"/>
+            <a:endParaRPr lang="en-KR" sz="2700"/>
+          </a:p>
+        </p:txBody>
+      </p:sp>
+      <p:sp>
+        <p:nvSpPr>
+          <p:cNvPr id="39" name="Down Arrow 38">
+            <a:extLst>
+              <a:ext uri="{FF2B5EF4-FFF2-40B4-BE49-F238E27FC236}">
+                <a16:creationId xmlns:a16="http://schemas.microsoft.com/office/drawing/2014/main" id="{3F677DFB-A41B-F876-467E-6BE1D644F744}"/>
+              </a:ext>
+            </a:extLst>
+          </p:cNvPr>
+          <p:cNvSpPr/>
+          <p:nvPr/>
+        </p:nvSpPr>
+        <p:spPr>
+          <a:xfrm rot="5400000">
+            <a:off x="9733674" y="4288975"/>
+            <a:ext cx="448599" cy="2567270"/>
+          </a:xfrm>
+          <a:prstGeom prst="downArrow">
+            <a:avLst/>
+          </a:prstGeom>
+          <a:solidFill>
+            <a:schemeClr val="accent4"/>
+          </a:solidFill>
+          <a:ln>
+            <a:solidFill>
+              <a:schemeClr val="accent4"/>
+            </a:solidFill>
+          </a:ln>
+        </p:spPr>
+        <p:style>
+          <a:lnRef idx="2">
+            <a:schemeClr val="accent1">
+              <a:shade val="15000"/>
+            </a:schemeClr>
+          </a:lnRef>
+          <a:fillRef idx="1">
+            <a:schemeClr val="accent1"/>
+          </a:fillRef>
+          <a:effectRef idx="0">
+            <a:schemeClr val="accent1"/>
+          </a:effectRef>
+          <a:fontRef idx="minor">
+            <a:schemeClr val="lt1"/>
+          </a:fontRef>
+        </p:style>
+        <p:txBody>
+          <a:bodyPr rtlCol="0" anchor="ctr"/>
+          <a:lstStyle/>
+          <a:p>
+            <a:pPr algn="ctr"/>
+            <a:endParaRPr lang="en-KR" sz="2700"/>
+          </a:p>
+        </p:txBody>
+      </p:sp>
+      <p:sp>
+        <p:nvSpPr>
+          <p:cNvPr id="40" name="Down Arrow 39">
+            <a:extLst>
+              <a:ext uri="{FF2B5EF4-FFF2-40B4-BE49-F238E27FC236}">
+                <a16:creationId xmlns:a16="http://schemas.microsoft.com/office/drawing/2014/main" id="{551D02D0-D4DE-E264-D584-D9E17D1AFED7}"/>
+              </a:ext>
+            </a:extLst>
+          </p:cNvPr>
+          <p:cNvSpPr/>
+          <p:nvPr/>
+        </p:nvSpPr>
+        <p:spPr>
+          <a:xfrm rot="6659656">
+            <a:off x="9631412" y="5365082"/>
+            <a:ext cx="448599" cy="2358593"/>
+          </a:xfrm>
+          <a:prstGeom prst="downArrow">
+            <a:avLst/>
+          </a:prstGeom>
+          <a:solidFill>
+            <a:schemeClr val="accent4"/>
+          </a:solidFill>
+          <a:ln>
+            <a:solidFill>
+              <a:schemeClr val="accent4"/>
+            </a:solidFill>
+          </a:ln>
+        </p:spPr>
+        <p:style>
+          <a:lnRef idx="2">
+            <a:schemeClr val="accent1">
+              <a:shade val="15000"/>
+            </a:schemeClr>
+          </a:lnRef>
+          <a:fillRef idx="1">
+            <a:schemeClr val="accent1"/>
+          </a:fillRef>
+          <a:effectRef idx="0">
+            <a:schemeClr val="accent1"/>
+          </a:effectRef>
+          <a:fontRef idx="minor">
+            <a:schemeClr val="lt1"/>
+          </a:fontRef>
+        </p:style>
+        <p:txBody>
+          <a:bodyPr rtlCol="0" anchor="ctr"/>
+          <a:lstStyle/>
+          <a:p>
+            <a:pPr algn="ctr"/>
+            <a:endParaRPr lang="en-KR" sz="2700"/>
+          </a:p>
+        </p:txBody>
+      </p:sp>
+      <p:sp>
+        <p:nvSpPr>
+          <p:cNvPr id="41" name="TextBox 40">
+            <a:extLst>
+              <a:ext uri="{FF2B5EF4-FFF2-40B4-BE49-F238E27FC236}">
+                <a16:creationId xmlns:a16="http://schemas.microsoft.com/office/drawing/2014/main" id="{B7881BE5-96A6-1D21-056F-51D4E112AAFB}"/>
+              </a:ext>
+            </a:extLst>
+          </p:cNvPr>
+          <p:cNvSpPr txBox="1"/>
+          <p:nvPr/>
+        </p:nvSpPr>
+        <p:spPr>
+          <a:xfrm>
+            <a:off x="9104777" y="4448644"/>
+            <a:ext cx="3408882" cy="507831"/>
+          </a:xfrm>
+          <a:prstGeom prst="rect">
+            <a:avLst/>
+          </a:prstGeom>
+          <a:noFill/>
+        </p:spPr>
+        <p:txBody>
+          <a:bodyPr wrap="none" rtlCol="0">
+            <a:spAutoFit/>
+          </a:bodyPr>
+          <a:lstStyle/>
+          <a:p>
+            <a:r>
+              <a:rPr lang="en-KR" sz="2700" dirty="0">
+                <a:solidFill>
+                  <a:schemeClr val="accent4"/>
+                </a:solidFill>
+              </a:rPr>
+              <a:t>4. return sample datas </a:t>
+            </a:r>
+          </a:p>
+        </p:txBody>
+      </p:sp>
+      <p:sp>
+        <p:nvSpPr>
+          <p:cNvPr id="42" name="TextBox 41">
+            <a:extLst>
+              <a:ext uri="{FF2B5EF4-FFF2-40B4-BE49-F238E27FC236}">
+                <a16:creationId xmlns:a16="http://schemas.microsoft.com/office/drawing/2014/main" id="{978AA5E9-F3BA-F59A-BF1F-54AD66387ACF}"/>
+              </a:ext>
+            </a:extLst>
+          </p:cNvPr>
+          <p:cNvSpPr txBox="1"/>
+          <p:nvPr/>
+        </p:nvSpPr>
+        <p:spPr>
+          <a:xfrm>
+            <a:off x="1295536" y="6294297"/>
+            <a:ext cx="4252664" cy="1338828"/>
+          </a:xfrm>
+          <a:prstGeom prst="rect">
+            <a:avLst/>
+          </a:prstGeom>
+          <a:noFill/>
+        </p:spPr>
+        <p:txBody>
+          <a:bodyPr wrap="square" rtlCol="0">
+            <a:spAutoFit/>
+          </a:bodyPr>
+          <a:lstStyle/>
+          <a:p>
+            <a:pPr algn="ctr"/>
+            <a:r>
+              <a:rPr lang="en-KR" sz="2700" dirty="0"/>
+              <a:t>4. </a:t>
+            </a:r>
+            <a:r>
+              <a:rPr lang="en-US" sz="2700" dirty="0"/>
+              <a:t>C</a:t>
+            </a:r>
+            <a:r>
+              <a:rPr lang="en-KR" sz="2700" dirty="0"/>
+              <a:t>alculate each key range </a:t>
+            </a:r>
+            <a:r>
+              <a:rPr lang="en-US" sz="2700" dirty="0"/>
+              <a:t>and send them back to each worker</a:t>
+            </a:r>
+            <a:endParaRPr lang="en-KR" sz="2700" dirty="0"/>
+          </a:p>
+        </p:txBody>
+      </p:sp>
+      <p:sp>
+        <p:nvSpPr>
+          <p:cNvPr id="43" name="TextBox 42">
+            <a:extLst>
+              <a:ext uri="{FF2B5EF4-FFF2-40B4-BE49-F238E27FC236}">
+                <a16:creationId xmlns:a16="http://schemas.microsoft.com/office/drawing/2014/main" id="{B7AE372D-D298-DFF2-3DFB-FEBA13438E9A}"/>
+              </a:ext>
+            </a:extLst>
+          </p:cNvPr>
+          <p:cNvSpPr txBox="1"/>
+          <p:nvPr/>
+        </p:nvSpPr>
+        <p:spPr>
+          <a:xfrm>
+            <a:off x="14035337" y="4794311"/>
+            <a:ext cx="4252664" cy="507831"/>
+          </a:xfrm>
+          <a:prstGeom prst="rect">
+            <a:avLst/>
+          </a:prstGeom>
+          <a:noFill/>
+        </p:spPr>
+        <p:txBody>
+          <a:bodyPr wrap="square" rtlCol="0">
+            <a:spAutoFit/>
+          </a:bodyPr>
+          <a:lstStyle/>
+          <a:p>
+            <a:pPr algn="ctr"/>
+            <a:r>
+              <a:rPr lang="en-US" altLang="ko-KR" sz="2700" dirty="0">
+                <a:solidFill>
+                  <a:schemeClr val="accent5"/>
+                </a:solidFill>
+              </a:rPr>
+              <a:t>5. sorting</a:t>
+            </a:r>
+            <a:endParaRPr lang="en-KR" sz="2700" dirty="0">
+              <a:solidFill>
+                <a:schemeClr val="accent5"/>
+              </a:solidFill>
+            </a:endParaRPr>
+          </a:p>
+        </p:txBody>
+      </p:sp>
+      <p:sp>
+        <p:nvSpPr>
+          <p:cNvPr id="45" name="Up-Down Arrow 44">
+            <a:extLst>
+              <a:ext uri="{FF2B5EF4-FFF2-40B4-BE49-F238E27FC236}">
+                <a16:creationId xmlns:a16="http://schemas.microsoft.com/office/drawing/2014/main" id="{2DA282A3-00B8-E103-CD57-4AB010E1CB7A}"/>
+              </a:ext>
+            </a:extLst>
+          </p:cNvPr>
+          <p:cNvSpPr/>
+          <p:nvPr/>
+        </p:nvSpPr>
+        <p:spPr>
+          <a:xfrm>
+            <a:off x="13891187" y="3231332"/>
+            <a:ext cx="383274" cy="1222289"/>
+          </a:xfrm>
+          <a:prstGeom prst="upDownArrow">
+            <a:avLst/>
+          </a:prstGeom>
+          <a:solidFill>
+            <a:schemeClr val="accent5"/>
+          </a:solidFill>
+          <a:ln>
+            <a:solidFill>
+              <a:schemeClr val="accent5"/>
+            </a:solidFill>
+          </a:ln>
+        </p:spPr>
+        <p:style>
+          <a:lnRef idx="2">
+            <a:schemeClr val="accent1">
+              <a:shade val="15000"/>
+            </a:schemeClr>
+          </a:lnRef>
+          <a:fillRef idx="1">
+            <a:schemeClr val="accent1"/>
+          </a:fillRef>
+          <a:effectRef idx="0">
+            <a:schemeClr val="accent1"/>
+          </a:effectRef>
+          <a:fontRef idx="minor">
+            <a:schemeClr val="lt1"/>
+          </a:fontRef>
+        </p:style>
+        <p:txBody>
+          <a:bodyPr rtlCol="0" anchor="ctr"/>
+          <a:lstStyle/>
+          <a:p>
+            <a:pPr algn="ctr"/>
+            <a:endParaRPr lang="en-KR" sz="2700"/>
+          </a:p>
+        </p:txBody>
+      </p:sp>
+      <p:sp>
+        <p:nvSpPr>
+          <p:cNvPr id="46" name="Up-Down Arrow 45">
+            <a:extLst>
+              <a:ext uri="{FF2B5EF4-FFF2-40B4-BE49-F238E27FC236}">
+                <a16:creationId xmlns:a16="http://schemas.microsoft.com/office/drawing/2014/main" id="{43BA9531-4ACE-338A-5D93-9B061A6C2E4B}"/>
+              </a:ext>
+            </a:extLst>
+          </p:cNvPr>
+          <p:cNvSpPr/>
+          <p:nvPr/>
+        </p:nvSpPr>
+        <p:spPr>
+          <a:xfrm>
+            <a:off x="13891187" y="6033059"/>
+            <a:ext cx="383274" cy="1222289"/>
+          </a:xfrm>
+          <a:prstGeom prst="upDownArrow">
+            <a:avLst/>
+          </a:prstGeom>
+          <a:solidFill>
+            <a:schemeClr val="accent5"/>
+          </a:solidFill>
+          <a:ln>
+            <a:solidFill>
+              <a:schemeClr val="accent5"/>
+            </a:solidFill>
+          </a:ln>
+        </p:spPr>
+        <p:style>
+          <a:lnRef idx="2">
+            <a:schemeClr val="accent1">
+              <a:shade val="15000"/>
+            </a:schemeClr>
+          </a:lnRef>
+          <a:fillRef idx="1">
+            <a:schemeClr val="accent1"/>
+          </a:fillRef>
+          <a:effectRef idx="0">
+            <a:schemeClr val="accent1"/>
+          </a:effectRef>
+          <a:fontRef idx="minor">
+            <a:schemeClr val="lt1"/>
+          </a:fontRef>
+        </p:style>
+        <p:txBody>
+          <a:bodyPr rtlCol="0" anchor="ctr"/>
+          <a:lstStyle/>
+          <a:p>
+            <a:pPr algn="ctr"/>
+            <a:endParaRPr lang="en-KR" sz="2700"/>
+          </a:p>
+        </p:txBody>
+      </p:sp>
+      <p:sp>
+        <p:nvSpPr>
+          <p:cNvPr id="48" name="Title 47">
+            <a:extLst>
+              <a:ext uri="{FF2B5EF4-FFF2-40B4-BE49-F238E27FC236}">
+                <a16:creationId xmlns:a16="http://schemas.microsoft.com/office/drawing/2014/main" id="{95C8EAC9-06E0-99E8-6118-051DB104C5F3}"/>
+              </a:ext>
+            </a:extLst>
+          </p:cNvPr>
+          <p:cNvSpPr>
+            <a:spLocks noGrp="1"/>
+          </p:cNvSpPr>
+          <p:nvPr>
+            <p:ph type="title"/>
+          </p:nvPr>
+        </p:nvSpPr>
+        <p:spPr/>
+        <p:txBody>
+          <a:bodyPr/>
+          <a:lstStyle/>
+          <a:p>
+            <a:r>
+              <a:rPr lang="en-KR" dirty="0"/>
+              <a:t>Overall Flow</a:t>
+            </a:r>
+          </a:p>
+        </p:txBody>
+      </p:sp>
+    </p:spTree>
+    <p:extLst>
+      <p:ext uri="{BB962C8B-B14F-4D97-AF65-F5344CB8AC3E}">
+        <p14:creationId xmlns:p14="http://schemas.microsoft.com/office/powerpoint/2010/main" val="2062556894"/>
+      </p:ext>
+    </p:extLst>
+  </p:cSld>
+  <p:clrMapOvr>
+    <a:masterClrMapping/>
+  </p:clrMapOvr>
+  <p:timing>
+    <p:tnLst>
+      <p:par>
+        <p:cTn id="1" dur="indefinite" restart="never" nodeType="tmRoot">
+          <p:childTnLst>
+            <p:seq concurrent="1" nextAc="seek">
+              <p:cTn id="2" dur="indefinite" nodeType="mainSeq">
+                <p:childTnLst>
+                  <p:par>
+                    <p:cTn id="3" fill="hold">
+                      <p:stCondLst>
+                        <p:cond delay="indefinite"/>
+                      </p:stCondLst>
+                      <p:childTnLst>
+                        <p:par>
+                          <p:cTn id="4" fill="hold">
+                            <p:stCondLst>
+                              <p:cond delay="0"/>
+                            </p:stCondLst>
+                            <p:childTnLst>
+                              <p:par>
+                                <p:cTn id="5" presetID="1" presetClass="entr" presetSubtype="0" fill="hold" grpId="0" nodeType="clickEffect">
+                                  <p:stCondLst>
+                                    <p:cond delay="0"/>
+                                  </p:stCondLst>
+                                  <p:childTnLst>
+                                    <p:set>
+                                      <p:cBhvr>
+                                        <p:cTn id="6" dur="1" fill="hold">
+                                          <p:stCondLst>
+                                            <p:cond delay="0"/>
+                                          </p:stCondLst>
+                                        </p:cTn>
+                                        <p:tgtEl>
+                                          <p:spTgt spid="10"/>
+                                        </p:tgtEl>
+                                        <p:attrNameLst>
+                                          <p:attrName>style.visibility</p:attrName>
+                                        </p:attrNameLst>
+                                      </p:cBhvr>
+                                      <p:to>
+                                        <p:strVal val="visible"/>
+                                      </p:to>
+                                    </p:set>
+                                  </p:childTnLst>
+                                </p:cTn>
+                              </p:par>
+                              <p:par>
+                                <p:cTn id="7" presetID="1" presetClass="entr" presetSubtype="0" fill="hold" nodeType="withEffect">
+                                  <p:stCondLst>
+                                    <p:cond delay="0"/>
+                                  </p:stCondLst>
+                                  <p:childTnLst>
+                                    <p:set>
+                                      <p:cBhvr>
+                                        <p:cTn id="8" dur="1" fill="hold">
+                                          <p:stCondLst>
+                                            <p:cond delay="0"/>
+                                          </p:stCondLst>
+                                        </p:cTn>
+                                        <p:tgtEl>
+                                          <p:spTgt spid="9"/>
+                                        </p:tgtEl>
+                                        <p:attrNameLst>
+                                          <p:attrName>style.visibility</p:attrName>
+                                        </p:attrNameLst>
+                                      </p:cBhvr>
+                                      <p:to>
+                                        <p:strVal val="visible"/>
+                                      </p:to>
+                                    </p:set>
+                                  </p:childTnLst>
+                                </p:cTn>
+                              </p:par>
+                              <p:par>
+                                <p:cTn id="9" presetID="1" presetClass="entr" presetSubtype="0" fill="hold" nodeType="withEffect">
+                                  <p:stCondLst>
+                                    <p:cond delay="0"/>
+                                  </p:stCondLst>
+                                  <p:childTnLst>
+                                    <p:set>
+                                      <p:cBhvr>
+                                        <p:cTn id="10" dur="1" fill="hold">
+                                          <p:stCondLst>
+                                            <p:cond delay="0"/>
+                                          </p:stCondLst>
+                                        </p:cTn>
+                                        <p:tgtEl>
+                                          <p:spTgt spid="13"/>
+                                        </p:tgtEl>
+                                        <p:attrNameLst>
+                                          <p:attrName>style.visibility</p:attrName>
+                                        </p:attrNameLst>
+                                      </p:cBhvr>
+                                      <p:to>
+                                        <p:strVal val="visible"/>
+                                      </p:to>
+                                    </p:set>
+                                  </p:childTnLst>
+                                </p:cTn>
+                              </p:par>
+                              <p:par>
+                                <p:cTn id="11" presetID="1" presetClass="entr" presetSubtype="0" fill="hold" nodeType="withEffect">
+                                  <p:stCondLst>
+                                    <p:cond delay="0"/>
+                                  </p:stCondLst>
+                                  <p:childTnLst>
+                                    <p:set>
+                                      <p:cBhvr>
+                                        <p:cTn id="12" dur="1" fill="hold">
+                                          <p:stCondLst>
+                                            <p:cond delay="0"/>
+                                          </p:stCondLst>
+                                        </p:cTn>
+                                        <p:tgtEl>
+                                          <p:spTgt spid="16"/>
+                                        </p:tgtEl>
+                                        <p:attrNameLst>
+                                          <p:attrName>style.visibility</p:attrName>
+                                        </p:attrNameLst>
+                                      </p:cBhvr>
+                                      <p:to>
+                                        <p:strVal val="visible"/>
+                                      </p:to>
+                                    </p:set>
+                                  </p:childTnLst>
+                                </p:cTn>
+                              </p:par>
+                            </p:childTnLst>
+                          </p:cTn>
+                        </p:par>
+                      </p:childTnLst>
+                    </p:cTn>
+                  </p:par>
+                  <p:par>
+                    <p:cTn id="13" fill="hold">
+                      <p:stCondLst>
+                        <p:cond delay="indefinite"/>
+                      </p:stCondLst>
+                      <p:childTnLst>
+                        <p:par>
+                          <p:cTn id="14" fill="hold">
+                            <p:stCondLst>
+                              <p:cond delay="0"/>
+                            </p:stCondLst>
+                            <p:childTnLst>
+                              <p:par>
+                                <p:cTn id="15" presetID="1" presetClass="entr" presetSubtype="0" fill="hold" grpId="0" nodeType="clickEffect">
+                                  <p:stCondLst>
+                                    <p:cond delay="0"/>
+                                  </p:stCondLst>
+                                  <p:childTnLst>
+                                    <p:set>
+                                      <p:cBhvr>
+                                        <p:cTn id="16" dur="1" fill="hold">
+                                          <p:stCondLst>
+                                            <p:cond delay="0"/>
+                                          </p:stCondLst>
+                                        </p:cTn>
+                                        <p:tgtEl>
+                                          <p:spTgt spid="31"/>
+                                        </p:tgtEl>
+                                        <p:attrNameLst>
+                                          <p:attrName>style.visibility</p:attrName>
+                                        </p:attrNameLst>
+                                      </p:cBhvr>
+                                      <p:to>
+                                        <p:strVal val="visible"/>
+                                      </p:to>
+                                    </p:set>
+                                  </p:childTnLst>
+                                </p:cTn>
+                              </p:par>
+                              <p:par>
+                                <p:cTn id="17" presetID="1" presetClass="entr" presetSubtype="0" fill="hold" nodeType="withEffect">
+                                  <p:stCondLst>
+                                    <p:cond delay="0"/>
+                                  </p:stCondLst>
+                                  <p:childTnLst>
+                                    <p:set>
+                                      <p:cBhvr>
+                                        <p:cTn id="18" dur="1" fill="hold">
+                                          <p:stCondLst>
+                                            <p:cond delay="0"/>
+                                          </p:stCondLst>
+                                        </p:cTn>
+                                        <p:tgtEl>
+                                          <p:spTgt spid="25"/>
+                                        </p:tgtEl>
+                                        <p:attrNameLst>
+                                          <p:attrName>style.visibility</p:attrName>
+                                        </p:attrNameLst>
+                                      </p:cBhvr>
+                                      <p:to>
+                                        <p:strVal val="visible"/>
+                                      </p:to>
+                                    </p:set>
+                                  </p:childTnLst>
+                                </p:cTn>
+                              </p:par>
+                              <p:par>
+                                <p:cTn id="19" presetID="1" presetClass="entr" presetSubtype="0" fill="hold" nodeType="withEffect">
+                                  <p:stCondLst>
+                                    <p:cond delay="0"/>
+                                  </p:stCondLst>
+                                  <p:childTnLst>
+                                    <p:set>
+                                      <p:cBhvr>
+                                        <p:cTn id="20" dur="1" fill="hold">
+                                          <p:stCondLst>
+                                            <p:cond delay="0"/>
+                                          </p:stCondLst>
+                                        </p:cTn>
+                                        <p:tgtEl>
+                                          <p:spTgt spid="24"/>
+                                        </p:tgtEl>
+                                        <p:attrNameLst>
+                                          <p:attrName>style.visibility</p:attrName>
+                                        </p:attrNameLst>
+                                      </p:cBhvr>
+                                      <p:to>
+                                        <p:strVal val="visible"/>
+                                      </p:to>
+                                    </p:set>
+                                  </p:childTnLst>
+                                </p:cTn>
+                              </p:par>
+                              <p:par>
+                                <p:cTn id="21" presetID="1" presetClass="entr" presetSubtype="0" fill="hold" nodeType="withEffect">
+                                  <p:stCondLst>
+                                    <p:cond delay="0"/>
+                                  </p:stCondLst>
+                                  <p:childTnLst>
+                                    <p:set>
+                                      <p:cBhvr>
+                                        <p:cTn id="22" dur="1" fill="hold">
+                                          <p:stCondLst>
+                                            <p:cond delay="0"/>
+                                          </p:stCondLst>
+                                        </p:cTn>
+                                        <p:tgtEl>
+                                          <p:spTgt spid="28"/>
+                                        </p:tgtEl>
+                                        <p:attrNameLst>
+                                          <p:attrName>style.visibility</p:attrName>
+                                        </p:attrNameLst>
+                                      </p:cBhvr>
+                                      <p:to>
+                                        <p:strVal val="visible"/>
+                                      </p:to>
+                                    </p:set>
+                                  </p:childTnLst>
+                                </p:cTn>
+                              </p:par>
+                            </p:childTnLst>
+                          </p:cTn>
+                        </p:par>
+                      </p:childTnLst>
+                    </p:cTn>
+                  </p:par>
+                  <p:par>
+                    <p:cTn id="23" fill="hold">
+                      <p:stCondLst>
+                        <p:cond delay="indefinite"/>
+                      </p:stCondLst>
+                      <p:childTnLst>
+                        <p:par>
+                          <p:cTn id="24" fill="hold">
+                            <p:stCondLst>
+                              <p:cond delay="0"/>
+                            </p:stCondLst>
+                            <p:childTnLst>
+                              <p:par>
+                                <p:cTn id="25" presetID="1" presetClass="entr" presetSubtype="0" fill="hold" grpId="0" nodeType="clickEffect">
+                                  <p:stCondLst>
+                                    <p:cond delay="0"/>
+                                  </p:stCondLst>
+                                  <p:childTnLst>
+                                    <p:set>
+                                      <p:cBhvr>
+                                        <p:cTn id="26" dur="1" fill="hold">
+                                          <p:stCondLst>
+                                            <p:cond delay="0"/>
+                                          </p:stCondLst>
+                                        </p:cTn>
+                                        <p:tgtEl>
+                                          <p:spTgt spid="22"/>
+                                        </p:tgtEl>
+                                        <p:attrNameLst>
+                                          <p:attrName>style.visibility</p:attrName>
+                                        </p:attrNameLst>
+                                      </p:cBhvr>
+                                      <p:to>
+                                        <p:strVal val="visible"/>
+                                      </p:to>
+                                    </p:set>
+                                  </p:childTnLst>
+                                </p:cTn>
+                              </p:par>
+                            </p:childTnLst>
+                          </p:cTn>
+                        </p:par>
+                      </p:childTnLst>
+                    </p:cTn>
+                  </p:par>
+                  <p:par>
+                    <p:cTn id="27" fill="hold">
+                      <p:stCondLst>
+                        <p:cond delay="indefinite"/>
+                      </p:stCondLst>
+                      <p:childTnLst>
+                        <p:par>
+                          <p:cTn id="28" fill="hold">
+                            <p:stCondLst>
+                              <p:cond delay="0"/>
+                            </p:stCondLst>
+                            <p:childTnLst>
+                              <p:par>
+                                <p:cTn id="29" presetID="1" presetClass="entr" presetSubtype="0" fill="hold" grpId="0" nodeType="clickEffect">
+                                  <p:stCondLst>
+                                    <p:cond delay="0"/>
+                                  </p:stCondLst>
+                                  <p:childTnLst>
+                                    <p:set>
+                                      <p:cBhvr>
+                                        <p:cTn id="30" dur="1" fill="hold">
+                                          <p:stCondLst>
+                                            <p:cond delay="0"/>
+                                          </p:stCondLst>
+                                        </p:cTn>
+                                        <p:tgtEl>
+                                          <p:spTgt spid="41"/>
+                                        </p:tgtEl>
+                                        <p:attrNameLst>
+                                          <p:attrName>style.visibility</p:attrName>
+                                        </p:attrNameLst>
+                                      </p:cBhvr>
+                                      <p:to>
+                                        <p:strVal val="visible"/>
+                                      </p:to>
+                                    </p:set>
+                                  </p:childTnLst>
+                                </p:cTn>
+                              </p:par>
+                              <p:par>
+                                <p:cTn id="31" presetID="1" presetClass="entr" presetSubtype="0" fill="hold" grpId="0" nodeType="withEffect">
+                                  <p:stCondLst>
+                                    <p:cond delay="0"/>
+                                  </p:stCondLst>
+                                  <p:childTnLst>
+                                    <p:set>
+                                      <p:cBhvr>
+                                        <p:cTn id="32" dur="1" fill="hold">
+                                          <p:stCondLst>
+                                            <p:cond delay="0"/>
+                                          </p:stCondLst>
+                                        </p:cTn>
+                                        <p:tgtEl>
+                                          <p:spTgt spid="38"/>
+                                        </p:tgtEl>
+                                        <p:attrNameLst>
+                                          <p:attrName>style.visibility</p:attrName>
+                                        </p:attrNameLst>
+                                      </p:cBhvr>
+                                      <p:to>
+                                        <p:strVal val="visible"/>
+                                      </p:to>
+                                    </p:set>
+                                  </p:childTnLst>
+                                </p:cTn>
+                              </p:par>
+                              <p:par>
+                                <p:cTn id="33" presetID="1" presetClass="entr" presetSubtype="0" fill="hold" grpId="0" nodeType="withEffect">
+                                  <p:stCondLst>
+                                    <p:cond delay="0"/>
+                                  </p:stCondLst>
+                                  <p:childTnLst>
+                                    <p:set>
+                                      <p:cBhvr>
+                                        <p:cTn id="34" dur="1" fill="hold">
+                                          <p:stCondLst>
+                                            <p:cond delay="0"/>
+                                          </p:stCondLst>
+                                        </p:cTn>
+                                        <p:tgtEl>
+                                          <p:spTgt spid="39"/>
+                                        </p:tgtEl>
+                                        <p:attrNameLst>
+                                          <p:attrName>style.visibility</p:attrName>
+                                        </p:attrNameLst>
+                                      </p:cBhvr>
+                                      <p:to>
+                                        <p:strVal val="visible"/>
+                                      </p:to>
+                                    </p:set>
+                                  </p:childTnLst>
+                                </p:cTn>
+                              </p:par>
+                              <p:par>
+                                <p:cTn id="35" presetID="1" presetClass="entr" presetSubtype="0" fill="hold" grpId="0" nodeType="withEffect">
+                                  <p:stCondLst>
+                                    <p:cond delay="0"/>
+                                  </p:stCondLst>
+                                  <p:childTnLst>
+                                    <p:set>
+                                      <p:cBhvr>
+                                        <p:cTn id="36" dur="1" fill="hold">
+                                          <p:stCondLst>
+                                            <p:cond delay="0"/>
+                                          </p:stCondLst>
+                                        </p:cTn>
+                                        <p:tgtEl>
+                                          <p:spTgt spid="40"/>
+                                        </p:tgtEl>
+                                        <p:attrNameLst>
+                                          <p:attrName>style.visibility</p:attrName>
+                                        </p:attrNameLst>
+                                      </p:cBhvr>
+                                      <p:to>
+                                        <p:strVal val="visible"/>
+                                      </p:to>
+                                    </p:set>
+                                  </p:childTnLst>
+                                </p:cTn>
+                              </p:par>
+                            </p:childTnLst>
+                          </p:cTn>
+                        </p:par>
+                      </p:childTnLst>
+                    </p:cTn>
+                  </p:par>
+                  <p:par>
+                    <p:cTn id="37" fill="hold">
+                      <p:stCondLst>
+                        <p:cond delay="indefinite"/>
+                      </p:stCondLst>
+                      <p:childTnLst>
+                        <p:par>
+                          <p:cTn id="38" fill="hold">
+                            <p:stCondLst>
+                              <p:cond delay="0"/>
+                            </p:stCondLst>
+                            <p:childTnLst>
+                              <p:par>
+                                <p:cTn id="39" presetID="1" presetClass="entr" presetSubtype="0" fill="hold" grpId="0" nodeType="clickEffect">
+                                  <p:stCondLst>
+                                    <p:cond delay="0"/>
+                                  </p:stCondLst>
+                                  <p:childTnLst>
+                                    <p:set>
+                                      <p:cBhvr>
+                                        <p:cTn id="40" dur="1" fill="hold">
+                                          <p:stCondLst>
+                                            <p:cond delay="0"/>
+                                          </p:stCondLst>
+                                        </p:cTn>
+                                        <p:tgtEl>
+                                          <p:spTgt spid="42"/>
+                                        </p:tgtEl>
+                                        <p:attrNameLst>
+                                          <p:attrName>style.visibility</p:attrName>
+                                        </p:attrNameLst>
+                                      </p:cBhvr>
+                                      <p:to>
+                                        <p:strVal val="visible"/>
+                                      </p:to>
+                                    </p:set>
+                                  </p:childTnLst>
+                                </p:cTn>
+                              </p:par>
+                            </p:childTnLst>
+                          </p:cTn>
+                        </p:par>
+                      </p:childTnLst>
+                    </p:cTn>
+                  </p:par>
+                  <p:par>
+                    <p:cTn id="41" fill="hold">
+                      <p:stCondLst>
+                        <p:cond delay="indefinite"/>
+                      </p:stCondLst>
+                      <p:childTnLst>
+                        <p:par>
+                          <p:cTn id="42" fill="hold">
+                            <p:stCondLst>
+                              <p:cond delay="0"/>
+                            </p:stCondLst>
+                            <p:childTnLst>
+                              <p:par>
+                                <p:cTn id="43" presetID="1" presetClass="entr" presetSubtype="0" fill="hold" grpId="0" nodeType="clickEffect">
+                                  <p:stCondLst>
+                                    <p:cond delay="0"/>
+                                  </p:stCondLst>
+                                  <p:childTnLst>
+                                    <p:set>
+                                      <p:cBhvr>
+                                        <p:cTn id="44" dur="1" fill="hold">
+                                          <p:stCondLst>
+                                            <p:cond delay="0"/>
+                                          </p:stCondLst>
+                                        </p:cTn>
+                                        <p:tgtEl>
+                                          <p:spTgt spid="43"/>
+                                        </p:tgtEl>
+                                        <p:attrNameLst>
+                                          <p:attrName>style.visibility</p:attrName>
+                                        </p:attrNameLst>
+                                      </p:cBhvr>
+                                      <p:to>
+                                        <p:strVal val="visible"/>
+                                      </p:to>
+                                    </p:set>
+                                  </p:childTnLst>
+                                </p:cTn>
+                              </p:par>
+                            </p:childTnLst>
+                          </p:cTn>
+                        </p:par>
+                      </p:childTnLst>
+                    </p:cTn>
+                  </p:par>
+                  <p:par>
+                    <p:cTn id="45" fill="hold">
+                      <p:stCondLst>
+                        <p:cond delay="indefinite"/>
+                      </p:stCondLst>
+                      <p:childTnLst>
+                        <p:par>
+                          <p:cTn id="46" fill="hold">
+                            <p:stCondLst>
+                              <p:cond delay="0"/>
+                            </p:stCondLst>
+                            <p:childTnLst>
+                              <p:par>
+                                <p:cTn id="47" presetID="1" presetClass="entr" presetSubtype="0" fill="hold" grpId="0" nodeType="clickEffect">
+                                  <p:stCondLst>
+                                    <p:cond delay="0"/>
+                                  </p:stCondLst>
+                                  <p:childTnLst>
+                                    <p:set>
+                                      <p:cBhvr>
+                                        <p:cTn id="48" dur="1" fill="hold">
+                                          <p:stCondLst>
+                                            <p:cond delay="0"/>
+                                          </p:stCondLst>
+                                        </p:cTn>
+                                        <p:tgtEl>
+                                          <p:spTgt spid="45"/>
+                                        </p:tgtEl>
+                                        <p:attrNameLst>
+                                          <p:attrName>style.visibility</p:attrName>
+                                        </p:attrNameLst>
+                                      </p:cBhvr>
+                                      <p:to>
+                                        <p:strVal val="visible"/>
+                                      </p:to>
+                                    </p:set>
+                                  </p:childTnLst>
+                                </p:cTn>
+                              </p:par>
+                              <p:par>
+                                <p:cTn id="49" presetID="1" presetClass="entr" presetSubtype="0" fill="hold" grpId="0" nodeType="withEffect">
+                                  <p:stCondLst>
+                                    <p:cond delay="0"/>
+                                  </p:stCondLst>
+                                  <p:childTnLst>
+                                    <p:set>
+                                      <p:cBhvr>
+                                        <p:cTn id="50" dur="1" fill="hold">
+                                          <p:stCondLst>
+                                            <p:cond delay="0"/>
+                                          </p:stCondLst>
+                                        </p:cTn>
+                                        <p:tgtEl>
+                                          <p:spTgt spid="46"/>
+                                        </p:tgtEl>
+                                        <p:attrNameLst>
+                                          <p:attrName>style.visibility</p:attrName>
+                                        </p:attrNameLst>
+                                      </p:cBhvr>
+                                      <p:to>
+                                        <p:strVal val="visible"/>
+                                      </p:to>
+                                    </p:set>
+                                  </p:childTnLst>
+                                </p:cTn>
+                              </p:par>
+                              <p:par>
+                                <p:cTn id="51" presetID="1" presetClass="entr" presetSubtype="0" fill="hold" grpId="1" nodeType="withEffect">
+                                  <p:stCondLst>
+                                    <p:cond delay="0"/>
+                                  </p:stCondLst>
+                                  <p:childTnLst>
+                                    <p:set>
+                                      <p:cBhvr>
+                                        <p:cTn id="52" dur="1" fill="hold">
+                                          <p:stCondLst>
+                                            <p:cond delay="0"/>
+                                          </p:stCondLst>
+                                        </p:cTn>
+                                        <p:tgtEl>
+                                          <p:spTgt spid="43"/>
+                                        </p:tgtEl>
+                                        <p:attrNameLst>
+                                          <p:attrName>style.visibility</p:attrName>
+                                        </p:attrNameLst>
+                                      </p:cBhvr>
+                                      <p:to>
+                                        <p:strVal val="visible"/>
+                                      </p:to>
+                                    </p:set>
+                                  </p:childTnLst>
+                                </p:cTn>
+                              </p:par>
+                            </p:childTnLst>
+                          </p:cTn>
+                        </p:par>
+                      </p:childTnLst>
+                    </p:cTn>
+                  </p:par>
+                </p:childTnLst>
+              </p:cTn>
+              <p:prevCondLst>
+                <p:cond evt="onPrev" delay="0">
+                  <p:tgtEl>
+                    <p:sldTgt/>
+                  </p:tgtEl>
+                </p:cond>
+              </p:prevCondLst>
+              <p:nextCondLst>
+                <p:cond evt="onNext" delay="0">
+                  <p:tgtEl>
+                    <p:sldTgt/>
+                  </p:tgtEl>
+                </p:cond>
+              </p:nextCondLst>
+            </p:seq>
+          </p:childTnLst>
+        </p:cTn>
+      </p:par>
+    </p:tnLst>
+    <p:bldLst>
+      <p:bldP spid="10" grpId="0"/>
+      <p:bldP spid="22" grpId="0"/>
+      <p:bldP spid="31" grpId="0"/>
+      <p:bldP spid="38" grpId="0" animBg="1"/>
+      <p:bldP spid="39" grpId="0" animBg="1"/>
+      <p:bldP spid="40" grpId="0" animBg="1"/>
+      <p:bldP spid="41" grpId="0"/>
+      <p:bldP spid="42" grpId="0"/>
+      <p:bldP spid="43" grpId="0"/>
+      <p:bldP spid="43" grpId="1"/>
+      <p:bldP spid="45" grpId="0" animBg="1"/>
+      <p:bldP spid="46" grpId="0" animBg="1"/>
+    </p:bldLst>
+  </p:timing>
+</p:sld>
+</file>
+
+<file path=ppt/slides/slide6.xml><?xml version="1.0" encoding="utf-8"?>
+<p:sld xmlns:a="http://schemas.openxmlformats.org/drawingml/2006/main" xmlns:r="http://schemas.openxmlformats.org/officeDocument/2006/relationships" xmlns:p="http://schemas.openxmlformats.org/presentationml/2006/main">
+  <p:cSld>
+    <p:spTree>
+      <p:nvGrpSpPr>
+        <p:cNvPr id="1" name=""/>
+        <p:cNvGrpSpPr/>
+        <p:nvPr/>
+      </p:nvGrpSpPr>
+      <p:grpSpPr>
+        <a:xfrm>
+          <a:off x="0" y="0"/>
+          <a:ext cx="0" cy="0"/>
+          <a:chOff x="0" y="0"/>
+          <a:chExt cx="0" cy="0"/>
+        </a:xfrm>
+      </p:grpSpPr>
+      <p:sp>
+        <p:nvSpPr>
+          <p:cNvPr id="2" name="Title 1">
+            <a:extLst>
+              <a:ext uri="{FF2B5EF4-FFF2-40B4-BE49-F238E27FC236}">
+                <a16:creationId xmlns:a16="http://schemas.microsoft.com/office/drawing/2014/main" id="{6F7E7098-D80E-6CAD-CCFE-CAD2AE2D3C79}"/>
+              </a:ext>
+            </a:extLst>
+          </p:cNvPr>
+          <p:cNvSpPr>
+            <a:spLocks noGrp="1"/>
+          </p:cNvSpPr>
+          <p:nvPr>
+            <p:ph type="title"/>
+          </p:nvPr>
+        </p:nvSpPr>
+        <p:spPr/>
+        <p:txBody>
+          <a:bodyPr/>
+          <a:lstStyle/>
+          <a:p>
+            <a:r>
+              <a:rPr lang="en-KR" dirty="0"/>
+              <a:t>Master </a:t>
+            </a:r>
+            <a:r>
+              <a:rPr lang="en-US" dirty="0"/>
+              <a:t>Design - abstraction</a:t>
+            </a:r>
+            <a:endParaRPr lang="en-KR" dirty="0"/>
+          </a:p>
+        </p:txBody>
+      </p:sp>
+      <p:sp>
+        <p:nvSpPr>
+          <p:cNvPr id="3" name="Content Placeholder 2">
+            <a:extLst>
+              <a:ext uri="{FF2B5EF4-FFF2-40B4-BE49-F238E27FC236}">
+                <a16:creationId xmlns:a16="http://schemas.microsoft.com/office/drawing/2014/main" id="{7E90E0A4-426C-B247-A31B-0E1C66B33CF8}"/>
+              </a:ext>
+            </a:extLst>
+          </p:cNvPr>
+          <p:cNvSpPr>
+            <a:spLocks noGrp="1"/>
+          </p:cNvSpPr>
+          <p:nvPr>
+            <p:ph idx="1"/>
+          </p:nvPr>
+        </p:nvSpPr>
+        <p:spPr/>
+        <p:txBody>
+          <a:bodyPr/>
+          <a:lstStyle/>
+          <a:p>
+            <a:r>
+              <a:rPr lang="en-US" i="1" dirty="0"/>
+              <a:t>Master – Worker </a:t>
+            </a:r>
+            <a:r>
+              <a:rPr lang="en-US" dirty="0"/>
+              <a:t>= </a:t>
+            </a:r>
+            <a:r>
+              <a:rPr lang="en-US" i="1" dirty="0"/>
+              <a:t>kernel – user program</a:t>
+            </a:r>
+            <a:endParaRPr lang="en-KR" i="1" dirty="0"/>
+          </a:p>
+        </p:txBody>
+      </p:sp>
+      <p:sp>
+        <p:nvSpPr>
+          <p:cNvPr id="4" name="Rounded Rectangle 3">
+            <a:extLst>
+              <a:ext uri="{FF2B5EF4-FFF2-40B4-BE49-F238E27FC236}">
+                <a16:creationId xmlns:a16="http://schemas.microsoft.com/office/drawing/2014/main" id="{384A6F6E-92D9-568E-DCF7-CDBFAFD1874E}"/>
+              </a:ext>
+            </a:extLst>
+          </p:cNvPr>
+          <p:cNvSpPr/>
+          <p:nvPr/>
+        </p:nvSpPr>
+        <p:spPr>
+          <a:xfrm>
+            <a:off x="1257301" y="5432029"/>
+            <a:ext cx="4085561" cy="1988345"/>
+          </a:xfrm>
+          <a:prstGeom prst="roundRect">
+            <a:avLst/>
+          </a:prstGeom>
+        </p:spPr>
+        <p:style>
+          <a:lnRef idx="2">
+            <a:schemeClr val="accent1">
+              <a:shade val="15000"/>
+            </a:schemeClr>
+          </a:lnRef>
+          <a:fillRef idx="1">
+            <a:schemeClr val="accent1"/>
+          </a:fillRef>
+          <a:effectRef idx="0">
+            <a:schemeClr val="accent1"/>
+          </a:effectRef>
+          <a:fontRef idx="minor">
+            <a:schemeClr val="lt1"/>
+          </a:fontRef>
+        </p:style>
+        <p:txBody>
+          <a:bodyPr rtlCol="0" anchor="ctr"/>
+          <a:lstStyle/>
+          <a:p>
+            <a:pPr algn="ctr"/>
+            <a:r>
+              <a:rPr lang="en-US" sz="2700" dirty="0"/>
+              <a:t>master</a:t>
+            </a:r>
+            <a:endParaRPr lang="en-KR" sz="2700" dirty="0"/>
+          </a:p>
+        </p:txBody>
+      </p:sp>
+      <p:sp>
+        <p:nvSpPr>
+          <p:cNvPr id="5" name="Oval 4">
+            <a:extLst>
+              <a:ext uri="{FF2B5EF4-FFF2-40B4-BE49-F238E27FC236}">
+                <a16:creationId xmlns:a16="http://schemas.microsoft.com/office/drawing/2014/main" id="{5820746D-7209-B86F-96C3-948D995EEC26}"/>
+              </a:ext>
+            </a:extLst>
+          </p:cNvPr>
+          <p:cNvSpPr/>
+          <p:nvPr/>
+        </p:nvSpPr>
+        <p:spPr>
+          <a:xfrm>
+            <a:off x="12998305" y="2739638"/>
+            <a:ext cx="2169041" cy="2169041"/>
+          </a:xfrm>
+          <a:prstGeom prst="ellipse">
+            <a:avLst/>
+          </a:prstGeom>
+        </p:spPr>
+        <p:style>
+          <a:lnRef idx="2">
+            <a:schemeClr val="accent1">
+              <a:shade val="15000"/>
+            </a:schemeClr>
+          </a:lnRef>
+          <a:fillRef idx="1">
+            <a:schemeClr val="accent1"/>
+          </a:fillRef>
+          <a:effectRef idx="0">
+            <a:schemeClr val="accent1"/>
+          </a:effectRef>
+          <a:fontRef idx="minor">
+            <a:schemeClr val="lt1"/>
+          </a:fontRef>
+        </p:style>
+        <p:txBody>
+          <a:bodyPr rtlCol="0" anchor="ctr"/>
+          <a:lstStyle/>
+          <a:p>
+            <a:pPr algn="ctr"/>
+            <a:r>
+              <a:rPr lang="en-KR" sz="2700" dirty="0"/>
+              <a:t>worker</a:t>
+            </a:r>
+          </a:p>
+        </p:txBody>
+      </p:sp>
+      <p:cxnSp>
+        <p:nvCxnSpPr>
+          <p:cNvPr id="7" name="Straight Arrow Connector 6">
+            <a:extLst>
+              <a:ext uri="{FF2B5EF4-FFF2-40B4-BE49-F238E27FC236}">
+                <a16:creationId xmlns:a16="http://schemas.microsoft.com/office/drawing/2014/main" id="{8641653D-CEAB-5771-5DB6-7E118964A274}"/>
+              </a:ext>
+            </a:extLst>
+          </p:cNvPr>
+          <p:cNvCxnSpPr>
+            <a:stCxn id="5" idx="2"/>
+            <a:endCxn id="4" idx="3"/>
+          </p:cNvCxnSpPr>
+          <p:nvPr/>
+        </p:nvCxnSpPr>
+        <p:spPr>
+          <a:xfrm flipH="1">
+            <a:off x="5342861" y="3824159"/>
+            <a:ext cx="7655444" cy="2602043"/>
+          </a:xfrm>
+          <a:prstGeom prst="straightConnector1">
+            <a:avLst/>
+          </a:prstGeom>
+          <a:ln>
+            <a:tailEnd type="triangle"/>
+          </a:ln>
+        </p:spPr>
+        <p:style>
+          <a:lnRef idx="2">
+            <a:schemeClr val="accent1"/>
+          </a:lnRef>
+          <a:fillRef idx="0">
+            <a:schemeClr val="accent1"/>
+          </a:fillRef>
+          <a:effectRef idx="1">
+            <a:schemeClr val="accent1"/>
+          </a:effectRef>
+          <a:fontRef idx="minor">
+            <a:schemeClr val="tx1"/>
+          </a:fontRef>
+        </p:style>
+      </p:cxnSp>
+      <p:sp>
+        <p:nvSpPr>
+          <p:cNvPr id="8" name="TextBox 7">
+            <a:extLst>
+              <a:ext uri="{FF2B5EF4-FFF2-40B4-BE49-F238E27FC236}">
+                <a16:creationId xmlns:a16="http://schemas.microsoft.com/office/drawing/2014/main" id="{B95F18EF-2F2A-7193-E774-FFB39B17BB29}"/>
+              </a:ext>
+            </a:extLst>
+          </p:cNvPr>
+          <p:cNvSpPr txBox="1"/>
+          <p:nvPr/>
+        </p:nvSpPr>
+        <p:spPr>
+          <a:xfrm>
+            <a:off x="7327901" y="4394201"/>
+            <a:ext cx="2711191" cy="1754326"/>
+          </a:xfrm>
+          <a:prstGeom prst="rect">
+            <a:avLst/>
+          </a:prstGeom>
+          <a:noFill/>
+        </p:spPr>
+        <p:txBody>
+          <a:bodyPr wrap="none" rtlCol="0">
+            <a:spAutoFit/>
+          </a:bodyPr>
+          <a:lstStyle/>
+          <a:p>
+            <a:r>
+              <a:rPr lang="en-US" sz="2700" dirty="0"/>
+              <a:t>D</a:t>
+            </a:r>
+            <a:r>
+              <a:rPr lang="en-KR" sz="2700" dirty="0"/>
+              <a:t>isk overflow</a:t>
+            </a:r>
+          </a:p>
+          <a:p>
+            <a:r>
+              <a:rPr lang="en-US" sz="2700" dirty="0"/>
+              <a:t>M</a:t>
+            </a:r>
+            <a:r>
+              <a:rPr lang="en-KR" sz="2700" dirty="0"/>
+              <a:t>emory overflow</a:t>
+            </a:r>
+          </a:p>
+          <a:p>
+            <a:r>
+              <a:rPr lang="en-US" sz="2700" dirty="0"/>
+              <a:t>P</a:t>
+            </a:r>
+            <a:r>
+              <a:rPr lang="en-KR" sz="2700" dirty="0"/>
+              <a:t>rogram fail</a:t>
+            </a:r>
+          </a:p>
+          <a:p>
+            <a:r>
+              <a:rPr lang="en-KR" sz="2700" dirty="0"/>
+              <a:t>…</a:t>
+            </a:r>
+          </a:p>
+        </p:txBody>
+      </p:sp>
+      <p:graphicFrame>
+        <p:nvGraphicFramePr>
+          <p:cNvPr id="9" name="Table 8">
+            <a:extLst>
+              <a:ext uri="{FF2B5EF4-FFF2-40B4-BE49-F238E27FC236}">
+                <a16:creationId xmlns:a16="http://schemas.microsoft.com/office/drawing/2014/main" id="{86C1770F-1604-4902-58F0-32BC1CF96020}"/>
+              </a:ext>
+            </a:extLst>
+          </p:cNvPr>
+          <p:cNvGraphicFramePr>
+            <a:graphicFrameLocks noGrp="1"/>
+          </p:cNvGraphicFramePr>
+          <p:nvPr/>
+        </p:nvGraphicFramePr>
+        <p:xfrm>
+          <a:off x="4483100" y="7070885"/>
+          <a:ext cx="4533900" cy="2194560"/>
+        </p:xfrm>
+        <a:graphic>
+          <a:graphicData uri="http://schemas.openxmlformats.org/drawingml/2006/table">
+            <a:tbl>
+              <a:tblPr firstRow="1" bandRow="1">
+                <a:tableStyleId>{D7AC3CCA-C797-4891-BE02-D94E43425B78}</a:tableStyleId>
+              </a:tblPr>
+              <a:tblGrid>
+                <a:gridCol w="2266950">
+                  <a:extLst>
+                    <a:ext uri="{9D8B030D-6E8A-4147-A177-3AD203B41FA5}">
+                      <a16:colId xmlns:a16="http://schemas.microsoft.com/office/drawing/2014/main" val="3181962596"/>
+                    </a:ext>
+                  </a:extLst>
+                </a:gridCol>
+                <a:gridCol w="2266950">
+                  <a:extLst>
+                    <a:ext uri="{9D8B030D-6E8A-4147-A177-3AD203B41FA5}">
+                      <a16:colId xmlns:a16="http://schemas.microsoft.com/office/drawing/2014/main" val="1187806297"/>
+                    </a:ext>
+                  </a:extLst>
+                </a:gridCol>
+              </a:tblGrid>
+              <a:tr h="548640">
+                <a:tc>
+                  <a:txBody>
+                    <a:bodyPr/>
+                    <a:lstStyle/>
+                    <a:p>
+                      <a:pPr algn="ctr"/>
+                      <a:r>
+                        <a:rPr lang="en-KR" sz="2700" b="0" dirty="0"/>
+                        <a:t>0</a:t>
+                      </a:r>
+                    </a:p>
+                  </a:txBody>
+                  <a:tcPr marL="137160" marR="137160" marT="68580" marB="68580"/>
+                </a:tc>
+                <a:tc>
+                  <a:txBody>
+                    <a:bodyPr/>
+                    <a:lstStyle/>
+                    <a:p>
+                      <a:pPr algn="ctr"/>
+                      <a:r>
+                        <a:rPr lang="en-US" sz="2700" b="0" dirty="0"/>
+                        <a:t>handler</a:t>
+                      </a:r>
+                      <a:r>
+                        <a:rPr lang="en-KR" sz="2700" b="0" dirty="0"/>
+                        <a:t> 0</a:t>
+                      </a:r>
+                    </a:p>
+                  </a:txBody>
+                  <a:tcPr marL="137160" marR="137160" marT="68580" marB="68580"/>
+                </a:tc>
+                <a:extLst>
+                  <a:ext uri="{0D108BD9-81ED-4DB2-BD59-A6C34878D82A}">
+                    <a16:rowId xmlns:a16="http://schemas.microsoft.com/office/drawing/2014/main" val="2506378353"/>
+                  </a:ext>
+                </a:extLst>
+              </a:tr>
+              <a:tr h="548640">
+                <a:tc>
+                  <a:txBody>
+                    <a:bodyPr/>
+                    <a:lstStyle/>
+                    <a:p>
+                      <a:pPr algn="ctr"/>
+                      <a:r>
+                        <a:rPr lang="en-KR" sz="2700" b="0" dirty="0"/>
+                        <a:t>1</a:t>
+                      </a:r>
+                    </a:p>
+                  </a:txBody>
+                  <a:tcPr marL="137160" marR="137160" marT="68580" marB="68580"/>
+                </a:tc>
+                <a:tc>
+                  <a:txBody>
+                    <a:bodyPr/>
+                    <a:lstStyle/>
+                    <a:p>
+                      <a:pPr algn="ctr"/>
+                      <a:r>
+                        <a:rPr lang="en-US" sz="2700" b="0" dirty="0"/>
+                        <a:t>handler</a:t>
+                      </a:r>
+                      <a:r>
+                        <a:rPr lang="en-KR" sz="2700" b="0" dirty="0"/>
+                        <a:t> 1</a:t>
+                      </a:r>
+                    </a:p>
+                  </a:txBody>
+                  <a:tcPr marL="137160" marR="137160" marT="68580" marB="68580"/>
+                </a:tc>
+                <a:extLst>
+                  <a:ext uri="{0D108BD9-81ED-4DB2-BD59-A6C34878D82A}">
+                    <a16:rowId xmlns:a16="http://schemas.microsoft.com/office/drawing/2014/main" val="716151926"/>
+                  </a:ext>
+                </a:extLst>
+              </a:tr>
+              <a:tr h="548640">
+                <a:tc>
+                  <a:txBody>
+                    <a:bodyPr/>
+                    <a:lstStyle/>
+                    <a:p>
+                      <a:pPr algn="ctr"/>
+                      <a:r>
+                        <a:rPr lang="en-KR" sz="2700" b="0" dirty="0"/>
+                        <a:t>…</a:t>
+                      </a:r>
+                    </a:p>
+                  </a:txBody>
+                  <a:tcPr marL="137160" marR="137160" marT="68580" marB="68580"/>
+                </a:tc>
+                <a:tc>
+                  <a:txBody>
+                    <a:bodyPr/>
+                    <a:lstStyle/>
+                    <a:p>
+                      <a:pPr algn="ctr"/>
+                      <a:r>
+                        <a:rPr lang="en-KR" sz="2700" b="0" dirty="0"/>
+                        <a:t>…</a:t>
+                      </a:r>
+                    </a:p>
+                  </a:txBody>
+                  <a:tcPr marL="137160" marR="137160" marT="68580" marB="68580"/>
+                </a:tc>
+                <a:extLst>
+                  <a:ext uri="{0D108BD9-81ED-4DB2-BD59-A6C34878D82A}">
+                    <a16:rowId xmlns:a16="http://schemas.microsoft.com/office/drawing/2014/main" val="266905576"/>
+                  </a:ext>
+                </a:extLst>
+              </a:tr>
+              <a:tr h="548640">
+                <a:tc>
+                  <a:txBody>
+                    <a:bodyPr/>
+                    <a:lstStyle/>
+                    <a:p>
+                      <a:pPr algn="ctr"/>
+                      <a:r>
+                        <a:rPr lang="en-US" sz="2700" b="0" dirty="0"/>
+                        <a:t>n</a:t>
+                      </a:r>
+                      <a:endParaRPr lang="en-KR" sz="2700" b="0" dirty="0"/>
+                    </a:p>
+                  </a:txBody>
+                  <a:tcPr marL="137160" marR="137160" marT="68580" marB="68580"/>
+                </a:tc>
+                <a:tc>
+                  <a:txBody>
+                    <a:bodyPr/>
+                    <a:lstStyle/>
+                    <a:p>
+                      <a:pPr algn="ctr"/>
+                      <a:r>
+                        <a:rPr lang="en-US" sz="2700" b="0" dirty="0"/>
+                        <a:t>handler</a:t>
+                      </a:r>
+                      <a:r>
+                        <a:rPr lang="en-KR" sz="2700" b="0" dirty="0"/>
+                        <a:t> n</a:t>
+                      </a:r>
+                    </a:p>
+                  </a:txBody>
+                  <a:tcPr marL="137160" marR="137160" marT="68580" marB="68580"/>
+                </a:tc>
+                <a:extLst>
+                  <a:ext uri="{0D108BD9-81ED-4DB2-BD59-A6C34878D82A}">
+                    <a16:rowId xmlns:a16="http://schemas.microsoft.com/office/drawing/2014/main" val="545729514"/>
+                  </a:ext>
+                </a:extLst>
+              </a:tr>
+            </a:tbl>
+          </a:graphicData>
+        </a:graphic>
+      </p:graphicFrame>
+    </p:spTree>
+    <p:extLst>
+      <p:ext uri="{BB962C8B-B14F-4D97-AF65-F5344CB8AC3E}">
+        <p14:creationId xmlns:p14="http://schemas.microsoft.com/office/powerpoint/2010/main" val="2144519503"/>
+      </p:ext>
+    </p:extLst>
+  </p:cSld>
+  <p:clrMapOvr>
+    <a:masterClrMapping/>
+  </p:clrMapOvr>
+</p:sld>
+</file>
+
+<file path=ppt/slides/slide7.xml><?xml version="1.0" encoding="utf-8"?>
+<p:sld xmlns:a="http://schemas.openxmlformats.org/drawingml/2006/main" xmlns:r="http://schemas.openxmlformats.org/officeDocument/2006/relationships" xmlns:p="http://schemas.openxmlformats.org/presentationml/2006/main">
+  <p:cSld>
+    <p:spTree>
+      <p:nvGrpSpPr>
+        <p:cNvPr id="1" name=""/>
+        <p:cNvGrpSpPr/>
+        <p:nvPr/>
+      </p:nvGrpSpPr>
+      <p:grpSpPr>
+        <a:xfrm>
+          <a:off x="0" y="0"/>
+          <a:ext cx="0" cy="0"/>
+          <a:chOff x="0" y="0"/>
+          <a:chExt cx="0" cy="0"/>
+        </a:xfrm>
+      </p:grpSpPr>
+      <p:sp>
+        <p:nvSpPr>
+          <p:cNvPr id="2" name="Title 1">
+            <a:extLst>
+              <a:ext uri="{FF2B5EF4-FFF2-40B4-BE49-F238E27FC236}">
+                <a16:creationId xmlns:a16="http://schemas.microsoft.com/office/drawing/2014/main" id="{3FE9D3BF-D6DD-386D-201C-20F1F64D24E1}"/>
+              </a:ext>
+            </a:extLst>
+          </p:cNvPr>
+          <p:cNvSpPr>
+            <a:spLocks noGrp="1"/>
+          </p:cNvSpPr>
+          <p:nvPr>
+            <p:ph type="title"/>
+          </p:nvPr>
+        </p:nvSpPr>
+        <p:spPr/>
+        <p:txBody>
+          <a:bodyPr/>
+          <a:lstStyle/>
+          <a:p>
+            <a:r>
+              <a:rPr lang="en-KR" dirty="0"/>
+              <a:t>Current </a:t>
+            </a:r>
+            <a:r>
+              <a:rPr lang="en-US" dirty="0"/>
+              <a:t>Progress</a:t>
+            </a:r>
+            <a:endParaRPr lang="en-KR" dirty="0"/>
+          </a:p>
+        </p:txBody>
+      </p:sp>
+      <p:sp>
+        <p:nvSpPr>
+          <p:cNvPr id="3" name="Content Placeholder 2">
+            <a:extLst>
+              <a:ext uri="{FF2B5EF4-FFF2-40B4-BE49-F238E27FC236}">
+                <a16:creationId xmlns:a16="http://schemas.microsoft.com/office/drawing/2014/main" id="{02B47AC7-2B64-344E-177B-270FEEDC4F59}"/>
+              </a:ext>
+            </a:extLst>
+          </p:cNvPr>
+          <p:cNvSpPr>
+            <a:spLocks noGrp="1"/>
+          </p:cNvSpPr>
+          <p:nvPr>
+            <p:ph idx="1"/>
+          </p:nvPr>
+        </p:nvSpPr>
+        <p:spPr/>
+        <p:txBody>
+          <a:bodyPr/>
+          <a:lstStyle/>
+          <a:p>
+            <a:r>
+              <a:rPr lang="en-KR" dirty="0"/>
+              <a:t>ZIO gRPC communication</a:t>
+            </a:r>
+          </a:p>
+        </p:txBody>
+      </p:sp>
+      <p:pic>
+        <p:nvPicPr>
+          <p:cNvPr id="4" name="Picture 3">
+            <a:extLst>
+              <a:ext uri="{FF2B5EF4-FFF2-40B4-BE49-F238E27FC236}">
+                <a16:creationId xmlns:a16="http://schemas.microsoft.com/office/drawing/2014/main" id="{1C1DC192-1606-1289-A8DE-6EF3D3FCC0E3}"/>
+              </a:ext>
+            </a:extLst>
+          </p:cNvPr>
+          <p:cNvPicPr>
+            <a:picLocks noChangeAspect="1"/>
+          </p:cNvPicPr>
+          <p:nvPr/>
+        </p:nvPicPr>
+        <p:blipFill>
+          <a:blip r:embed="rId2"/>
+          <a:stretch>
+            <a:fillRect/>
+          </a:stretch>
+        </p:blipFill>
+        <p:spPr>
+          <a:xfrm>
+            <a:off x="4381500" y="3473349"/>
+            <a:ext cx="9525000" cy="2528592"/>
+          </a:xfrm>
+          <a:prstGeom prst="rect">
+            <a:avLst/>
+          </a:prstGeom>
+        </p:spPr>
+      </p:pic>
+      <p:pic>
+        <p:nvPicPr>
+          <p:cNvPr id="5" name="Picture 4">
+            <a:extLst>
+              <a:ext uri="{FF2B5EF4-FFF2-40B4-BE49-F238E27FC236}">
+                <a16:creationId xmlns:a16="http://schemas.microsoft.com/office/drawing/2014/main" id="{C7D068AF-411C-0B4A-0C0D-5978B3FE5857}"/>
+              </a:ext>
+            </a:extLst>
+          </p:cNvPr>
+          <p:cNvPicPr>
+            <a:picLocks noChangeAspect="1"/>
+          </p:cNvPicPr>
+          <p:nvPr/>
+        </p:nvPicPr>
+        <p:blipFill>
+          <a:blip r:embed="rId3"/>
+          <a:stretch>
+            <a:fillRect/>
+          </a:stretch>
+        </p:blipFill>
+        <p:spPr>
+          <a:xfrm>
+            <a:off x="4381500" y="6180452"/>
+            <a:ext cx="9525000" cy="2483931"/>
+          </a:xfrm>
+          <a:prstGeom prst="rect">
+            <a:avLst/>
+          </a:prstGeom>
+        </p:spPr>
+      </p:pic>
+    </p:spTree>
+    <p:extLst>
+      <p:ext uri="{BB962C8B-B14F-4D97-AF65-F5344CB8AC3E}">
+        <p14:creationId xmlns:p14="http://schemas.microsoft.com/office/powerpoint/2010/main" val="4266501358"/>
+      </p:ext>
+    </p:extLst>
+  </p:cSld>
+  <p:clrMapOvr>
+    <a:masterClrMapping/>
+  </p:clrMapOvr>
+</p:sld>
+</file>
+
+<file path=ppt/slides/slide8.xml><?xml version="1.0" encoding="utf-8"?>
+<p:sld xmlns:a="http://schemas.openxmlformats.org/drawingml/2006/main" xmlns:r="http://schemas.openxmlformats.org/officeDocument/2006/relationships" xmlns:p="http://schemas.openxmlformats.org/presentationml/2006/main">
+  <p:cSld>
+    <p:spTree>
+      <p:nvGrpSpPr>
+        <p:cNvPr id="1" name="">
+          <a:extLst>
+            <a:ext uri="{FF2B5EF4-FFF2-40B4-BE49-F238E27FC236}">
+              <a16:creationId xmlns:a16="http://schemas.microsoft.com/office/drawing/2014/main" id="{4FC890A9-16A9-4DAB-A330-65BA6E36BE4A}"/>
+            </a:ext>
+          </a:extLst>
+        </p:cNvPr>
+        <p:cNvGrpSpPr/>
+        <p:nvPr/>
+      </p:nvGrpSpPr>
+      <p:grpSpPr>
+        <a:xfrm>
+          <a:off x="0" y="0"/>
+          <a:ext cx="0" cy="0"/>
+          <a:chOff x="0" y="0"/>
+          <a:chExt cx="0" cy="0"/>
+        </a:xfrm>
+      </p:grpSpPr>
+      <p:sp>
+        <p:nvSpPr>
+          <p:cNvPr id="2" name="Title 1">
+            <a:extLst>
+              <a:ext uri="{FF2B5EF4-FFF2-40B4-BE49-F238E27FC236}">
+                <a16:creationId xmlns:a16="http://schemas.microsoft.com/office/drawing/2014/main" id="{D457A58C-9E62-EAA8-A90E-F602DD59F1D4}"/>
+              </a:ext>
+            </a:extLst>
+          </p:cNvPr>
+          <p:cNvSpPr>
+            <a:spLocks noGrp="1"/>
+          </p:cNvSpPr>
+          <p:nvPr>
+            <p:ph type="title"/>
+          </p:nvPr>
+        </p:nvSpPr>
+        <p:spPr/>
+        <p:txBody>
+          <a:bodyPr/>
+          <a:lstStyle/>
+          <a:p>
+            <a:r>
+              <a:rPr lang="en-KR" dirty="0"/>
+              <a:t>Master Plan</a:t>
+            </a:r>
+          </a:p>
+        </p:txBody>
+      </p:sp>
+      <p:sp>
+        <p:nvSpPr>
+          <p:cNvPr id="6" name="TextBox 5">
+            <a:extLst>
+              <a:ext uri="{FF2B5EF4-FFF2-40B4-BE49-F238E27FC236}">
+                <a16:creationId xmlns:a16="http://schemas.microsoft.com/office/drawing/2014/main" id="{8A833590-9F32-19CD-C3D4-C2CC91B6CEC1}"/>
+              </a:ext>
+            </a:extLst>
+          </p:cNvPr>
+          <p:cNvSpPr txBox="1"/>
+          <p:nvPr/>
+        </p:nvSpPr>
+        <p:spPr>
+          <a:xfrm>
+            <a:off x="1046023" y="2695617"/>
+            <a:ext cx="7653121" cy="923330"/>
+          </a:xfrm>
+          <a:prstGeom prst="rect">
+            <a:avLst/>
+          </a:prstGeom>
+          <a:noFill/>
+        </p:spPr>
+        <p:txBody>
+          <a:bodyPr wrap="none" rtlCol="0">
+            <a:spAutoFit/>
+          </a:bodyPr>
+          <a:lstStyle/>
+          <a:p>
+            <a:pPr marL="428625" indent="-428625">
+              <a:buFontTx/>
+              <a:buChar char="-"/>
+            </a:pPr>
+            <a:r>
+              <a:rPr lang="en-US" sz="2700" b="1" dirty="0">
+                <a:solidFill>
+                  <a:srgbClr val="FF0000"/>
+                </a:solidFill>
+              </a:rPr>
+              <a:t>Implement some message structures in proto file</a:t>
+            </a:r>
+          </a:p>
+          <a:p>
+            <a:pPr marL="428625" indent="-428625">
+              <a:buFontTx/>
+              <a:buChar char="-"/>
+            </a:pPr>
+            <a:r>
+              <a:rPr lang="en-US" sz="2700" b="1" dirty="0">
+                <a:solidFill>
+                  <a:srgbClr val="FF0000"/>
+                </a:solidFill>
+              </a:rPr>
+              <a:t>Implement error handling logic</a:t>
+            </a:r>
+            <a:endParaRPr lang="en-KR" sz="2700" b="1" dirty="0">
+              <a:solidFill>
+                <a:srgbClr val="FF0000"/>
+              </a:solidFill>
+            </a:endParaRPr>
+          </a:p>
+        </p:txBody>
+      </p:sp>
+      <p:pic>
+        <p:nvPicPr>
+          <p:cNvPr id="12" name="Picture 11" descr="A diagram of a computer program&#10;&#10;AI-generated content may be incorrect.">
+            <a:extLst>
+              <a:ext uri="{FF2B5EF4-FFF2-40B4-BE49-F238E27FC236}">
+                <a16:creationId xmlns:a16="http://schemas.microsoft.com/office/drawing/2014/main" id="{9B1ECC24-A3A0-8DFD-CEC8-97527AC06AD3}"/>
+              </a:ext>
+            </a:extLst>
+          </p:cNvPr>
+          <p:cNvPicPr>
+            <a:picLocks noChangeAspect="1"/>
+          </p:cNvPicPr>
+          <p:nvPr/>
+        </p:nvPicPr>
+        <p:blipFill>
+          <a:blip r:embed="rId2"/>
+          <a:stretch>
+            <a:fillRect/>
+          </a:stretch>
+        </p:blipFill>
+        <p:spPr>
+          <a:xfrm>
+            <a:off x="1046022" y="3665114"/>
+            <a:ext cx="8097978" cy="4031088"/>
+          </a:xfrm>
+          <a:prstGeom prst="rect">
+            <a:avLst/>
+          </a:prstGeom>
+        </p:spPr>
+      </p:pic>
+      <p:pic>
+        <p:nvPicPr>
+          <p:cNvPr id="14" name="Picture 13" descr="A diagram of a workflow&#10;&#10;AI-generated content may be incorrect.">
+            <a:extLst>
+              <a:ext uri="{FF2B5EF4-FFF2-40B4-BE49-F238E27FC236}">
+                <a16:creationId xmlns:a16="http://schemas.microsoft.com/office/drawing/2014/main" id="{E0AF1C67-3A71-A520-CD32-2880AB9112D3}"/>
+              </a:ext>
+            </a:extLst>
+          </p:cNvPr>
+          <p:cNvPicPr>
+            <a:picLocks noChangeAspect="1"/>
+          </p:cNvPicPr>
+          <p:nvPr/>
+        </p:nvPicPr>
+        <p:blipFill>
+          <a:blip r:embed="rId3"/>
+          <a:stretch>
+            <a:fillRect/>
+          </a:stretch>
+        </p:blipFill>
+        <p:spPr>
+          <a:xfrm>
+            <a:off x="10020301" y="3673846"/>
+            <a:ext cx="6845300" cy="3629417"/>
+          </a:xfrm>
+          <a:prstGeom prst="rect">
+            <a:avLst/>
+          </a:prstGeom>
+        </p:spPr>
+      </p:pic>
+      <p:sp>
+        <p:nvSpPr>
+          <p:cNvPr id="15" name="TextBox 14">
+            <a:extLst>
+              <a:ext uri="{FF2B5EF4-FFF2-40B4-BE49-F238E27FC236}">
+                <a16:creationId xmlns:a16="http://schemas.microsoft.com/office/drawing/2014/main" id="{BD9BC214-6920-1C12-583B-21EBEED1D4B1}"/>
+              </a:ext>
+            </a:extLst>
+          </p:cNvPr>
+          <p:cNvSpPr txBox="1"/>
+          <p:nvPr/>
+        </p:nvSpPr>
+        <p:spPr>
+          <a:xfrm>
+            <a:off x="9732823" y="2695617"/>
+            <a:ext cx="7653121" cy="923330"/>
+          </a:xfrm>
+          <a:prstGeom prst="rect">
+            <a:avLst/>
+          </a:prstGeom>
+          <a:noFill/>
+        </p:spPr>
+        <p:txBody>
+          <a:bodyPr wrap="none" rtlCol="0">
+            <a:spAutoFit/>
+          </a:bodyPr>
+          <a:lstStyle/>
+          <a:p>
+            <a:pPr marL="428625" indent="-428625">
+              <a:buFontTx/>
+              <a:buChar char="-"/>
+            </a:pPr>
+            <a:r>
+              <a:rPr lang="en-US" sz="2700" b="1" dirty="0">
+                <a:solidFill>
+                  <a:srgbClr val="FF0000"/>
+                </a:solidFill>
+              </a:rPr>
+              <a:t>Implement some message structures in proto file</a:t>
+            </a:r>
+          </a:p>
+          <a:p>
+            <a:pPr marL="428625" indent="-428625">
+              <a:buFontTx/>
+              <a:buChar char="-"/>
+            </a:pPr>
+            <a:r>
+              <a:rPr lang="en-US" sz="2700" b="1" dirty="0">
+                <a:solidFill>
+                  <a:srgbClr val="FF0000"/>
+                </a:solidFill>
+              </a:rPr>
+              <a:t>Implement sampling logic</a:t>
+            </a:r>
+            <a:endParaRPr lang="en-KR" sz="2700" b="1" dirty="0">
+              <a:solidFill>
+                <a:srgbClr val="FF0000"/>
+              </a:solidFill>
+            </a:endParaRPr>
+          </a:p>
+        </p:txBody>
+      </p:sp>
+    </p:spTree>
+    <p:extLst>
+      <p:ext uri="{BB962C8B-B14F-4D97-AF65-F5344CB8AC3E}">
+        <p14:creationId xmlns:p14="http://schemas.microsoft.com/office/powerpoint/2010/main" val="3065963681"/>
+      </p:ext>
+    </p:extLst>
   </p:cSld>
   <p:clrMapOvr>
     <a:masterClrMapping/>
@@ -4392,4 +8954,319 @@
   <a:objectDefaults/>
   <a:extraClrSchemeLst/>
 </a:theme>
+</file>
+
+<file path=ppt/theme/theme2.xml><?xml version="1.0" encoding="utf-8"?>
+<a:theme xmlns:a="http://schemas.openxmlformats.org/drawingml/2006/main" name="Office 테마">
+  <a:themeElements>
+    <a:clrScheme name="Office">
+      <a:dk1>
+        <a:sysClr val="windowText" lastClr="000000"/>
+      </a:dk1>
+      <a:lt1>
+        <a:sysClr val="window" lastClr="FFFFFF"/>
+      </a:lt1>
+      <a:dk2>
+        <a:srgbClr val="0E2841"/>
+      </a:dk2>
+      <a:lt2>
+        <a:srgbClr val="E8E8E8"/>
+      </a:lt2>
+      <a:accent1>
+        <a:srgbClr val="156082"/>
+      </a:accent1>
+      <a:accent2>
+        <a:srgbClr val="E97132"/>
+      </a:accent2>
+      <a:accent3>
+        <a:srgbClr val="196B24"/>
+      </a:accent3>
+      <a:accent4>
+        <a:srgbClr val="0F9ED5"/>
+      </a:accent4>
+      <a:accent5>
+        <a:srgbClr val="A02B93"/>
+      </a:accent5>
+      <a:accent6>
+        <a:srgbClr val="4EA72E"/>
+      </a:accent6>
+      <a:hlink>
+        <a:srgbClr val="467886"/>
+      </a:hlink>
+      <a:folHlink>
+        <a:srgbClr val="96607D"/>
+      </a:folHlink>
+    </a:clrScheme>
+    <a:fontScheme name="Office">
+      <a:majorFont>
+        <a:latin typeface="맑은 고딕" panose="02110004020202020204"/>
+        <a:ea typeface=""/>
+        <a:cs typeface=""/>
+        <a:font script="Jpan" typeface="游ゴシック Light"/>
+        <a:font script="Hang" typeface="맑은 고딕"/>
+        <a:font script="Hans" typeface="等线 Light"/>
+        <a:font script="Hant" typeface="新細明體"/>
+        <a:font script="Arab" typeface="Times New Roman"/>
+        <a:font script="Hebr" typeface="Times New Roman"/>
+        <a:font script="Thai" typeface="Angsana New"/>
+        <a:font script="Ethi" typeface="Nyala"/>
+        <a:font script="Beng" typeface="Vrinda"/>
+        <a:font script="Gujr" typeface="Shruti"/>
+        <a:font script="Khmr" typeface="MoolBoran"/>
+        <a:font script="Knda" typeface="Tunga"/>
+        <a:font script="Guru" typeface="Raavi"/>
+        <a:font script="Cans" typeface="Euphemia"/>
+        <a:font script="Cher" typeface="Plantagenet Cherokee"/>
+        <a:font script="Yiii" typeface="Microsoft Yi Baiti"/>
+        <a:font script="Tibt" typeface="Microsoft Himalaya"/>
+        <a:font script="Thaa" typeface="MV Boli"/>
+        <a:font script="Deva" typeface="Mangal"/>
+        <a:font script="Telu" typeface="Gautami"/>
+        <a:font script="Taml" typeface="Latha"/>
+        <a:font script="Syrc" typeface="Estrangelo Edessa"/>
+        <a:font script="Orya" typeface="Kalinga"/>
+        <a:font script="Mlym" typeface="Kartika"/>
+        <a:font script="Laoo" typeface="DokChampa"/>
+        <a:font script="Sinh" typeface="Iskoola Pota"/>
+        <a:font script="Mong" typeface="Mongolian Baiti"/>
+        <a:font script="Viet" typeface="Times New Roman"/>
+        <a:font script="Uigh" typeface="Microsoft Uighur"/>
+        <a:font script="Geor" typeface="Sylfaen"/>
+        <a:font script="Armn" typeface="Arial"/>
+        <a:font script="Bugi" typeface="Leelawadee UI"/>
+        <a:font script="Bopo" typeface="Microsoft JhengHei"/>
+        <a:font script="Java" typeface="Javanese Text"/>
+        <a:font script="Lisu" typeface="Segoe UI"/>
+        <a:font script="Mymr" typeface="Myanmar Text"/>
+        <a:font script="Nkoo" typeface="Ebrima"/>
+        <a:font script="Olck" typeface="Nirmala UI"/>
+        <a:font script="Osma" typeface="Ebrima"/>
+        <a:font script="Phag" typeface="Phagspa"/>
+        <a:font script="Syrn" typeface="Estrangelo Edessa"/>
+        <a:font script="Syrj" typeface="Estrangelo Edessa"/>
+        <a:font script="Syre" typeface="Estrangelo Edessa"/>
+        <a:font script="Sora" typeface="Nirmala UI"/>
+        <a:font script="Tale" typeface="Microsoft Tai Le"/>
+        <a:font script="Talu" typeface="Microsoft New Tai Lue"/>
+        <a:font script="Tfng" typeface="Ebrima"/>
+      </a:majorFont>
+      <a:minorFont>
+        <a:latin typeface="맑은 고딕" panose="02110004020202020204"/>
+        <a:ea typeface=""/>
+        <a:cs typeface=""/>
+        <a:font script="Jpan" typeface="游ゴシック"/>
+        <a:font script="Hang" typeface="맑은 고딕"/>
+        <a:font script="Hans" typeface="等线"/>
+        <a:font script="Hant" typeface="新細明體"/>
+        <a:font script="Arab" typeface="Arial"/>
+        <a:font script="Hebr" typeface="Arial"/>
+        <a:font script="Thai" typeface="Cordia New"/>
+        <a:font script="Ethi" typeface="Nyala"/>
+        <a:font script="Beng" typeface="Vrinda"/>
+        <a:font script="Gujr" typeface="Shruti"/>
+        <a:font script="Khmr" typeface="DaunPenh"/>
+        <a:font script="Knda" typeface="Tunga"/>
+        <a:font script="Guru" typeface="Raavi"/>
+        <a:font script="Cans" typeface="Euphemia"/>
+        <a:font script="Cher" typeface="Plantagenet Cherokee"/>
+        <a:font script="Yiii" typeface="Microsoft Yi Baiti"/>
+        <a:font script="Tibt" typeface="Microsoft Himalaya"/>
+        <a:font script="Thaa" typeface="MV Boli"/>
+        <a:font script="Deva" typeface="Mangal"/>
+        <a:font script="Telu" typeface="Gautami"/>
+        <a:font script="Taml" typeface="Latha"/>
+        <a:font script="Syrc" typeface="Estrangelo Edessa"/>
+        <a:font script="Orya" typeface="Kalinga"/>
+        <a:font script="Mlym" typeface="Kartika"/>
+        <a:font script="Laoo" typeface="DokChampa"/>
+        <a:font script="Sinh" typeface="Iskoola Pota"/>
+        <a:font script="Mong" typeface="Mongolian Baiti"/>
+        <a:font script="Viet" typeface="Arial"/>
+        <a:font script="Uigh" typeface="Microsoft Uighur"/>
+        <a:font script="Geor" typeface="Sylfaen"/>
+        <a:font script="Armn" typeface="Arial"/>
+        <a:font script="Bugi" typeface="Leelawadee UI"/>
+        <a:font script="Bopo" typeface="Microsoft JhengHei"/>
+        <a:font script="Java" typeface="Javanese Text"/>
+        <a:font script="Lisu" typeface="Segoe UI"/>
+        <a:font script="Mymr" typeface="Myanmar Text"/>
+        <a:font script="Nkoo" typeface="Ebrima"/>
+        <a:font script="Olck" typeface="Nirmala UI"/>
+        <a:font script="Osma" typeface="Ebrima"/>
+        <a:font script="Phag" typeface="Phagspa"/>
+        <a:font script="Syrn" typeface="Estrangelo Edessa"/>
+        <a:font script="Syrj" typeface="Estrangelo Edessa"/>
+        <a:font script="Syre" typeface="Estrangelo Edessa"/>
+        <a:font script="Sora" typeface="Nirmala UI"/>
+        <a:font script="Tale" typeface="Microsoft Tai Le"/>
+        <a:font script="Talu" typeface="Microsoft New Tai Lue"/>
+        <a:font script="Tfng" typeface="Ebrima"/>
+      </a:minorFont>
+    </a:fontScheme>
+    <a:fmtScheme name="Office">
+      <a:fillStyleLst>
+        <a:solidFill>
+          <a:schemeClr val="phClr"/>
+        </a:solidFill>
+        <a:gradFill rotWithShape="1">
+          <a:gsLst>
+            <a:gs pos="0">
+              <a:schemeClr val="phClr">
+                <a:lumMod val="110000"/>
+                <a:satMod val="105000"/>
+                <a:tint val="67000"/>
+              </a:schemeClr>
+            </a:gs>
+            <a:gs pos="50000">
+              <a:schemeClr val="phClr">
+                <a:lumMod val="105000"/>
+                <a:satMod val="103000"/>
+                <a:tint val="73000"/>
+              </a:schemeClr>
+            </a:gs>
+            <a:gs pos="100000">
+              <a:schemeClr val="phClr">
+                <a:lumMod val="105000"/>
+                <a:satMod val="109000"/>
+                <a:tint val="81000"/>
+              </a:schemeClr>
+            </a:gs>
+          </a:gsLst>
+          <a:lin ang="5400000" scaled="0"/>
+        </a:gradFill>
+        <a:gradFill rotWithShape="1">
+          <a:gsLst>
+            <a:gs pos="0">
+              <a:schemeClr val="phClr">
+                <a:satMod val="103000"/>
+                <a:lumMod val="102000"/>
+                <a:tint val="94000"/>
+              </a:schemeClr>
+            </a:gs>
+            <a:gs pos="50000">
+              <a:schemeClr val="phClr">
+                <a:satMod val="110000"/>
+                <a:lumMod val="100000"/>
+                <a:shade val="100000"/>
+              </a:schemeClr>
+            </a:gs>
+            <a:gs pos="100000">
+              <a:schemeClr val="phClr">
+                <a:lumMod val="99000"/>
+                <a:satMod val="120000"/>
+                <a:shade val="78000"/>
+              </a:schemeClr>
+            </a:gs>
+          </a:gsLst>
+          <a:lin ang="5400000" scaled="0"/>
+        </a:gradFill>
+      </a:fillStyleLst>
+      <a:lnStyleLst>
+        <a:ln w="12700" cap="flat" cmpd="sng" algn="ctr">
+          <a:solidFill>
+            <a:schemeClr val="phClr"/>
+          </a:solidFill>
+          <a:prstDash val="solid"/>
+          <a:miter lim="800000"/>
+        </a:ln>
+        <a:ln w="19050" cap="flat" cmpd="sng" algn="ctr">
+          <a:solidFill>
+            <a:schemeClr val="phClr"/>
+          </a:solidFill>
+          <a:prstDash val="solid"/>
+          <a:miter lim="800000"/>
+        </a:ln>
+        <a:ln w="25400" cap="flat" cmpd="sng" algn="ctr">
+          <a:solidFill>
+            <a:schemeClr val="phClr"/>
+          </a:solidFill>
+          <a:prstDash val="solid"/>
+          <a:miter lim="800000"/>
+        </a:ln>
+      </a:lnStyleLst>
+      <a:effectStyleLst>
+        <a:effectStyle>
+          <a:effectLst/>
+        </a:effectStyle>
+        <a:effectStyle>
+          <a:effectLst/>
+        </a:effectStyle>
+        <a:effectStyle>
+          <a:effectLst>
+            <a:outerShdw blurRad="57150" dist="19050" dir="5400000" algn="ctr" rotWithShape="0">
+              <a:srgbClr val="000000">
+                <a:alpha val="63000"/>
+              </a:srgbClr>
+            </a:outerShdw>
+          </a:effectLst>
+        </a:effectStyle>
+      </a:effectStyleLst>
+      <a:bgFillStyleLst>
+        <a:solidFill>
+          <a:schemeClr val="phClr"/>
+        </a:solidFill>
+        <a:solidFill>
+          <a:schemeClr val="phClr">
+            <a:tint val="95000"/>
+            <a:satMod val="170000"/>
+          </a:schemeClr>
+        </a:solidFill>
+        <a:gradFill rotWithShape="1">
+          <a:gsLst>
+            <a:gs pos="0">
+              <a:schemeClr val="phClr">
+                <a:tint val="93000"/>
+                <a:satMod val="150000"/>
+                <a:shade val="98000"/>
+                <a:lumMod val="102000"/>
+              </a:schemeClr>
+            </a:gs>
+            <a:gs pos="50000">
+              <a:schemeClr val="phClr">
+                <a:tint val="98000"/>
+                <a:satMod val="130000"/>
+                <a:shade val="90000"/>
+                <a:lumMod val="103000"/>
+              </a:schemeClr>
+            </a:gs>
+            <a:gs pos="100000">
+              <a:schemeClr val="phClr">
+                <a:shade val="63000"/>
+                <a:satMod val="120000"/>
+              </a:schemeClr>
+            </a:gs>
+          </a:gsLst>
+          <a:lin ang="5400000" scaled="0"/>
+        </a:gradFill>
+      </a:bgFillStyleLst>
+    </a:fmtScheme>
+  </a:themeElements>
+  <a:objectDefaults>
+    <a:lnDef>
+      <a:spPr/>
+      <a:bodyPr/>
+      <a:lstStyle/>
+      <a:style>
+        <a:lnRef idx="2">
+          <a:schemeClr val="accent1"/>
+        </a:lnRef>
+        <a:fillRef idx="0">
+          <a:schemeClr val="accent1"/>
+        </a:fillRef>
+        <a:effectRef idx="1">
+          <a:schemeClr val="accent1"/>
+        </a:effectRef>
+        <a:fontRef idx="minor">
+          <a:schemeClr val="tx1"/>
+        </a:fontRef>
+      </a:style>
+    </a:lnDef>
+  </a:objectDefaults>
+  <a:extraClrSchemeLst/>
+  <a:extLst>
+    <a:ext uri="{05A4C25C-085E-4340-85A3-A5531E510DB2}">
+      <thm15:themeFamily xmlns:thm15="http://schemas.microsoft.com/office/thememl/2012/main" name="Office Theme" id="{2E142A2C-CD16-42D6-873A-C26D2A0506FA}" vid="{1BDDFF52-6CD6-40A5-AB3C-68EB2F1E4D0A}"/>
+    </a:ext>
+  </a:extLst>
+</a:theme>
 </file>